--- a/slides.pptx
+++ b/slides.pptx
@@ -1,35 +1,136 @@
 
 <file path=ppt/presentation.xml><?xml version="1.0" encoding="utf-8"?>
-<p:presentation xmlns:a="http://schemas.openxmlformats.org/drawingml/2006/main" xmlns:p="http://schemas.openxmlformats.org/presentationml/2006/main" xmlns:r="http://schemas.openxmlformats.org/officeDocument/2006/relationships" xmlns:p14="http://schemas.microsoft.com/office/powerpoint/2010/main" xmlns:p15="http://schemas.microsoft.com/office/powerpoint/2012/main" xmlns:mc="http://schemas.openxmlformats.org/markup-compatibility/2006">
+<p:presentation xmlns:a="http://schemas.openxmlformats.org/drawingml/2006/main" xmlns:r="http://schemas.openxmlformats.org/officeDocument/2006/relationships" xmlns:p="http://schemas.openxmlformats.org/presentationml/2006/main">
   <p:sldMasterIdLst>
-    <p:sldMasterId id="2147483648" r:id="rId2"/>
+    <p:sldMasterId id="2147483648" r:id="rId1"/>
   </p:sldMasterIdLst>
   <p:sldIdLst>
-    <p:sldId id="256" r:id="rId3"/>
-    <p:sldId id="257" r:id="rId4"/>
-    <p:sldId id="258" r:id="rId5"/>
-    <p:sldId id="259" r:id="rId6"/>
-    <p:sldId id="260" r:id="rId7"/>
-    <p:sldId id="261" r:id="rId8"/>
-    <p:sldId id="262" r:id="rId9"/>
-    <p:sldId id="263" r:id="rId10"/>
-    <p:sldId id="264" r:id="rId11"/>
-    <p:sldId id="265" r:id="rId12"/>
-    <p:sldId id="266" r:id="rId13"/>
+    <p:sldId id="256" r:id="rId2"/>
+    <p:sldId id="257" r:id="rId3"/>
+    <p:sldId id="258" r:id="rId4"/>
+    <p:sldId id="259" r:id="rId5"/>
+    <p:sldId id="260" r:id="rId6"/>
+    <p:sldId id="261" r:id="rId7"/>
+    <p:sldId id="262" r:id="rId8"/>
+    <p:sldId id="263" r:id="rId9"/>
+    <p:sldId id="264" r:id="rId10"/>
+    <p:sldId id="265" r:id="rId11"/>
+    <p:sldId id="266" r:id="rId12"/>
   </p:sldIdLst>
   <p:sldSz cx="12192000" cy="6858000"/>
   <p:notesSz cx="7559675" cy="10691813"/>
+  <p:defaultTextStyle>
+    <a:defPPr>
+      <a:defRPr lang="en-US"/>
+    </a:defPPr>
+    <a:lvl1pPr marL="0" algn="l" defTabSz="914400" rtl="0" eaLnBrk="1" latinLnBrk="0" hangingPunct="1">
+      <a:defRPr sz="1800" kern="1200">
+        <a:solidFill>
+          <a:schemeClr val="tx1"/>
+        </a:solidFill>
+        <a:latin typeface="+mn-lt"/>
+        <a:ea typeface="+mn-ea"/>
+        <a:cs typeface="+mn-cs"/>
+      </a:defRPr>
+    </a:lvl1pPr>
+    <a:lvl2pPr marL="457200" algn="l" defTabSz="914400" rtl="0" eaLnBrk="1" latinLnBrk="0" hangingPunct="1">
+      <a:defRPr sz="1800" kern="1200">
+        <a:solidFill>
+          <a:schemeClr val="tx1"/>
+        </a:solidFill>
+        <a:latin typeface="+mn-lt"/>
+        <a:ea typeface="+mn-ea"/>
+        <a:cs typeface="+mn-cs"/>
+      </a:defRPr>
+    </a:lvl2pPr>
+    <a:lvl3pPr marL="914400" algn="l" defTabSz="914400" rtl="0" eaLnBrk="1" latinLnBrk="0" hangingPunct="1">
+      <a:defRPr sz="1800" kern="1200">
+        <a:solidFill>
+          <a:schemeClr val="tx1"/>
+        </a:solidFill>
+        <a:latin typeface="+mn-lt"/>
+        <a:ea typeface="+mn-ea"/>
+        <a:cs typeface="+mn-cs"/>
+      </a:defRPr>
+    </a:lvl3pPr>
+    <a:lvl4pPr marL="1371600" algn="l" defTabSz="914400" rtl="0" eaLnBrk="1" latinLnBrk="0" hangingPunct="1">
+      <a:defRPr sz="1800" kern="1200">
+        <a:solidFill>
+          <a:schemeClr val="tx1"/>
+        </a:solidFill>
+        <a:latin typeface="+mn-lt"/>
+        <a:ea typeface="+mn-ea"/>
+        <a:cs typeface="+mn-cs"/>
+      </a:defRPr>
+    </a:lvl4pPr>
+    <a:lvl5pPr marL="1828800" algn="l" defTabSz="914400" rtl="0" eaLnBrk="1" latinLnBrk="0" hangingPunct="1">
+      <a:defRPr sz="1800" kern="1200">
+        <a:solidFill>
+          <a:schemeClr val="tx1"/>
+        </a:solidFill>
+        <a:latin typeface="+mn-lt"/>
+        <a:ea typeface="+mn-ea"/>
+        <a:cs typeface="+mn-cs"/>
+      </a:defRPr>
+    </a:lvl5pPr>
+    <a:lvl6pPr marL="2286000" algn="l" defTabSz="914400" rtl="0" eaLnBrk="1" latinLnBrk="0" hangingPunct="1">
+      <a:defRPr sz="1800" kern="1200">
+        <a:solidFill>
+          <a:schemeClr val="tx1"/>
+        </a:solidFill>
+        <a:latin typeface="+mn-lt"/>
+        <a:ea typeface="+mn-ea"/>
+        <a:cs typeface="+mn-cs"/>
+      </a:defRPr>
+    </a:lvl6pPr>
+    <a:lvl7pPr marL="2743200" algn="l" defTabSz="914400" rtl="0" eaLnBrk="1" latinLnBrk="0" hangingPunct="1">
+      <a:defRPr sz="1800" kern="1200">
+        <a:solidFill>
+          <a:schemeClr val="tx1"/>
+        </a:solidFill>
+        <a:latin typeface="+mn-lt"/>
+        <a:ea typeface="+mn-ea"/>
+        <a:cs typeface="+mn-cs"/>
+      </a:defRPr>
+    </a:lvl7pPr>
+    <a:lvl8pPr marL="3200400" algn="l" defTabSz="914400" rtl="0" eaLnBrk="1" latinLnBrk="0" hangingPunct="1">
+      <a:defRPr sz="1800" kern="1200">
+        <a:solidFill>
+          <a:schemeClr val="tx1"/>
+        </a:solidFill>
+        <a:latin typeface="+mn-lt"/>
+        <a:ea typeface="+mn-ea"/>
+        <a:cs typeface="+mn-cs"/>
+      </a:defRPr>
+    </a:lvl8pPr>
+    <a:lvl9pPr marL="3657600" algn="l" defTabSz="914400" rtl="0" eaLnBrk="1" latinLnBrk="0" hangingPunct="1">
+      <a:defRPr sz="1800" kern="1200">
+        <a:solidFill>
+          <a:schemeClr val="tx1"/>
+        </a:solidFill>
+        <a:latin typeface="+mn-lt"/>
+        <a:ea typeface="+mn-ea"/>
+        <a:cs typeface="+mn-cs"/>
+      </a:defRPr>
+    </a:lvl9pPr>
+  </p:defaultTextStyle>
+  <p:extLst>
+    <p:ext uri="{EFAFB233-063F-42B5-8137-9DF3F51BA10A}">
+      <p15:sldGuideLst xmlns:p15="http://schemas.microsoft.com/office/powerpoint/2012/main"/>
+    </p:ext>
+  </p:extLst>
 </p:presentation>
 </file>
 
 <file path=ppt/slideLayouts/slideLayout1.xml><?xml version="1.0" encoding="utf-8"?>
-<p:sldLayout xmlns:a="http://schemas.openxmlformats.org/drawingml/2006/main" xmlns:p="http://schemas.openxmlformats.org/presentationml/2006/main" xmlns:r="http://schemas.openxmlformats.org/officeDocument/2006/relationships" xmlns:p14="http://schemas.microsoft.com/office/powerpoint/2010/main" xmlns:p15="http://schemas.microsoft.com/office/powerpoint/2012/main" xmlns:mc="http://schemas.openxmlformats.org/markup-compatibility/2006" type="title" preserve="1">
+<p:sldLayout xmlns:a="http://schemas.openxmlformats.org/drawingml/2006/main" xmlns:r="http://schemas.openxmlformats.org/officeDocument/2006/relationships" xmlns:p="http://schemas.openxmlformats.org/presentationml/2006/main" type="title" preserve="1">
   <p:cSld name="Title Slide">
     <p:bg>
       <p:bgPr>
         <a:solidFill>
-          <a:srgbClr val="ffffff"/>
+          <a:srgbClr val="FFFFFF"/>
         </a:solidFill>
+        <a:effectLst/>
       </p:bgPr>
     </p:bg>
     <p:spTree>
@@ -70,9 +171,10 @@
           </a:ln>
         </p:spPr>
         <p:txBody>
-          <a:bodyPr lIns="91440" rIns="91440" tIns="45720" bIns="45720" anchor="ctr">
+          <a:bodyPr lIns="91440" tIns="45720" rIns="91440" bIns="45720" anchor="ctr">
             <a:noAutofit/>
           </a:bodyPr>
+          <a:lstStyle/>
           <a:p>
             <a:pPr indent="0" algn="ctr" defTabSz="457200">
               <a:lnSpc>
@@ -91,14 +193,6 @@
               </a:rPr>
               <a:t>Click to edit Master title style</a:t>
             </a:r>
-            <a:endParaRPr lang="en-US" sz="4400" b="0" u="none" strike="noStrike">
-              <a:solidFill>
-                <a:schemeClr val="dk1"/>
-              </a:solidFill>
-              <a:effectLst/>
-              <a:uFillTx/>
-              <a:latin typeface="Calibri"/>
-            </a:endParaRPr>
           </a:p>
         </p:txBody>
       </p:sp>
@@ -126,7 +220,7 @@
           </a:ln>
         </p:spPr>
         <p:txBody>
-          <a:bodyPr lIns="91440" rIns="91440" tIns="45720" bIns="45720" anchor="ctr">
+          <a:bodyPr lIns="91440" tIns="45720" rIns="91440" bIns="45720" anchor="ctr">
             <a:noAutofit/>
           </a:bodyPr>
           <a:lstStyle>
@@ -202,7 +296,7 @@
           </a:ln>
         </p:spPr>
         <p:txBody>
-          <a:bodyPr lIns="91440" rIns="91440" tIns="45720" bIns="45720" anchor="ctr">
+          <a:bodyPr lIns="91440" tIns="45720" rIns="91440" bIns="45720" anchor="ctr">
             <a:noAutofit/>
           </a:bodyPr>
           <a:lstStyle>
@@ -233,14 +327,6 @@
               </a:rPr>
               <a:t>&lt;footer&gt;</a:t>
             </a:r>
-            <a:endParaRPr lang="en-IN" sz="1400" b="0" u="none" strike="noStrike">
-              <a:solidFill>
-                <a:srgbClr val="000000"/>
-              </a:solidFill>
-              <a:effectLst/>
-              <a:uFillTx/>
-              <a:latin typeface="Times New Roman"/>
-            </a:endParaRPr>
           </a:p>
         </p:txBody>
       </p:sp>
@@ -268,7 +354,7 @@
           </a:ln>
         </p:spPr>
         <p:txBody>
-          <a:bodyPr lIns="91440" rIns="91440" tIns="45720" bIns="45720" anchor="ctr">
+          <a:bodyPr lIns="91440" tIns="45720" rIns="91440" bIns="45720" anchor="ctr">
             <a:noAutofit/>
           </a:bodyPr>
           <a:lstStyle>
@@ -307,7 +393,7 @@
                 <a:uFillTx/>
                 <a:latin typeface="Calibri"/>
               </a:rPr>
-              <a:t>&lt;number&gt;</a:t>
+              <a:t>‹#›</a:t>
             </a:fld>
             <a:endParaRPr lang="en-IN" sz="1200" b="0" u="none" strike="noStrike">
               <a:solidFill>
@@ -322,17 +408,21 @@
       </p:sp>
     </p:spTree>
   </p:cSld>
+  <p:clrMapOvr>
+    <a:masterClrMapping/>
+  </p:clrMapOvr>
 </p:sldLayout>
 </file>
 
 <file path=ppt/slideLayouts/slideLayout10.xml><?xml version="1.0" encoding="utf-8"?>
-<p:sldLayout xmlns:a="http://schemas.openxmlformats.org/drawingml/2006/main" xmlns:p="http://schemas.openxmlformats.org/presentationml/2006/main" xmlns:r="http://schemas.openxmlformats.org/officeDocument/2006/relationships" xmlns:p14="http://schemas.microsoft.com/office/powerpoint/2010/main" xmlns:p15="http://schemas.microsoft.com/office/powerpoint/2012/main" xmlns:mc="http://schemas.openxmlformats.org/markup-compatibility/2006" type="blank" preserve="1">
+<p:sldLayout xmlns:a="http://schemas.openxmlformats.org/drawingml/2006/main" xmlns:r="http://schemas.openxmlformats.org/officeDocument/2006/relationships" xmlns:p="http://schemas.openxmlformats.org/presentationml/2006/main" type="blank" preserve="1">
   <p:cSld name="Content with Caption">
     <p:bg>
       <p:bgPr>
         <a:solidFill>
-          <a:srgbClr val="ffffff"/>
+          <a:srgbClr val="FFFFFF"/>
         </a:solidFill>
+        <a:effectLst/>
       </p:bgPr>
     </p:bg>
     <p:spTree>
@@ -373,9 +463,10 @@
           </a:ln>
         </p:spPr>
         <p:txBody>
-          <a:bodyPr lIns="91440" rIns="91440" tIns="45720" bIns="45720" anchor="b">
+          <a:bodyPr lIns="91440" tIns="45720" rIns="91440" bIns="45720" anchor="b">
             <a:noAutofit/>
           </a:bodyPr>
+          <a:lstStyle/>
           <a:p>
             <a:pPr indent="0" defTabSz="457200">
               <a:lnSpc>
@@ -429,9 +520,10 @@
           </a:ln>
         </p:spPr>
         <p:txBody>
-          <a:bodyPr lIns="91440" rIns="91440" tIns="45720" bIns="45720" anchor="t">
+          <a:bodyPr lIns="91440" tIns="45720" rIns="91440" bIns="45720" anchor="t">
             <a:noAutofit/>
           </a:bodyPr>
+          <a:lstStyle/>
           <a:p>
             <a:pPr marL="343080" indent="-343080" defTabSz="457200">
               <a:lnSpc>
@@ -457,14 +549,6 @@
               </a:rPr>
               <a:t>Click to edit Master text styles</a:t>
             </a:r>
-            <a:endParaRPr lang="en-US" sz="3200" b="0" u="none" strike="noStrike">
-              <a:solidFill>
-                <a:schemeClr val="dk1"/>
-              </a:solidFill>
-              <a:effectLst/>
-              <a:uFillTx/>
-              <a:latin typeface="Calibri"/>
-            </a:endParaRPr>
           </a:p>
           <a:p>
             <a:pPr marL="743040" lvl="1" indent="-285840" defTabSz="457200">
@@ -491,14 +575,6 @@
               </a:rPr>
               <a:t>Second level</a:t>
             </a:r>
-            <a:endParaRPr lang="en-US" sz="2800" b="0" u="none" strike="noStrike">
-              <a:solidFill>
-                <a:schemeClr val="dk1"/>
-              </a:solidFill>
-              <a:effectLst/>
-              <a:uFillTx/>
-              <a:latin typeface="Calibri"/>
-            </a:endParaRPr>
           </a:p>
           <a:p>
             <a:pPr marL="1143000" lvl="2" indent="-228600" defTabSz="457200">
@@ -525,14 +601,6 @@
               </a:rPr>
               <a:t>Third level</a:t>
             </a:r>
-            <a:endParaRPr lang="en-US" sz="2400" b="0" u="none" strike="noStrike">
-              <a:solidFill>
-                <a:schemeClr val="dk1"/>
-              </a:solidFill>
-              <a:effectLst/>
-              <a:uFillTx/>
-              <a:latin typeface="Calibri"/>
-            </a:endParaRPr>
           </a:p>
           <a:p>
             <a:pPr marL="1600200" lvl="3" indent="-228600" defTabSz="457200">
@@ -559,14 +627,6 @@
               </a:rPr>
               <a:t>Fourth level</a:t>
             </a:r>
-            <a:endParaRPr lang="en-US" sz="2000" b="0" u="none" strike="noStrike">
-              <a:solidFill>
-                <a:schemeClr val="dk1"/>
-              </a:solidFill>
-              <a:effectLst/>
-              <a:uFillTx/>
-              <a:latin typeface="Calibri"/>
-            </a:endParaRPr>
           </a:p>
           <a:p>
             <a:pPr marL="2057400" lvl="4" indent="-228600" defTabSz="457200">
@@ -593,14 +653,6 @@
               </a:rPr>
               <a:t>Fifth level</a:t>
             </a:r>
-            <a:endParaRPr lang="en-US" sz="2000" b="0" u="none" strike="noStrike">
-              <a:solidFill>
-                <a:schemeClr val="dk1"/>
-              </a:solidFill>
-              <a:effectLst/>
-              <a:uFillTx/>
-              <a:latin typeface="Calibri"/>
-            </a:endParaRPr>
           </a:p>
         </p:txBody>
       </p:sp>
@@ -628,9 +680,10 @@
           </a:ln>
         </p:spPr>
         <p:txBody>
-          <a:bodyPr lIns="91440" rIns="91440" tIns="45720" bIns="45720" anchor="t">
+          <a:bodyPr lIns="91440" tIns="45720" rIns="91440" bIns="45720" anchor="t">
             <a:noAutofit/>
           </a:bodyPr>
+          <a:lstStyle/>
           <a:p>
             <a:pPr indent="0" defTabSz="457200">
               <a:lnSpc>
@@ -641,7 +694,7 @@
               </a:spcBef>
               <a:buNone/>
               <a:tabLst>
-                <a:tab algn="l" pos="0"/>
+                <a:tab pos="0" algn="l"/>
               </a:tabLst>
             </a:pPr>
             <a:r>
@@ -655,14 +708,6 @@
               </a:rPr>
               <a:t>Click to edit Master text styles</a:t>
             </a:r>
-            <a:endParaRPr lang="en-US" sz="1400" b="0" u="none" strike="noStrike">
-              <a:solidFill>
-                <a:schemeClr val="dk1"/>
-              </a:solidFill>
-              <a:effectLst/>
-              <a:uFillTx/>
-              <a:latin typeface="Calibri"/>
-            </a:endParaRPr>
           </a:p>
         </p:txBody>
       </p:sp>
@@ -690,7 +735,7 @@
           </a:ln>
         </p:spPr>
         <p:txBody>
-          <a:bodyPr lIns="91440" rIns="91440" tIns="45720" bIns="45720" anchor="ctr">
+          <a:bodyPr lIns="91440" tIns="45720" rIns="91440" bIns="45720" anchor="ctr">
             <a:noAutofit/>
           </a:bodyPr>
           <a:lstStyle>
@@ -766,7 +811,7 @@
           </a:ln>
         </p:spPr>
         <p:txBody>
-          <a:bodyPr lIns="91440" rIns="91440" tIns="45720" bIns="45720" anchor="ctr">
+          <a:bodyPr lIns="91440" tIns="45720" rIns="91440" bIns="45720" anchor="ctr">
             <a:noAutofit/>
           </a:bodyPr>
           <a:lstStyle>
@@ -797,14 +842,6 @@
               </a:rPr>
               <a:t>&lt;footer&gt;</a:t>
             </a:r>
-            <a:endParaRPr lang="en-IN" sz="1400" b="0" u="none" strike="noStrike">
-              <a:solidFill>
-                <a:srgbClr val="000000"/>
-              </a:solidFill>
-              <a:effectLst/>
-              <a:uFillTx/>
-              <a:latin typeface="Times New Roman"/>
-            </a:endParaRPr>
           </a:p>
         </p:txBody>
       </p:sp>
@@ -832,7 +869,7 @@
           </a:ln>
         </p:spPr>
         <p:txBody>
-          <a:bodyPr lIns="91440" rIns="91440" tIns="45720" bIns="45720" anchor="ctr">
+          <a:bodyPr lIns="91440" tIns="45720" rIns="91440" bIns="45720" anchor="ctr">
             <a:noAutofit/>
           </a:bodyPr>
           <a:lstStyle>
@@ -871,7 +908,7 @@
                 <a:uFillTx/>
                 <a:latin typeface="Calibri"/>
               </a:rPr>
-              <a:t>&lt;number&gt;</a:t>
+              <a:t>‹#›</a:t>
             </a:fld>
             <a:endParaRPr lang="en-IN" sz="1200" b="0" u="none" strike="noStrike">
               <a:solidFill>
@@ -886,17 +923,21 @@
       </p:sp>
     </p:spTree>
   </p:cSld>
+  <p:clrMapOvr>
+    <a:masterClrMapping/>
+  </p:clrMapOvr>
 </p:sldLayout>
 </file>
 
 <file path=ppt/slideLayouts/slideLayout11.xml><?xml version="1.0" encoding="utf-8"?>
-<p:sldLayout xmlns:a="http://schemas.openxmlformats.org/drawingml/2006/main" xmlns:p="http://schemas.openxmlformats.org/presentationml/2006/main" xmlns:r="http://schemas.openxmlformats.org/officeDocument/2006/relationships" xmlns:p14="http://schemas.microsoft.com/office/powerpoint/2010/main" xmlns:p15="http://schemas.microsoft.com/office/powerpoint/2012/main" xmlns:mc="http://schemas.openxmlformats.org/markup-compatibility/2006" type="blank" preserve="1">
+<p:sldLayout xmlns:a="http://schemas.openxmlformats.org/drawingml/2006/main" xmlns:r="http://schemas.openxmlformats.org/officeDocument/2006/relationships" xmlns:p="http://schemas.openxmlformats.org/presentationml/2006/main" type="blank" preserve="1">
   <p:cSld name="Picture with Caption">
     <p:bg>
       <p:bgPr>
         <a:solidFill>
-          <a:srgbClr val="ffffff"/>
+          <a:srgbClr val="FFFFFF"/>
         </a:solidFill>
+        <a:effectLst/>
       </p:bgPr>
     </p:bg>
     <p:spTree>
@@ -937,9 +978,10 @@
           </a:ln>
         </p:spPr>
         <p:txBody>
-          <a:bodyPr lIns="91440" rIns="91440" tIns="45720" bIns="45720" anchor="b">
+          <a:bodyPr lIns="91440" tIns="45720" rIns="91440" bIns="45720" anchor="b">
             <a:noAutofit/>
           </a:bodyPr>
+          <a:lstStyle/>
           <a:p>
             <a:pPr indent="0" defTabSz="457200">
               <a:lnSpc>
@@ -993,9 +1035,10 @@
           </a:ln>
         </p:spPr>
         <p:txBody>
-          <a:bodyPr lIns="90000" rIns="90000" tIns="45000" bIns="45000" anchor="t">
+          <a:bodyPr lIns="90000" tIns="45000" rIns="90000" bIns="45000" anchor="t">
             <a:noAutofit/>
           </a:bodyPr>
+          <a:lstStyle/>
           <a:p>
             <a:pPr marL="432000" indent="-324000">
               <a:spcBef>
@@ -1019,14 +1062,6 @@
               </a:rPr>
               <a:t>Click to edit the outline text format</a:t>
             </a:r>
-            <a:endParaRPr lang="en-US" sz="3200" b="0" u="none" strike="noStrike">
-              <a:solidFill>
-                <a:schemeClr val="dk1"/>
-              </a:solidFill>
-              <a:effectLst/>
-              <a:uFillTx/>
-              <a:latin typeface="Calibri"/>
-            </a:endParaRPr>
           </a:p>
           <a:p>
             <a:pPr marL="864000" lvl="1" indent="-324000">
@@ -1051,14 +1086,6 @@
               </a:rPr>
               <a:t>Second Outline Level</a:t>
             </a:r>
-            <a:endParaRPr lang="en-US" sz="3200" b="0" u="none" strike="noStrike">
-              <a:solidFill>
-                <a:schemeClr val="dk1"/>
-              </a:solidFill>
-              <a:effectLst/>
-              <a:uFillTx/>
-              <a:latin typeface="Calibri"/>
-            </a:endParaRPr>
           </a:p>
           <a:p>
             <a:pPr marL="1296000" lvl="2" indent="-288000">
@@ -1083,14 +1110,6 @@
               </a:rPr>
               <a:t>Third Outline Level</a:t>
             </a:r>
-            <a:endParaRPr lang="en-US" sz="3200" b="0" u="none" strike="noStrike">
-              <a:solidFill>
-                <a:schemeClr val="dk1"/>
-              </a:solidFill>
-              <a:effectLst/>
-              <a:uFillTx/>
-              <a:latin typeface="Calibri"/>
-            </a:endParaRPr>
           </a:p>
           <a:p>
             <a:pPr marL="1728000" lvl="3" indent="-216000">
@@ -1115,14 +1134,6 @@
               </a:rPr>
               <a:t>Fourth Outline Level</a:t>
             </a:r>
-            <a:endParaRPr lang="en-US" sz="3200" b="0" u="none" strike="noStrike">
-              <a:solidFill>
-                <a:schemeClr val="dk1"/>
-              </a:solidFill>
-              <a:effectLst/>
-              <a:uFillTx/>
-              <a:latin typeface="Calibri"/>
-            </a:endParaRPr>
           </a:p>
           <a:p>
             <a:pPr marL="2160000" lvl="4" indent="-216000">
@@ -1147,14 +1158,6 @@
               </a:rPr>
               <a:t>Fifth Outline Level</a:t>
             </a:r>
-            <a:endParaRPr lang="en-US" sz="3200" b="0" u="none" strike="noStrike">
-              <a:solidFill>
-                <a:schemeClr val="dk1"/>
-              </a:solidFill>
-              <a:effectLst/>
-              <a:uFillTx/>
-              <a:latin typeface="Calibri"/>
-            </a:endParaRPr>
           </a:p>
           <a:p>
             <a:pPr marL="2592000" lvl="5" indent="-216000">
@@ -1179,14 +1182,6 @@
               </a:rPr>
               <a:t>Sixth Outline Level</a:t>
             </a:r>
-            <a:endParaRPr lang="en-US" sz="3200" b="0" u="none" strike="noStrike">
-              <a:solidFill>
-                <a:schemeClr val="dk1"/>
-              </a:solidFill>
-              <a:effectLst/>
-              <a:uFillTx/>
-              <a:latin typeface="Calibri"/>
-            </a:endParaRPr>
           </a:p>
           <a:p>
             <a:pPr marL="3024000" lvl="6" indent="-216000">
@@ -1211,14 +1206,6 @@
               </a:rPr>
               <a:t>Seventh Outline Level</a:t>
             </a:r>
-            <a:endParaRPr lang="en-US" sz="3200" b="0" u="none" strike="noStrike">
-              <a:solidFill>
-                <a:schemeClr val="dk1"/>
-              </a:solidFill>
-              <a:effectLst/>
-              <a:uFillTx/>
-              <a:latin typeface="Calibri"/>
-            </a:endParaRPr>
           </a:p>
         </p:txBody>
       </p:sp>
@@ -1246,9 +1233,10 @@
           </a:ln>
         </p:spPr>
         <p:txBody>
-          <a:bodyPr lIns="91440" rIns="91440" tIns="45720" bIns="45720" anchor="t">
+          <a:bodyPr lIns="91440" tIns="45720" rIns="91440" bIns="45720" anchor="t">
             <a:noAutofit/>
           </a:bodyPr>
+          <a:lstStyle/>
           <a:p>
             <a:pPr indent="0" defTabSz="457200">
               <a:lnSpc>
@@ -1259,7 +1247,7 @@
               </a:spcBef>
               <a:buNone/>
               <a:tabLst>
-                <a:tab algn="l" pos="0"/>
+                <a:tab pos="0" algn="l"/>
               </a:tabLst>
             </a:pPr>
             <a:r>
@@ -1273,14 +1261,6 @@
               </a:rPr>
               <a:t>Click to edit Master text styles</a:t>
             </a:r>
-            <a:endParaRPr lang="en-US" sz="1400" b="0" u="none" strike="noStrike">
-              <a:solidFill>
-                <a:schemeClr val="dk1"/>
-              </a:solidFill>
-              <a:effectLst/>
-              <a:uFillTx/>
-              <a:latin typeface="Calibri"/>
-            </a:endParaRPr>
           </a:p>
         </p:txBody>
       </p:sp>
@@ -1308,7 +1288,7 @@
           </a:ln>
         </p:spPr>
         <p:txBody>
-          <a:bodyPr lIns="91440" rIns="91440" tIns="45720" bIns="45720" anchor="ctr">
+          <a:bodyPr lIns="91440" tIns="45720" rIns="91440" bIns="45720" anchor="ctr">
             <a:noAutofit/>
           </a:bodyPr>
           <a:lstStyle>
@@ -1384,7 +1364,7 @@
           </a:ln>
         </p:spPr>
         <p:txBody>
-          <a:bodyPr lIns="91440" rIns="91440" tIns="45720" bIns="45720" anchor="ctr">
+          <a:bodyPr lIns="91440" tIns="45720" rIns="91440" bIns="45720" anchor="ctr">
             <a:noAutofit/>
           </a:bodyPr>
           <a:lstStyle>
@@ -1415,14 +1395,6 @@
               </a:rPr>
               <a:t>&lt;footer&gt;</a:t>
             </a:r>
-            <a:endParaRPr lang="en-IN" sz="1400" b="0" u="none" strike="noStrike">
-              <a:solidFill>
-                <a:srgbClr val="000000"/>
-              </a:solidFill>
-              <a:effectLst/>
-              <a:uFillTx/>
-              <a:latin typeface="Times New Roman"/>
-            </a:endParaRPr>
           </a:p>
         </p:txBody>
       </p:sp>
@@ -1450,7 +1422,7 @@
           </a:ln>
         </p:spPr>
         <p:txBody>
-          <a:bodyPr lIns="91440" rIns="91440" tIns="45720" bIns="45720" anchor="ctr">
+          <a:bodyPr lIns="91440" tIns="45720" rIns="91440" bIns="45720" anchor="ctr">
             <a:noAutofit/>
           </a:bodyPr>
           <a:lstStyle>
@@ -1489,7 +1461,7 @@
                 <a:uFillTx/>
                 <a:latin typeface="Calibri"/>
               </a:rPr>
-              <a:t>&lt;number&gt;</a:t>
+              <a:t>‹#›</a:t>
             </a:fld>
             <a:endParaRPr lang="en-IN" sz="1200" b="0" u="none" strike="noStrike">
               <a:solidFill>
@@ -1504,17 +1476,21 @@
       </p:sp>
     </p:spTree>
   </p:cSld>
+  <p:clrMapOvr>
+    <a:masterClrMapping/>
+  </p:clrMapOvr>
 </p:sldLayout>
 </file>
 
 <file path=ppt/slideLayouts/slideLayout2.xml><?xml version="1.0" encoding="utf-8"?>
-<p:sldLayout xmlns:a="http://schemas.openxmlformats.org/drawingml/2006/main" xmlns:p="http://schemas.openxmlformats.org/presentationml/2006/main" xmlns:r="http://schemas.openxmlformats.org/officeDocument/2006/relationships" xmlns:p14="http://schemas.microsoft.com/office/powerpoint/2010/main" xmlns:p15="http://schemas.microsoft.com/office/powerpoint/2012/main" xmlns:mc="http://schemas.openxmlformats.org/markup-compatibility/2006" type="vertTx" preserve="1">
+<p:sldLayout xmlns:a="http://schemas.openxmlformats.org/drawingml/2006/main" xmlns:r="http://schemas.openxmlformats.org/officeDocument/2006/relationships" xmlns:p="http://schemas.openxmlformats.org/presentationml/2006/main" type="vertTx" preserve="1">
   <p:cSld name="Title and Vertical Text">
     <p:bg>
       <p:bgPr>
         <a:solidFill>
-          <a:srgbClr val="ffffff"/>
+          <a:srgbClr val="FFFFFF"/>
         </a:solidFill>
+        <a:effectLst/>
       </p:bgPr>
     </p:bg>
     <p:spTree>
@@ -1555,9 +1531,10 @@
           </a:ln>
         </p:spPr>
         <p:txBody>
-          <a:bodyPr lIns="91440" rIns="91440" tIns="45720" bIns="45720" anchor="ctr">
+          <a:bodyPr lIns="91440" tIns="45720" rIns="91440" bIns="45720" anchor="ctr">
             <a:noAutofit/>
           </a:bodyPr>
+          <a:lstStyle/>
           <a:p>
             <a:pPr indent="0" algn="ctr" defTabSz="457200">
               <a:lnSpc>
@@ -1576,14 +1553,6 @@
               </a:rPr>
               <a:t>Click to edit Master title style</a:t>
             </a:r>
-            <a:endParaRPr lang="en-US" sz="4400" b="0" u="none" strike="noStrike">
-              <a:solidFill>
-                <a:schemeClr val="dk1"/>
-              </a:solidFill>
-              <a:effectLst/>
-              <a:uFillTx/>
-              <a:latin typeface="Calibri"/>
-            </a:endParaRPr>
           </a:p>
         </p:txBody>
       </p:sp>
@@ -1611,9 +1580,10 @@
           </a:ln>
         </p:spPr>
         <p:txBody>
-          <a:bodyPr lIns="91440" rIns="91440" tIns="45720" bIns="45720" anchor="t" vert="eaVert">
+          <a:bodyPr vert="eaVert" lIns="91440" tIns="45720" rIns="91440" bIns="45720" anchor="t">
             <a:noAutofit/>
           </a:bodyPr>
+          <a:lstStyle/>
           <a:p>
             <a:pPr marL="343080" indent="-343080" defTabSz="457200">
               <a:lnSpc>
@@ -1639,14 +1609,6 @@
               </a:rPr>
               <a:t>Click to edit Master text styles</a:t>
             </a:r>
-            <a:endParaRPr lang="en-US" sz="3200" b="0" u="none" strike="noStrike">
-              <a:solidFill>
-                <a:schemeClr val="dk1"/>
-              </a:solidFill>
-              <a:effectLst/>
-              <a:uFillTx/>
-              <a:latin typeface="Calibri"/>
-            </a:endParaRPr>
           </a:p>
           <a:p>
             <a:pPr marL="743040" lvl="1" indent="-285840" defTabSz="457200">
@@ -1673,14 +1635,6 @@
               </a:rPr>
               <a:t>Second level</a:t>
             </a:r>
-            <a:endParaRPr lang="en-US" sz="2800" b="0" u="none" strike="noStrike">
-              <a:solidFill>
-                <a:schemeClr val="dk1"/>
-              </a:solidFill>
-              <a:effectLst/>
-              <a:uFillTx/>
-              <a:latin typeface="Calibri"/>
-            </a:endParaRPr>
           </a:p>
           <a:p>
             <a:pPr marL="1143000" lvl="2" indent="-228600" defTabSz="457200">
@@ -1707,14 +1661,6 @@
               </a:rPr>
               <a:t>Third level</a:t>
             </a:r>
-            <a:endParaRPr lang="en-US" sz="2400" b="0" u="none" strike="noStrike">
-              <a:solidFill>
-                <a:schemeClr val="dk1"/>
-              </a:solidFill>
-              <a:effectLst/>
-              <a:uFillTx/>
-              <a:latin typeface="Calibri"/>
-            </a:endParaRPr>
           </a:p>
           <a:p>
             <a:pPr marL="1600200" lvl="3" indent="-228600" defTabSz="457200">
@@ -1741,14 +1687,6 @@
               </a:rPr>
               <a:t>Fourth level</a:t>
             </a:r>
-            <a:endParaRPr lang="en-US" sz="2000" b="0" u="none" strike="noStrike">
-              <a:solidFill>
-                <a:schemeClr val="dk1"/>
-              </a:solidFill>
-              <a:effectLst/>
-              <a:uFillTx/>
-              <a:latin typeface="Calibri"/>
-            </a:endParaRPr>
           </a:p>
           <a:p>
             <a:pPr marL="2057400" lvl="4" indent="-228600" defTabSz="457200">
@@ -1775,14 +1713,6 @@
               </a:rPr>
               <a:t>Fifth level</a:t>
             </a:r>
-            <a:endParaRPr lang="en-US" sz="2000" b="0" u="none" strike="noStrike">
-              <a:solidFill>
-                <a:schemeClr val="dk1"/>
-              </a:solidFill>
-              <a:effectLst/>
-              <a:uFillTx/>
-              <a:latin typeface="Calibri"/>
-            </a:endParaRPr>
           </a:p>
         </p:txBody>
       </p:sp>
@@ -1810,7 +1740,7 @@
           </a:ln>
         </p:spPr>
         <p:txBody>
-          <a:bodyPr lIns="91440" rIns="91440" tIns="45720" bIns="45720" anchor="ctr">
+          <a:bodyPr lIns="91440" tIns="45720" rIns="91440" bIns="45720" anchor="ctr">
             <a:noAutofit/>
           </a:bodyPr>
           <a:lstStyle>
@@ -1886,7 +1816,7 @@
           </a:ln>
         </p:spPr>
         <p:txBody>
-          <a:bodyPr lIns="91440" rIns="91440" tIns="45720" bIns="45720" anchor="ctr">
+          <a:bodyPr lIns="91440" tIns="45720" rIns="91440" bIns="45720" anchor="ctr">
             <a:noAutofit/>
           </a:bodyPr>
           <a:lstStyle>
@@ -1917,14 +1847,6 @@
               </a:rPr>
               <a:t>&lt;footer&gt;</a:t>
             </a:r>
-            <a:endParaRPr lang="en-IN" sz="1400" b="0" u="none" strike="noStrike">
-              <a:solidFill>
-                <a:srgbClr val="000000"/>
-              </a:solidFill>
-              <a:effectLst/>
-              <a:uFillTx/>
-              <a:latin typeface="Times New Roman"/>
-            </a:endParaRPr>
           </a:p>
         </p:txBody>
       </p:sp>
@@ -1952,7 +1874,7 @@
           </a:ln>
         </p:spPr>
         <p:txBody>
-          <a:bodyPr lIns="91440" rIns="91440" tIns="45720" bIns="45720" anchor="ctr">
+          <a:bodyPr lIns="91440" tIns="45720" rIns="91440" bIns="45720" anchor="ctr">
             <a:noAutofit/>
           </a:bodyPr>
           <a:lstStyle>
@@ -1991,7 +1913,7 @@
                 <a:uFillTx/>
                 <a:latin typeface="Calibri"/>
               </a:rPr>
-              <a:t>&lt;number&gt;</a:t>
+              <a:t>‹#›</a:t>
             </a:fld>
             <a:endParaRPr lang="en-IN" sz="1200" b="0" u="none" strike="noStrike">
               <a:solidFill>
@@ -2006,17 +1928,21 @@
       </p:sp>
     </p:spTree>
   </p:cSld>
+  <p:clrMapOvr>
+    <a:masterClrMapping/>
+  </p:clrMapOvr>
 </p:sldLayout>
 </file>
 
 <file path=ppt/slideLayouts/slideLayout3.xml><?xml version="1.0" encoding="utf-8"?>
-<p:sldLayout xmlns:a="http://schemas.openxmlformats.org/drawingml/2006/main" xmlns:p="http://schemas.openxmlformats.org/presentationml/2006/main" xmlns:r="http://schemas.openxmlformats.org/officeDocument/2006/relationships" xmlns:p14="http://schemas.microsoft.com/office/powerpoint/2010/main" xmlns:p15="http://schemas.microsoft.com/office/powerpoint/2012/main" xmlns:mc="http://schemas.openxmlformats.org/markup-compatibility/2006" type="vertTitleAndTx" preserve="1">
+<p:sldLayout xmlns:a="http://schemas.openxmlformats.org/drawingml/2006/main" xmlns:r="http://schemas.openxmlformats.org/officeDocument/2006/relationships" xmlns:p="http://schemas.openxmlformats.org/presentationml/2006/main" type="vertTitleAndTx" preserve="1">
   <p:cSld name="Vertical Title and Text">
     <p:bg>
       <p:bgPr>
         <a:solidFill>
-          <a:srgbClr val="ffffff"/>
+          <a:srgbClr val="FFFFFF"/>
         </a:solidFill>
+        <a:effectLst/>
       </p:bgPr>
     </p:bg>
     <p:spTree>
@@ -2057,9 +1983,10 @@
           </a:ln>
         </p:spPr>
         <p:txBody>
-          <a:bodyPr lIns="91440" rIns="91440" tIns="45720" bIns="45720" anchor="ctr" vert="eaVert">
+          <a:bodyPr vert="eaVert" lIns="91440" tIns="45720" rIns="91440" bIns="45720" anchor="ctr">
             <a:noAutofit/>
           </a:bodyPr>
+          <a:lstStyle/>
           <a:p>
             <a:pPr indent="0" algn="ctr" defTabSz="457200">
               <a:lnSpc>
@@ -2078,14 +2005,6 @@
               </a:rPr>
               <a:t>Click to edit Master title style</a:t>
             </a:r>
-            <a:endParaRPr lang="en-US" sz="4400" b="0" u="none" strike="noStrike">
-              <a:solidFill>
-                <a:schemeClr val="dk1"/>
-              </a:solidFill>
-              <a:effectLst/>
-              <a:uFillTx/>
-              <a:latin typeface="Calibri"/>
-            </a:endParaRPr>
           </a:p>
         </p:txBody>
       </p:sp>
@@ -2113,9 +2032,10 @@
           </a:ln>
         </p:spPr>
         <p:txBody>
-          <a:bodyPr lIns="91440" rIns="91440" tIns="45720" bIns="45720" anchor="t" vert="eaVert">
+          <a:bodyPr vert="eaVert" lIns="91440" tIns="45720" rIns="91440" bIns="45720" anchor="t">
             <a:noAutofit/>
           </a:bodyPr>
+          <a:lstStyle/>
           <a:p>
             <a:pPr marL="343080" indent="-343080" defTabSz="457200">
               <a:lnSpc>
@@ -2141,14 +2061,6 @@
               </a:rPr>
               <a:t>Click to edit Master text styles</a:t>
             </a:r>
-            <a:endParaRPr lang="en-US" sz="3200" b="0" u="none" strike="noStrike">
-              <a:solidFill>
-                <a:schemeClr val="dk1"/>
-              </a:solidFill>
-              <a:effectLst/>
-              <a:uFillTx/>
-              <a:latin typeface="Calibri"/>
-            </a:endParaRPr>
           </a:p>
           <a:p>
             <a:pPr marL="743040" lvl="1" indent="-285840" defTabSz="457200">
@@ -2175,14 +2087,6 @@
               </a:rPr>
               <a:t>Second level</a:t>
             </a:r>
-            <a:endParaRPr lang="en-US" sz="2800" b="0" u="none" strike="noStrike">
-              <a:solidFill>
-                <a:schemeClr val="dk1"/>
-              </a:solidFill>
-              <a:effectLst/>
-              <a:uFillTx/>
-              <a:latin typeface="Calibri"/>
-            </a:endParaRPr>
           </a:p>
           <a:p>
             <a:pPr marL="1143000" lvl="2" indent="-228600" defTabSz="457200">
@@ -2209,14 +2113,6 @@
               </a:rPr>
               <a:t>Third level</a:t>
             </a:r>
-            <a:endParaRPr lang="en-US" sz="2400" b="0" u="none" strike="noStrike">
-              <a:solidFill>
-                <a:schemeClr val="dk1"/>
-              </a:solidFill>
-              <a:effectLst/>
-              <a:uFillTx/>
-              <a:latin typeface="Calibri"/>
-            </a:endParaRPr>
           </a:p>
           <a:p>
             <a:pPr marL="1600200" lvl="3" indent="-228600" defTabSz="457200">
@@ -2243,14 +2139,6 @@
               </a:rPr>
               <a:t>Fourth level</a:t>
             </a:r>
-            <a:endParaRPr lang="en-US" sz="2000" b="0" u="none" strike="noStrike">
-              <a:solidFill>
-                <a:schemeClr val="dk1"/>
-              </a:solidFill>
-              <a:effectLst/>
-              <a:uFillTx/>
-              <a:latin typeface="Calibri"/>
-            </a:endParaRPr>
           </a:p>
           <a:p>
             <a:pPr marL="2057400" lvl="4" indent="-228600" defTabSz="457200">
@@ -2277,14 +2165,6 @@
               </a:rPr>
               <a:t>Fifth level</a:t>
             </a:r>
-            <a:endParaRPr lang="en-US" sz="2000" b="0" u="none" strike="noStrike">
-              <a:solidFill>
-                <a:schemeClr val="dk1"/>
-              </a:solidFill>
-              <a:effectLst/>
-              <a:uFillTx/>
-              <a:latin typeface="Calibri"/>
-            </a:endParaRPr>
           </a:p>
         </p:txBody>
       </p:sp>
@@ -2312,7 +2192,7 @@
           </a:ln>
         </p:spPr>
         <p:txBody>
-          <a:bodyPr lIns="91440" rIns="91440" tIns="45720" bIns="45720" anchor="ctr">
+          <a:bodyPr lIns="91440" tIns="45720" rIns="91440" bIns="45720" anchor="ctr">
             <a:noAutofit/>
           </a:bodyPr>
           <a:lstStyle>
@@ -2388,7 +2268,7 @@
           </a:ln>
         </p:spPr>
         <p:txBody>
-          <a:bodyPr lIns="91440" rIns="91440" tIns="45720" bIns="45720" anchor="ctr">
+          <a:bodyPr lIns="91440" tIns="45720" rIns="91440" bIns="45720" anchor="ctr">
             <a:noAutofit/>
           </a:bodyPr>
           <a:lstStyle>
@@ -2419,14 +2299,6 @@
               </a:rPr>
               <a:t>&lt;footer&gt;</a:t>
             </a:r>
-            <a:endParaRPr lang="en-IN" sz="1400" b="0" u="none" strike="noStrike">
-              <a:solidFill>
-                <a:srgbClr val="000000"/>
-              </a:solidFill>
-              <a:effectLst/>
-              <a:uFillTx/>
-              <a:latin typeface="Times New Roman"/>
-            </a:endParaRPr>
           </a:p>
         </p:txBody>
       </p:sp>
@@ -2454,7 +2326,7 @@
           </a:ln>
         </p:spPr>
         <p:txBody>
-          <a:bodyPr lIns="91440" rIns="91440" tIns="45720" bIns="45720" anchor="ctr">
+          <a:bodyPr lIns="91440" tIns="45720" rIns="91440" bIns="45720" anchor="ctr">
             <a:noAutofit/>
           </a:bodyPr>
           <a:lstStyle>
@@ -2493,7 +2365,7 @@
                 <a:uFillTx/>
                 <a:latin typeface="Calibri"/>
               </a:rPr>
-              <a:t>&lt;number&gt;</a:t>
+              <a:t>‹#›</a:t>
             </a:fld>
             <a:endParaRPr lang="en-IN" sz="1200" b="0" u="none" strike="noStrike">
               <a:solidFill>
@@ -2508,17 +2380,21 @@
       </p:sp>
     </p:spTree>
   </p:cSld>
+  <p:clrMapOvr>
+    <a:masterClrMapping/>
+  </p:clrMapOvr>
 </p:sldLayout>
 </file>
 
 <file path=ppt/slideLayouts/slideLayout4.xml><?xml version="1.0" encoding="utf-8"?>
-<p:sldLayout xmlns:a="http://schemas.openxmlformats.org/drawingml/2006/main" xmlns:p="http://schemas.openxmlformats.org/presentationml/2006/main" xmlns:r="http://schemas.openxmlformats.org/officeDocument/2006/relationships" xmlns:p14="http://schemas.microsoft.com/office/powerpoint/2010/main" xmlns:p15="http://schemas.microsoft.com/office/powerpoint/2012/main" xmlns:mc="http://schemas.openxmlformats.org/markup-compatibility/2006" type="obj" preserve="1">
+<p:sldLayout xmlns:a="http://schemas.openxmlformats.org/drawingml/2006/main" xmlns:r="http://schemas.openxmlformats.org/officeDocument/2006/relationships" xmlns:p="http://schemas.openxmlformats.org/presentationml/2006/main" type="obj" preserve="1">
   <p:cSld name="Title and Content">
     <p:bg>
       <p:bgPr>
         <a:solidFill>
-          <a:srgbClr val="ffffff"/>
+          <a:srgbClr val="FFFFFF"/>
         </a:solidFill>
+        <a:effectLst/>
       </p:bgPr>
     </p:bg>
     <p:spTree>
@@ -2559,9 +2435,10 @@
           </a:ln>
         </p:spPr>
         <p:txBody>
-          <a:bodyPr lIns="91440" rIns="91440" tIns="45720" bIns="45720" anchor="ctr">
+          <a:bodyPr lIns="91440" tIns="45720" rIns="91440" bIns="45720" anchor="ctr">
             <a:noAutofit/>
           </a:bodyPr>
+          <a:lstStyle/>
           <a:p>
             <a:pPr indent="0" algn="ctr" defTabSz="457200">
               <a:lnSpc>
@@ -2580,14 +2457,6 @@
               </a:rPr>
               <a:t>Click to edit Master title style</a:t>
             </a:r>
-            <a:endParaRPr lang="en-US" sz="4400" b="0" u="none" strike="noStrike">
-              <a:solidFill>
-                <a:schemeClr val="dk1"/>
-              </a:solidFill>
-              <a:effectLst/>
-              <a:uFillTx/>
-              <a:latin typeface="Calibri"/>
-            </a:endParaRPr>
           </a:p>
         </p:txBody>
       </p:sp>
@@ -2615,9 +2484,10 @@
           </a:ln>
         </p:spPr>
         <p:txBody>
-          <a:bodyPr lIns="91440" rIns="91440" tIns="45720" bIns="45720" anchor="t">
+          <a:bodyPr lIns="91440" tIns="45720" rIns="91440" bIns="45720" anchor="t">
             <a:noAutofit/>
           </a:bodyPr>
+          <a:lstStyle/>
           <a:p>
             <a:pPr marL="343080" indent="-343080" defTabSz="457200">
               <a:lnSpc>
@@ -2643,14 +2513,6 @@
               </a:rPr>
               <a:t>Click to edit Master text styles</a:t>
             </a:r>
-            <a:endParaRPr lang="en-US" sz="3200" b="0" u="none" strike="noStrike">
-              <a:solidFill>
-                <a:schemeClr val="dk1"/>
-              </a:solidFill>
-              <a:effectLst/>
-              <a:uFillTx/>
-              <a:latin typeface="Calibri"/>
-            </a:endParaRPr>
           </a:p>
           <a:p>
             <a:pPr marL="743040" lvl="1" indent="-285840" defTabSz="457200">
@@ -2677,14 +2539,6 @@
               </a:rPr>
               <a:t>Second level</a:t>
             </a:r>
-            <a:endParaRPr lang="en-US" sz="2800" b="0" u="none" strike="noStrike">
-              <a:solidFill>
-                <a:schemeClr val="dk1"/>
-              </a:solidFill>
-              <a:effectLst/>
-              <a:uFillTx/>
-              <a:latin typeface="Calibri"/>
-            </a:endParaRPr>
           </a:p>
           <a:p>
             <a:pPr marL="1143000" lvl="2" indent="-228600" defTabSz="457200">
@@ -2711,14 +2565,6 @@
               </a:rPr>
               <a:t>Third level</a:t>
             </a:r>
-            <a:endParaRPr lang="en-US" sz="2400" b="0" u="none" strike="noStrike">
-              <a:solidFill>
-                <a:schemeClr val="dk1"/>
-              </a:solidFill>
-              <a:effectLst/>
-              <a:uFillTx/>
-              <a:latin typeface="Calibri"/>
-            </a:endParaRPr>
           </a:p>
           <a:p>
             <a:pPr marL="1600200" lvl="3" indent="-228600" defTabSz="457200">
@@ -2745,14 +2591,6 @@
               </a:rPr>
               <a:t>Fourth level</a:t>
             </a:r>
-            <a:endParaRPr lang="en-US" sz="2000" b="0" u="none" strike="noStrike">
-              <a:solidFill>
-                <a:schemeClr val="dk1"/>
-              </a:solidFill>
-              <a:effectLst/>
-              <a:uFillTx/>
-              <a:latin typeface="Calibri"/>
-            </a:endParaRPr>
           </a:p>
           <a:p>
             <a:pPr marL="2057400" lvl="4" indent="-228600" defTabSz="457200">
@@ -2779,14 +2617,6 @@
               </a:rPr>
               <a:t>Fifth level</a:t>
             </a:r>
-            <a:endParaRPr lang="en-US" sz="2000" b="0" u="none" strike="noStrike">
-              <a:solidFill>
-                <a:schemeClr val="dk1"/>
-              </a:solidFill>
-              <a:effectLst/>
-              <a:uFillTx/>
-              <a:latin typeface="Calibri"/>
-            </a:endParaRPr>
           </a:p>
         </p:txBody>
       </p:sp>
@@ -2814,7 +2644,7 @@
           </a:ln>
         </p:spPr>
         <p:txBody>
-          <a:bodyPr lIns="91440" rIns="91440" tIns="45720" bIns="45720" anchor="ctr">
+          <a:bodyPr lIns="91440" tIns="45720" rIns="91440" bIns="45720" anchor="ctr">
             <a:noAutofit/>
           </a:bodyPr>
           <a:lstStyle>
@@ -2890,7 +2720,7 @@
           </a:ln>
         </p:spPr>
         <p:txBody>
-          <a:bodyPr lIns="91440" rIns="91440" tIns="45720" bIns="45720" anchor="ctr">
+          <a:bodyPr lIns="91440" tIns="45720" rIns="91440" bIns="45720" anchor="ctr">
             <a:noAutofit/>
           </a:bodyPr>
           <a:lstStyle>
@@ -2921,14 +2751,6 @@
               </a:rPr>
               <a:t>&lt;footer&gt;</a:t>
             </a:r>
-            <a:endParaRPr lang="en-IN" sz="1400" b="0" u="none" strike="noStrike">
-              <a:solidFill>
-                <a:srgbClr val="000000"/>
-              </a:solidFill>
-              <a:effectLst/>
-              <a:uFillTx/>
-              <a:latin typeface="Times New Roman"/>
-            </a:endParaRPr>
           </a:p>
         </p:txBody>
       </p:sp>
@@ -2956,7 +2778,7 @@
           </a:ln>
         </p:spPr>
         <p:txBody>
-          <a:bodyPr lIns="91440" rIns="91440" tIns="45720" bIns="45720" anchor="ctr">
+          <a:bodyPr lIns="91440" tIns="45720" rIns="91440" bIns="45720" anchor="ctr">
             <a:noAutofit/>
           </a:bodyPr>
           <a:lstStyle>
@@ -2995,7 +2817,7 @@
                 <a:uFillTx/>
                 <a:latin typeface="Calibri"/>
               </a:rPr>
-              <a:t>&lt;number&gt;</a:t>
+              <a:t>‹#›</a:t>
             </a:fld>
             <a:endParaRPr lang="en-IN" sz="1200" b="0" u="none" strike="noStrike">
               <a:solidFill>
@@ -3010,17 +2832,21 @@
       </p:sp>
     </p:spTree>
   </p:cSld>
+  <p:clrMapOvr>
+    <a:masterClrMapping/>
+  </p:clrMapOvr>
 </p:sldLayout>
 </file>
 
 <file path=ppt/slideLayouts/slideLayout5.xml><?xml version="1.0" encoding="utf-8"?>
-<p:sldLayout xmlns:a="http://schemas.openxmlformats.org/drawingml/2006/main" xmlns:p="http://schemas.openxmlformats.org/presentationml/2006/main" xmlns:r="http://schemas.openxmlformats.org/officeDocument/2006/relationships" xmlns:p14="http://schemas.microsoft.com/office/powerpoint/2010/main" xmlns:p15="http://schemas.microsoft.com/office/powerpoint/2012/main" xmlns:mc="http://schemas.openxmlformats.org/markup-compatibility/2006" type="blank" preserve="1">
+<p:sldLayout xmlns:a="http://schemas.openxmlformats.org/drawingml/2006/main" xmlns:r="http://schemas.openxmlformats.org/officeDocument/2006/relationships" xmlns:p="http://schemas.openxmlformats.org/presentationml/2006/main" type="blank" preserve="1">
   <p:cSld name="Section Header">
     <p:bg>
       <p:bgPr>
         <a:solidFill>
-          <a:srgbClr val="ffffff"/>
+          <a:srgbClr val="FFFFFF"/>
         </a:solidFill>
+        <a:effectLst/>
       </p:bgPr>
     </p:bg>
     <p:spTree>
@@ -3061,9 +2887,10 @@
           </a:ln>
         </p:spPr>
         <p:txBody>
-          <a:bodyPr lIns="91440" rIns="91440" tIns="45720" bIns="45720" anchor="t">
+          <a:bodyPr lIns="91440" tIns="45720" rIns="91440" bIns="45720" anchor="t">
             <a:noAutofit/>
           </a:bodyPr>
+          <a:lstStyle/>
           <a:p>
             <a:pPr indent="0" defTabSz="457200">
               <a:lnSpc>
@@ -3117,9 +2944,10 @@
           </a:ln>
         </p:spPr>
         <p:txBody>
-          <a:bodyPr lIns="91440" rIns="91440" tIns="45720" bIns="45720" anchor="b">
+          <a:bodyPr lIns="91440" tIns="45720" rIns="91440" bIns="45720" anchor="b">
             <a:noAutofit/>
           </a:bodyPr>
+          <a:lstStyle/>
           <a:p>
             <a:pPr indent="0" defTabSz="457200">
               <a:lnSpc>
@@ -3130,7 +2958,7 @@
               </a:spcBef>
               <a:buNone/>
               <a:tabLst>
-                <a:tab algn="l" pos="0"/>
+                <a:tab pos="0" algn="l"/>
               </a:tabLst>
             </a:pPr>
             <a:r>
@@ -3181,7 +3009,7 @@
           </a:ln>
         </p:spPr>
         <p:txBody>
-          <a:bodyPr lIns="91440" rIns="91440" tIns="45720" bIns="45720" anchor="ctr">
+          <a:bodyPr lIns="91440" tIns="45720" rIns="91440" bIns="45720" anchor="ctr">
             <a:noAutofit/>
           </a:bodyPr>
           <a:lstStyle>
@@ -3257,7 +3085,7 @@
           </a:ln>
         </p:spPr>
         <p:txBody>
-          <a:bodyPr lIns="91440" rIns="91440" tIns="45720" bIns="45720" anchor="ctr">
+          <a:bodyPr lIns="91440" tIns="45720" rIns="91440" bIns="45720" anchor="ctr">
             <a:noAutofit/>
           </a:bodyPr>
           <a:lstStyle>
@@ -3288,14 +3116,6 @@
               </a:rPr>
               <a:t>&lt;footer&gt;</a:t>
             </a:r>
-            <a:endParaRPr lang="en-IN" sz="1400" b="0" u="none" strike="noStrike">
-              <a:solidFill>
-                <a:srgbClr val="000000"/>
-              </a:solidFill>
-              <a:effectLst/>
-              <a:uFillTx/>
-              <a:latin typeface="Times New Roman"/>
-            </a:endParaRPr>
           </a:p>
         </p:txBody>
       </p:sp>
@@ -3323,7 +3143,7 @@
           </a:ln>
         </p:spPr>
         <p:txBody>
-          <a:bodyPr lIns="91440" rIns="91440" tIns="45720" bIns="45720" anchor="ctr">
+          <a:bodyPr lIns="91440" tIns="45720" rIns="91440" bIns="45720" anchor="ctr">
             <a:noAutofit/>
           </a:bodyPr>
           <a:lstStyle>
@@ -3362,7 +3182,7 @@
                 <a:uFillTx/>
                 <a:latin typeface="Calibri"/>
               </a:rPr>
-              <a:t>&lt;number&gt;</a:t>
+              <a:t>‹#›</a:t>
             </a:fld>
             <a:endParaRPr lang="en-IN" sz="1200" b="0" u="none" strike="noStrike">
               <a:solidFill>
@@ -3377,17 +3197,21 @@
       </p:sp>
     </p:spTree>
   </p:cSld>
+  <p:clrMapOvr>
+    <a:masterClrMapping/>
+  </p:clrMapOvr>
 </p:sldLayout>
 </file>
 
 <file path=ppt/slideLayouts/slideLayout6.xml><?xml version="1.0" encoding="utf-8"?>
-<p:sldLayout xmlns:a="http://schemas.openxmlformats.org/drawingml/2006/main" xmlns:p="http://schemas.openxmlformats.org/presentationml/2006/main" xmlns:r="http://schemas.openxmlformats.org/officeDocument/2006/relationships" xmlns:p14="http://schemas.microsoft.com/office/powerpoint/2010/main" xmlns:p15="http://schemas.microsoft.com/office/powerpoint/2012/main" xmlns:mc="http://schemas.openxmlformats.org/markup-compatibility/2006" type="twoObj" preserve="1">
+<p:sldLayout xmlns:a="http://schemas.openxmlformats.org/drawingml/2006/main" xmlns:r="http://schemas.openxmlformats.org/officeDocument/2006/relationships" xmlns:p="http://schemas.openxmlformats.org/presentationml/2006/main" type="twoObj" preserve="1">
   <p:cSld name="Two Content">
     <p:bg>
       <p:bgPr>
         <a:solidFill>
-          <a:srgbClr val="ffffff"/>
+          <a:srgbClr val="FFFFFF"/>
         </a:solidFill>
+        <a:effectLst/>
       </p:bgPr>
     </p:bg>
     <p:spTree>
@@ -3428,9 +3252,10 @@
           </a:ln>
         </p:spPr>
         <p:txBody>
-          <a:bodyPr lIns="91440" rIns="91440" tIns="45720" bIns="45720" anchor="ctr">
+          <a:bodyPr lIns="91440" tIns="45720" rIns="91440" bIns="45720" anchor="ctr">
             <a:noAutofit/>
           </a:bodyPr>
+          <a:lstStyle/>
           <a:p>
             <a:pPr indent="0" algn="ctr" defTabSz="457200">
               <a:lnSpc>
@@ -3449,14 +3274,6 @@
               </a:rPr>
               <a:t>Click to edit Master title style</a:t>
             </a:r>
-            <a:endParaRPr lang="en-US" sz="4400" b="0" u="none" strike="noStrike">
-              <a:solidFill>
-                <a:schemeClr val="dk1"/>
-              </a:solidFill>
-              <a:effectLst/>
-              <a:uFillTx/>
-              <a:latin typeface="Calibri"/>
-            </a:endParaRPr>
           </a:p>
         </p:txBody>
       </p:sp>
@@ -3484,9 +3301,10 @@
           </a:ln>
         </p:spPr>
         <p:txBody>
-          <a:bodyPr lIns="91440" rIns="91440" tIns="45720" bIns="45720" anchor="t">
+          <a:bodyPr lIns="91440" tIns="45720" rIns="91440" bIns="45720" anchor="t">
             <a:noAutofit/>
           </a:bodyPr>
+          <a:lstStyle/>
           <a:p>
             <a:pPr marL="343080" indent="-343080" defTabSz="457200">
               <a:lnSpc>
@@ -3512,14 +3330,6 @@
               </a:rPr>
               <a:t>Click to edit Master text styles</a:t>
             </a:r>
-            <a:endParaRPr lang="en-US" sz="2800" b="0" u="none" strike="noStrike">
-              <a:solidFill>
-                <a:schemeClr val="dk1"/>
-              </a:solidFill>
-              <a:effectLst/>
-              <a:uFillTx/>
-              <a:latin typeface="Calibri"/>
-            </a:endParaRPr>
           </a:p>
           <a:p>
             <a:pPr marL="743040" lvl="1" indent="-285840" defTabSz="457200">
@@ -3546,14 +3356,6 @@
               </a:rPr>
               <a:t>Second level</a:t>
             </a:r>
-            <a:endParaRPr lang="en-US" sz="2400" b="0" u="none" strike="noStrike">
-              <a:solidFill>
-                <a:schemeClr val="dk1"/>
-              </a:solidFill>
-              <a:effectLst/>
-              <a:uFillTx/>
-              <a:latin typeface="Calibri"/>
-            </a:endParaRPr>
           </a:p>
           <a:p>
             <a:pPr marL="1143000" lvl="2" indent="-228600" defTabSz="457200">
@@ -3580,14 +3382,6 @@
               </a:rPr>
               <a:t>Third level</a:t>
             </a:r>
-            <a:endParaRPr lang="en-US" sz="2000" b="0" u="none" strike="noStrike">
-              <a:solidFill>
-                <a:schemeClr val="dk1"/>
-              </a:solidFill>
-              <a:effectLst/>
-              <a:uFillTx/>
-              <a:latin typeface="Calibri"/>
-            </a:endParaRPr>
           </a:p>
           <a:p>
             <a:pPr marL="1600200" lvl="3" indent="-228600" defTabSz="457200">
@@ -3614,14 +3408,6 @@
               </a:rPr>
               <a:t>Fourth level</a:t>
             </a:r>
-            <a:endParaRPr lang="en-US" sz="1800" b="0" u="none" strike="noStrike">
-              <a:solidFill>
-                <a:schemeClr val="dk1"/>
-              </a:solidFill>
-              <a:effectLst/>
-              <a:uFillTx/>
-              <a:latin typeface="Calibri"/>
-            </a:endParaRPr>
           </a:p>
           <a:p>
             <a:pPr marL="2057400" lvl="4" indent="-228600" defTabSz="457200">
@@ -3648,14 +3434,6 @@
               </a:rPr>
               <a:t>Fifth level</a:t>
             </a:r>
-            <a:endParaRPr lang="en-US" sz="1800" b="0" u="none" strike="noStrike">
-              <a:solidFill>
-                <a:schemeClr val="dk1"/>
-              </a:solidFill>
-              <a:effectLst/>
-              <a:uFillTx/>
-              <a:latin typeface="Calibri"/>
-            </a:endParaRPr>
           </a:p>
         </p:txBody>
       </p:sp>
@@ -3683,9 +3461,10 @@
           </a:ln>
         </p:spPr>
         <p:txBody>
-          <a:bodyPr lIns="91440" rIns="91440" tIns="45720" bIns="45720" anchor="t">
+          <a:bodyPr lIns="91440" tIns="45720" rIns="91440" bIns="45720" anchor="t">
             <a:noAutofit/>
           </a:bodyPr>
+          <a:lstStyle/>
           <a:p>
             <a:pPr marL="343080" indent="-343080" defTabSz="457200">
               <a:lnSpc>
@@ -3711,14 +3490,6 @@
               </a:rPr>
               <a:t>Click to edit Master text styles</a:t>
             </a:r>
-            <a:endParaRPr lang="en-US" sz="2800" b="0" u="none" strike="noStrike">
-              <a:solidFill>
-                <a:schemeClr val="dk1"/>
-              </a:solidFill>
-              <a:effectLst/>
-              <a:uFillTx/>
-              <a:latin typeface="Calibri"/>
-            </a:endParaRPr>
           </a:p>
           <a:p>
             <a:pPr marL="743040" lvl="1" indent="-285840" defTabSz="457200">
@@ -3745,14 +3516,6 @@
               </a:rPr>
               <a:t>Second level</a:t>
             </a:r>
-            <a:endParaRPr lang="en-US" sz="2400" b="0" u="none" strike="noStrike">
-              <a:solidFill>
-                <a:schemeClr val="dk1"/>
-              </a:solidFill>
-              <a:effectLst/>
-              <a:uFillTx/>
-              <a:latin typeface="Calibri"/>
-            </a:endParaRPr>
           </a:p>
           <a:p>
             <a:pPr marL="1143000" lvl="2" indent="-228600" defTabSz="457200">
@@ -3779,14 +3542,6 @@
               </a:rPr>
               <a:t>Third level</a:t>
             </a:r>
-            <a:endParaRPr lang="en-US" sz="2000" b="0" u="none" strike="noStrike">
-              <a:solidFill>
-                <a:schemeClr val="dk1"/>
-              </a:solidFill>
-              <a:effectLst/>
-              <a:uFillTx/>
-              <a:latin typeface="Calibri"/>
-            </a:endParaRPr>
           </a:p>
           <a:p>
             <a:pPr marL="1600200" lvl="3" indent="-228600" defTabSz="457200">
@@ -3813,14 +3568,6 @@
               </a:rPr>
               <a:t>Fourth level</a:t>
             </a:r>
-            <a:endParaRPr lang="en-US" sz="1800" b="0" u="none" strike="noStrike">
-              <a:solidFill>
-                <a:schemeClr val="dk1"/>
-              </a:solidFill>
-              <a:effectLst/>
-              <a:uFillTx/>
-              <a:latin typeface="Calibri"/>
-            </a:endParaRPr>
           </a:p>
           <a:p>
             <a:pPr marL="2057400" lvl="4" indent="-228600" defTabSz="457200">
@@ -3847,14 +3594,6 @@
               </a:rPr>
               <a:t>Fifth level</a:t>
             </a:r>
-            <a:endParaRPr lang="en-US" sz="1800" b="0" u="none" strike="noStrike">
-              <a:solidFill>
-                <a:schemeClr val="dk1"/>
-              </a:solidFill>
-              <a:effectLst/>
-              <a:uFillTx/>
-              <a:latin typeface="Calibri"/>
-            </a:endParaRPr>
           </a:p>
         </p:txBody>
       </p:sp>
@@ -3882,7 +3621,7 @@
           </a:ln>
         </p:spPr>
         <p:txBody>
-          <a:bodyPr lIns="91440" rIns="91440" tIns="45720" bIns="45720" anchor="ctr">
+          <a:bodyPr lIns="91440" tIns="45720" rIns="91440" bIns="45720" anchor="ctr">
             <a:noAutofit/>
           </a:bodyPr>
           <a:lstStyle>
@@ -3958,7 +3697,7 @@
           </a:ln>
         </p:spPr>
         <p:txBody>
-          <a:bodyPr lIns="91440" rIns="91440" tIns="45720" bIns="45720" anchor="ctr">
+          <a:bodyPr lIns="91440" tIns="45720" rIns="91440" bIns="45720" anchor="ctr">
             <a:noAutofit/>
           </a:bodyPr>
           <a:lstStyle>
@@ -3989,14 +3728,6 @@
               </a:rPr>
               <a:t>&lt;footer&gt;</a:t>
             </a:r>
-            <a:endParaRPr lang="en-IN" sz="1400" b="0" u="none" strike="noStrike">
-              <a:solidFill>
-                <a:srgbClr val="000000"/>
-              </a:solidFill>
-              <a:effectLst/>
-              <a:uFillTx/>
-              <a:latin typeface="Times New Roman"/>
-            </a:endParaRPr>
           </a:p>
         </p:txBody>
       </p:sp>
@@ -4024,7 +3755,7 @@
           </a:ln>
         </p:spPr>
         <p:txBody>
-          <a:bodyPr lIns="91440" rIns="91440" tIns="45720" bIns="45720" anchor="ctr">
+          <a:bodyPr lIns="91440" tIns="45720" rIns="91440" bIns="45720" anchor="ctr">
             <a:noAutofit/>
           </a:bodyPr>
           <a:lstStyle>
@@ -4063,7 +3794,7 @@
                 <a:uFillTx/>
                 <a:latin typeface="Calibri"/>
               </a:rPr>
-              <a:t>&lt;number&gt;</a:t>
+              <a:t>‹#›</a:t>
             </a:fld>
             <a:endParaRPr lang="en-IN" sz="1200" b="0" u="none" strike="noStrike">
               <a:solidFill>
@@ -4078,17 +3809,21 @@
       </p:sp>
     </p:spTree>
   </p:cSld>
+  <p:clrMapOvr>
+    <a:masterClrMapping/>
+  </p:clrMapOvr>
 </p:sldLayout>
 </file>
 
 <file path=ppt/slideLayouts/slideLayout7.xml><?xml version="1.0" encoding="utf-8"?>
-<p:sldLayout xmlns:a="http://schemas.openxmlformats.org/drawingml/2006/main" xmlns:p="http://schemas.openxmlformats.org/presentationml/2006/main" xmlns:r="http://schemas.openxmlformats.org/officeDocument/2006/relationships" xmlns:p14="http://schemas.microsoft.com/office/powerpoint/2010/main" xmlns:p15="http://schemas.microsoft.com/office/powerpoint/2012/main" xmlns:mc="http://schemas.openxmlformats.org/markup-compatibility/2006" type="blank" preserve="1">
+<p:sldLayout xmlns:a="http://schemas.openxmlformats.org/drawingml/2006/main" xmlns:r="http://schemas.openxmlformats.org/officeDocument/2006/relationships" xmlns:p="http://schemas.openxmlformats.org/presentationml/2006/main" type="blank" preserve="1">
   <p:cSld name="Comparison">
     <p:bg>
       <p:bgPr>
         <a:solidFill>
-          <a:srgbClr val="ffffff"/>
+          <a:srgbClr val="FFFFFF"/>
         </a:solidFill>
+        <a:effectLst/>
       </p:bgPr>
     </p:bg>
     <p:spTree>
@@ -4129,9 +3864,10 @@
           </a:ln>
         </p:spPr>
         <p:txBody>
-          <a:bodyPr lIns="91440" rIns="91440" tIns="45720" bIns="45720" anchor="ctr">
+          <a:bodyPr lIns="91440" tIns="45720" rIns="91440" bIns="45720" anchor="ctr">
             <a:noAutofit/>
           </a:bodyPr>
+          <a:lstStyle/>
           <a:p>
             <a:pPr indent="0" algn="ctr" defTabSz="457200">
               <a:lnSpc>
@@ -4150,14 +3886,6 @@
               </a:rPr>
               <a:t>Click to edit Master title style</a:t>
             </a:r>
-            <a:endParaRPr lang="en-US" sz="4400" b="0" u="none" strike="noStrike">
-              <a:solidFill>
-                <a:schemeClr val="dk1"/>
-              </a:solidFill>
-              <a:effectLst/>
-              <a:uFillTx/>
-              <a:latin typeface="Calibri"/>
-            </a:endParaRPr>
           </a:p>
         </p:txBody>
       </p:sp>
@@ -4185,9 +3913,10 @@
           </a:ln>
         </p:spPr>
         <p:txBody>
-          <a:bodyPr lIns="91440" rIns="91440" tIns="45720" bIns="45720" anchor="b">
+          <a:bodyPr lIns="91440" tIns="45720" rIns="91440" bIns="45720" anchor="b">
             <a:noAutofit/>
           </a:bodyPr>
+          <a:lstStyle/>
           <a:p>
             <a:pPr indent="0" defTabSz="457200">
               <a:lnSpc>
@@ -4198,7 +3927,7 @@
               </a:spcBef>
               <a:buNone/>
               <a:tabLst>
-                <a:tab algn="l" pos="0"/>
+                <a:tab pos="0" algn="l"/>
               </a:tabLst>
             </a:pPr>
             <a:r>
@@ -4247,9 +3976,10 @@
           </a:ln>
         </p:spPr>
         <p:txBody>
-          <a:bodyPr lIns="91440" rIns="91440" tIns="45720" bIns="45720" anchor="t">
+          <a:bodyPr lIns="91440" tIns="45720" rIns="91440" bIns="45720" anchor="t">
             <a:noAutofit/>
           </a:bodyPr>
+          <a:lstStyle/>
           <a:p>
             <a:pPr marL="343080" indent="-343080" defTabSz="457200">
               <a:lnSpc>
@@ -4266,6 +3996,165 @@
             </a:pPr>
             <a:r>
               <a:rPr lang="en-US" sz="2400" b="0" u="none" strike="noStrike">
+                <a:solidFill>
+                  <a:schemeClr val="dk1"/>
+                </a:solidFill>
+                <a:effectLst/>
+                <a:uFillTx/>
+                <a:latin typeface="Calibri"/>
+              </a:rPr>
+              <a:t>Click to edit Master text styles</a:t>
+            </a:r>
+          </a:p>
+          <a:p>
+            <a:pPr marL="743040" lvl="1" indent="-285840" defTabSz="457200">
+              <a:lnSpc>
+                <a:spcPct val="100000"/>
+              </a:lnSpc>
+              <a:spcBef>
+                <a:spcPts val="400"/>
+              </a:spcBef>
+              <a:buClr>
+                <a:srgbClr val="000000"/>
+              </a:buClr>
+              <a:buFont typeface="Arial"/>
+              <a:buChar char="–"/>
+            </a:pPr>
+            <a:r>
+              <a:rPr lang="en-US" sz="2000" b="0" u="none" strike="noStrike">
+                <a:solidFill>
+                  <a:schemeClr val="dk1"/>
+                </a:solidFill>
+                <a:effectLst/>
+                <a:uFillTx/>
+                <a:latin typeface="Calibri"/>
+              </a:rPr>
+              <a:t>Second level</a:t>
+            </a:r>
+          </a:p>
+          <a:p>
+            <a:pPr marL="1143000" lvl="2" indent="-228600" defTabSz="457200">
+              <a:lnSpc>
+                <a:spcPct val="100000"/>
+              </a:lnSpc>
+              <a:spcBef>
+                <a:spcPts val="360"/>
+              </a:spcBef>
+              <a:buClr>
+                <a:srgbClr val="000000"/>
+              </a:buClr>
+              <a:buFont typeface="Arial"/>
+              <a:buChar char="•"/>
+            </a:pPr>
+            <a:r>
+              <a:rPr lang="en-US" sz="1800" b="0" u="none" strike="noStrike">
+                <a:solidFill>
+                  <a:schemeClr val="dk1"/>
+                </a:solidFill>
+                <a:effectLst/>
+                <a:uFillTx/>
+                <a:latin typeface="Calibri"/>
+              </a:rPr>
+              <a:t>Third level</a:t>
+            </a:r>
+          </a:p>
+          <a:p>
+            <a:pPr marL="1600200" lvl="3" indent="-228600" defTabSz="457200">
+              <a:lnSpc>
+                <a:spcPct val="100000"/>
+              </a:lnSpc>
+              <a:spcBef>
+                <a:spcPts val="320"/>
+              </a:spcBef>
+              <a:buClr>
+                <a:srgbClr val="000000"/>
+              </a:buClr>
+              <a:buFont typeface="Arial"/>
+              <a:buChar char="–"/>
+            </a:pPr>
+            <a:r>
+              <a:rPr lang="en-US" sz="1600" b="0" u="none" strike="noStrike">
+                <a:solidFill>
+                  <a:schemeClr val="dk1"/>
+                </a:solidFill>
+                <a:effectLst/>
+                <a:uFillTx/>
+                <a:latin typeface="Calibri"/>
+              </a:rPr>
+              <a:t>Fourth level</a:t>
+            </a:r>
+          </a:p>
+          <a:p>
+            <a:pPr marL="2057400" lvl="4" indent="-228600" defTabSz="457200">
+              <a:lnSpc>
+                <a:spcPct val="100000"/>
+              </a:lnSpc>
+              <a:spcBef>
+                <a:spcPts val="320"/>
+              </a:spcBef>
+              <a:buClr>
+                <a:srgbClr val="000000"/>
+              </a:buClr>
+              <a:buFont typeface="Arial"/>
+              <a:buChar char="»"/>
+            </a:pPr>
+            <a:r>
+              <a:rPr lang="en-US" sz="1600" b="0" u="none" strike="noStrike">
+                <a:solidFill>
+                  <a:schemeClr val="dk1"/>
+                </a:solidFill>
+                <a:effectLst/>
+                <a:uFillTx/>
+                <a:latin typeface="Calibri"/>
+              </a:rPr>
+              <a:t>Fifth level</a:t>
+            </a:r>
+          </a:p>
+        </p:txBody>
+      </p:sp>
+      <p:sp>
+        <p:nvSpPr>
+          <p:cNvPr id="35" name="PlaceHolder 4"/>
+          <p:cNvSpPr>
+            <a:spLocks noGrp="1"/>
+          </p:cNvSpPr>
+          <p:nvPr>
+            <p:ph type="body"/>
+          </p:nvPr>
+        </p:nvSpPr>
+        <p:spPr>
+          <a:xfrm>
+            <a:off x="4645080" y="1535040"/>
+            <a:ext cx="4041360" cy="639360"/>
+          </a:xfrm>
+          <a:prstGeom prst="rect">
+            <a:avLst/>
+          </a:prstGeom>
+          <a:noFill/>
+          <a:ln w="0">
+            <a:noFill/>
+          </a:ln>
+        </p:spPr>
+        <p:txBody>
+          <a:bodyPr lIns="91440" tIns="45720" rIns="91440" bIns="45720" anchor="b">
+            <a:noAutofit/>
+          </a:bodyPr>
+          <a:lstStyle/>
+          <a:p>
+            <a:pPr indent="0" defTabSz="457200">
+              <a:lnSpc>
+                <a:spcPct val="100000"/>
+              </a:lnSpc>
+              <a:spcBef>
+                <a:spcPts val="479"/>
+              </a:spcBef>
+              <a:buNone/>
+              <a:tabLst>
+                <a:tab pos="0" algn="l"/>
+              </a:tabLst>
+            </a:pPr>
+            <a:r>
+              <a:rPr lang="en-US" sz="2400" b="1" u="none" strike="noStrike">
                 <a:solidFill>
                   <a:schemeClr val="dk1"/>
                 </a:solidFill>
@@ -4284,204 +4173,6 @@
               <a:latin typeface="Calibri"/>
             </a:endParaRPr>
           </a:p>
-          <a:p>
-            <a:pPr marL="743040" lvl="1" indent="-285840" defTabSz="457200">
-              <a:lnSpc>
-                <a:spcPct val="100000"/>
-              </a:lnSpc>
-              <a:spcBef>
-                <a:spcPts val="400"/>
-              </a:spcBef>
-              <a:buClr>
-                <a:srgbClr val="000000"/>
-              </a:buClr>
-              <a:buFont typeface="Arial"/>
-              <a:buChar char="–"/>
-            </a:pPr>
-            <a:r>
-              <a:rPr lang="en-US" sz="2000" b="0" u="none" strike="noStrike">
-                <a:solidFill>
-                  <a:schemeClr val="dk1"/>
-                </a:solidFill>
-                <a:effectLst/>
-                <a:uFillTx/>
-                <a:latin typeface="Calibri"/>
-              </a:rPr>
-              <a:t>Second level</a:t>
-            </a:r>
-            <a:endParaRPr lang="en-US" sz="2000" b="0" u="none" strike="noStrike">
-              <a:solidFill>
-                <a:schemeClr val="dk1"/>
-              </a:solidFill>
-              <a:effectLst/>
-              <a:uFillTx/>
-              <a:latin typeface="Calibri"/>
-            </a:endParaRPr>
-          </a:p>
-          <a:p>
-            <a:pPr marL="1143000" lvl="2" indent="-228600" defTabSz="457200">
-              <a:lnSpc>
-                <a:spcPct val="100000"/>
-              </a:lnSpc>
-              <a:spcBef>
-                <a:spcPts val="360"/>
-              </a:spcBef>
-              <a:buClr>
-                <a:srgbClr val="000000"/>
-              </a:buClr>
-              <a:buFont typeface="Arial"/>
-              <a:buChar char="•"/>
-            </a:pPr>
-            <a:r>
-              <a:rPr lang="en-US" sz="1800" b="0" u="none" strike="noStrike">
-                <a:solidFill>
-                  <a:schemeClr val="dk1"/>
-                </a:solidFill>
-                <a:effectLst/>
-                <a:uFillTx/>
-                <a:latin typeface="Calibri"/>
-              </a:rPr>
-              <a:t>Third level</a:t>
-            </a:r>
-            <a:endParaRPr lang="en-US" sz="1800" b="0" u="none" strike="noStrike">
-              <a:solidFill>
-                <a:schemeClr val="dk1"/>
-              </a:solidFill>
-              <a:effectLst/>
-              <a:uFillTx/>
-              <a:latin typeface="Calibri"/>
-            </a:endParaRPr>
-          </a:p>
-          <a:p>
-            <a:pPr marL="1600200" lvl="3" indent="-228600" defTabSz="457200">
-              <a:lnSpc>
-                <a:spcPct val="100000"/>
-              </a:lnSpc>
-              <a:spcBef>
-                <a:spcPts val="320"/>
-              </a:spcBef>
-              <a:buClr>
-                <a:srgbClr val="000000"/>
-              </a:buClr>
-              <a:buFont typeface="Arial"/>
-              <a:buChar char="–"/>
-            </a:pPr>
-            <a:r>
-              <a:rPr lang="en-US" sz="1600" b="0" u="none" strike="noStrike">
-                <a:solidFill>
-                  <a:schemeClr val="dk1"/>
-                </a:solidFill>
-                <a:effectLst/>
-                <a:uFillTx/>
-                <a:latin typeface="Calibri"/>
-              </a:rPr>
-              <a:t>Fourth level</a:t>
-            </a:r>
-            <a:endParaRPr lang="en-US" sz="1600" b="0" u="none" strike="noStrike">
-              <a:solidFill>
-                <a:schemeClr val="dk1"/>
-              </a:solidFill>
-              <a:effectLst/>
-              <a:uFillTx/>
-              <a:latin typeface="Calibri"/>
-            </a:endParaRPr>
-          </a:p>
-          <a:p>
-            <a:pPr marL="2057400" lvl="4" indent="-228600" defTabSz="457200">
-              <a:lnSpc>
-                <a:spcPct val="100000"/>
-              </a:lnSpc>
-              <a:spcBef>
-                <a:spcPts val="320"/>
-              </a:spcBef>
-              <a:buClr>
-                <a:srgbClr val="000000"/>
-              </a:buClr>
-              <a:buFont typeface="Arial"/>
-              <a:buChar char="»"/>
-            </a:pPr>
-            <a:r>
-              <a:rPr lang="en-US" sz="1600" b="0" u="none" strike="noStrike">
-                <a:solidFill>
-                  <a:schemeClr val="dk1"/>
-                </a:solidFill>
-                <a:effectLst/>
-                <a:uFillTx/>
-                <a:latin typeface="Calibri"/>
-              </a:rPr>
-              <a:t>Fifth level</a:t>
-            </a:r>
-            <a:endParaRPr lang="en-US" sz="1600" b="0" u="none" strike="noStrike">
-              <a:solidFill>
-                <a:schemeClr val="dk1"/>
-              </a:solidFill>
-              <a:effectLst/>
-              <a:uFillTx/>
-              <a:latin typeface="Calibri"/>
-            </a:endParaRPr>
-          </a:p>
-        </p:txBody>
-      </p:sp>
-      <p:sp>
-        <p:nvSpPr>
-          <p:cNvPr id="35" name="PlaceHolder 4"/>
-          <p:cNvSpPr>
-            <a:spLocks noGrp="1"/>
-          </p:cNvSpPr>
-          <p:nvPr>
-            <p:ph type="body"/>
-          </p:nvPr>
-        </p:nvSpPr>
-        <p:spPr>
-          <a:xfrm>
-            <a:off x="4645080" y="1535040"/>
-            <a:ext cx="4041360" cy="639360"/>
-          </a:xfrm>
-          <a:prstGeom prst="rect">
-            <a:avLst/>
-          </a:prstGeom>
-          <a:noFill/>
-          <a:ln w="0">
-            <a:noFill/>
-          </a:ln>
-        </p:spPr>
-        <p:txBody>
-          <a:bodyPr lIns="91440" rIns="91440" tIns="45720" bIns="45720" anchor="b">
-            <a:noAutofit/>
-          </a:bodyPr>
-          <a:p>
-            <a:pPr indent="0" defTabSz="457200">
-              <a:lnSpc>
-                <a:spcPct val="100000"/>
-              </a:lnSpc>
-              <a:spcBef>
-                <a:spcPts val="479"/>
-              </a:spcBef>
-              <a:buNone/>
-              <a:tabLst>
-                <a:tab algn="l" pos="0"/>
-              </a:tabLst>
-            </a:pPr>
-            <a:r>
-              <a:rPr lang="en-US" sz="2400" b="1" u="none" strike="noStrike">
-                <a:solidFill>
-                  <a:schemeClr val="dk1"/>
-                </a:solidFill>
-                <a:effectLst/>
-                <a:uFillTx/>
-                <a:latin typeface="Calibri"/>
-              </a:rPr>
-              <a:t>Click to edit Master text styles</a:t>
-            </a:r>
-            <a:endParaRPr lang="en-US" sz="2400" b="0" u="none" strike="noStrike">
-              <a:solidFill>
-                <a:schemeClr val="dk1"/>
-              </a:solidFill>
-              <a:effectLst/>
-              <a:uFillTx/>
-              <a:latin typeface="Calibri"/>
-            </a:endParaRPr>
-          </a:p>
         </p:txBody>
       </p:sp>
       <p:sp>
@@ -4508,9 +4199,10 @@
           </a:ln>
         </p:spPr>
         <p:txBody>
-          <a:bodyPr lIns="91440" rIns="91440" tIns="45720" bIns="45720" anchor="t">
+          <a:bodyPr lIns="91440" tIns="45720" rIns="91440" bIns="45720" anchor="t">
             <a:noAutofit/>
           </a:bodyPr>
+          <a:lstStyle/>
           <a:p>
             <a:pPr marL="343080" indent="-343080" defTabSz="457200">
               <a:lnSpc>
@@ -4536,14 +4228,6 @@
               </a:rPr>
               <a:t>Click to edit Master text styles</a:t>
             </a:r>
-            <a:endParaRPr lang="en-US" sz="2400" b="0" u="none" strike="noStrike">
-              <a:solidFill>
-                <a:schemeClr val="dk1"/>
-              </a:solidFill>
-              <a:effectLst/>
-              <a:uFillTx/>
-              <a:latin typeface="Calibri"/>
-            </a:endParaRPr>
           </a:p>
           <a:p>
             <a:pPr marL="743040" lvl="1" indent="-285840" defTabSz="457200">
@@ -4570,14 +4254,6 @@
               </a:rPr>
               <a:t>Second level</a:t>
             </a:r>
-            <a:endParaRPr lang="en-US" sz="2000" b="0" u="none" strike="noStrike">
-              <a:solidFill>
-                <a:schemeClr val="dk1"/>
-              </a:solidFill>
-              <a:effectLst/>
-              <a:uFillTx/>
-              <a:latin typeface="Calibri"/>
-            </a:endParaRPr>
           </a:p>
           <a:p>
             <a:pPr marL="1143000" lvl="2" indent="-228600" defTabSz="457200">
@@ -4604,14 +4280,6 @@
               </a:rPr>
               <a:t>Third level</a:t>
             </a:r>
-            <a:endParaRPr lang="en-US" sz="1800" b="0" u="none" strike="noStrike">
-              <a:solidFill>
-                <a:schemeClr val="dk1"/>
-              </a:solidFill>
-              <a:effectLst/>
-              <a:uFillTx/>
-              <a:latin typeface="Calibri"/>
-            </a:endParaRPr>
           </a:p>
           <a:p>
             <a:pPr marL="1600200" lvl="3" indent="-228600" defTabSz="457200">
@@ -4638,14 +4306,6 @@
               </a:rPr>
               <a:t>Fourth level</a:t>
             </a:r>
-            <a:endParaRPr lang="en-US" sz="1600" b="0" u="none" strike="noStrike">
-              <a:solidFill>
-                <a:schemeClr val="dk1"/>
-              </a:solidFill>
-              <a:effectLst/>
-              <a:uFillTx/>
-              <a:latin typeface="Calibri"/>
-            </a:endParaRPr>
           </a:p>
           <a:p>
             <a:pPr marL="2057400" lvl="4" indent="-228600" defTabSz="457200">
@@ -4672,14 +4332,6 @@
               </a:rPr>
               <a:t>Fifth level</a:t>
             </a:r>
-            <a:endParaRPr lang="en-US" sz="1600" b="0" u="none" strike="noStrike">
-              <a:solidFill>
-                <a:schemeClr val="dk1"/>
-              </a:solidFill>
-              <a:effectLst/>
-              <a:uFillTx/>
-              <a:latin typeface="Calibri"/>
-            </a:endParaRPr>
           </a:p>
         </p:txBody>
       </p:sp>
@@ -4707,7 +4359,7 @@
           </a:ln>
         </p:spPr>
         <p:txBody>
-          <a:bodyPr lIns="91440" rIns="91440" tIns="45720" bIns="45720" anchor="ctr">
+          <a:bodyPr lIns="91440" tIns="45720" rIns="91440" bIns="45720" anchor="ctr">
             <a:noAutofit/>
           </a:bodyPr>
           <a:lstStyle>
@@ -4783,7 +4435,7 @@
           </a:ln>
         </p:spPr>
         <p:txBody>
-          <a:bodyPr lIns="91440" rIns="91440" tIns="45720" bIns="45720" anchor="ctr">
+          <a:bodyPr lIns="91440" tIns="45720" rIns="91440" bIns="45720" anchor="ctr">
             <a:noAutofit/>
           </a:bodyPr>
           <a:lstStyle>
@@ -4814,14 +4466,6 @@
               </a:rPr>
               <a:t>&lt;footer&gt;</a:t>
             </a:r>
-            <a:endParaRPr lang="en-IN" sz="1400" b="0" u="none" strike="noStrike">
-              <a:solidFill>
-                <a:srgbClr val="000000"/>
-              </a:solidFill>
-              <a:effectLst/>
-              <a:uFillTx/>
-              <a:latin typeface="Times New Roman"/>
-            </a:endParaRPr>
           </a:p>
         </p:txBody>
       </p:sp>
@@ -4849,7 +4493,7 @@
           </a:ln>
         </p:spPr>
         <p:txBody>
-          <a:bodyPr lIns="91440" rIns="91440" tIns="45720" bIns="45720" anchor="ctr">
+          <a:bodyPr lIns="91440" tIns="45720" rIns="91440" bIns="45720" anchor="ctr">
             <a:noAutofit/>
           </a:bodyPr>
           <a:lstStyle>
@@ -4888,7 +4532,7 @@
                 <a:uFillTx/>
                 <a:latin typeface="Calibri"/>
               </a:rPr>
-              <a:t>&lt;number&gt;</a:t>
+              <a:t>‹#›</a:t>
             </a:fld>
             <a:endParaRPr lang="en-IN" sz="1200" b="0" u="none" strike="noStrike">
               <a:solidFill>
@@ -4903,17 +4547,21 @@
       </p:sp>
     </p:spTree>
   </p:cSld>
+  <p:clrMapOvr>
+    <a:masterClrMapping/>
+  </p:clrMapOvr>
 </p:sldLayout>
 </file>
 
 <file path=ppt/slideLayouts/slideLayout8.xml><?xml version="1.0" encoding="utf-8"?>
-<p:sldLayout xmlns:a="http://schemas.openxmlformats.org/drawingml/2006/main" xmlns:p="http://schemas.openxmlformats.org/presentationml/2006/main" xmlns:r="http://schemas.openxmlformats.org/officeDocument/2006/relationships" xmlns:p14="http://schemas.microsoft.com/office/powerpoint/2010/main" xmlns:p15="http://schemas.microsoft.com/office/powerpoint/2012/main" xmlns:mc="http://schemas.openxmlformats.org/markup-compatibility/2006" type="titleOnly" preserve="1">
+<p:sldLayout xmlns:a="http://schemas.openxmlformats.org/drawingml/2006/main" xmlns:r="http://schemas.openxmlformats.org/officeDocument/2006/relationships" xmlns:p="http://schemas.openxmlformats.org/presentationml/2006/main" type="titleOnly" preserve="1">
   <p:cSld name="Title Only">
     <p:bg>
       <p:bgPr>
         <a:solidFill>
-          <a:srgbClr val="ffffff"/>
+          <a:srgbClr val="FFFFFF"/>
         </a:solidFill>
+        <a:effectLst/>
       </p:bgPr>
     </p:bg>
     <p:spTree>
@@ -4954,9 +4602,10 @@
           </a:ln>
         </p:spPr>
         <p:txBody>
-          <a:bodyPr lIns="91440" rIns="91440" tIns="45720" bIns="45720" anchor="ctr">
+          <a:bodyPr lIns="91440" tIns="45720" rIns="91440" bIns="45720" anchor="ctr">
             <a:noAutofit/>
           </a:bodyPr>
+          <a:lstStyle/>
           <a:p>
             <a:pPr indent="0" algn="ctr" defTabSz="457200">
               <a:lnSpc>
@@ -4975,14 +4624,6 @@
               </a:rPr>
               <a:t>Click to edit Master title style</a:t>
             </a:r>
-            <a:endParaRPr lang="en-US" sz="4400" b="0" u="none" strike="noStrike">
-              <a:solidFill>
-                <a:schemeClr val="dk1"/>
-              </a:solidFill>
-              <a:effectLst/>
-              <a:uFillTx/>
-              <a:latin typeface="Calibri"/>
-            </a:endParaRPr>
           </a:p>
         </p:txBody>
       </p:sp>
@@ -5010,7 +4651,7 @@
           </a:ln>
         </p:spPr>
         <p:txBody>
-          <a:bodyPr lIns="91440" rIns="91440" tIns="45720" bIns="45720" anchor="ctr">
+          <a:bodyPr lIns="91440" tIns="45720" rIns="91440" bIns="45720" anchor="ctr">
             <a:noAutofit/>
           </a:bodyPr>
           <a:lstStyle>
@@ -5086,7 +4727,7 @@
           </a:ln>
         </p:spPr>
         <p:txBody>
-          <a:bodyPr lIns="91440" rIns="91440" tIns="45720" bIns="45720" anchor="ctr">
+          <a:bodyPr lIns="91440" tIns="45720" rIns="91440" bIns="45720" anchor="ctr">
             <a:noAutofit/>
           </a:bodyPr>
           <a:lstStyle>
@@ -5117,14 +4758,6 @@
               </a:rPr>
               <a:t>&lt;footer&gt;</a:t>
             </a:r>
-            <a:endParaRPr lang="en-IN" sz="1400" b="0" u="none" strike="noStrike">
-              <a:solidFill>
-                <a:srgbClr val="000000"/>
-              </a:solidFill>
-              <a:effectLst/>
-              <a:uFillTx/>
-              <a:latin typeface="Times New Roman"/>
-            </a:endParaRPr>
           </a:p>
         </p:txBody>
       </p:sp>
@@ -5152,7 +4785,7 @@
           </a:ln>
         </p:spPr>
         <p:txBody>
-          <a:bodyPr lIns="91440" rIns="91440" tIns="45720" bIns="45720" anchor="ctr">
+          <a:bodyPr lIns="91440" tIns="45720" rIns="91440" bIns="45720" anchor="ctr">
             <a:noAutofit/>
           </a:bodyPr>
           <a:lstStyle>
@@ -5191,7 +4824,7 @@
                 <a:uFillTx/>
                 <a:latin typeface="Calibri"/>
               </a:rPr>
-              <a:t>&lt;number&gt;</a:t>
+              <a:t>‹#›</a:t>
             </a:fld>
             <a:endParaRPr lang="en-IN" sz="1200" b="0" u="none" strike="noStrike">
               <a:solidFill>
@@ -5228,9 +4861,10 @@
           </a:ln>
         </p:spPr>
         <p:txBody>
-          <a:bodyPr lIns="0" rIns="0" tIns="0" bIns="0" anchor="t">
+          <a:bodyPr lIns="0" tIns="0" rIns="0" bIns="0" anchor="t">
             <a:normAutofit/>
           </a:bodyPr>
+          <a:lstStyle/>
           <a:p>
             <a:pPr marL="432000" indent="-324000">
               <a:spcBef>
@@ -5254,14 +4888,6 @@
               </a:rPr>
               <a:t>Click to edit the outline text format</a:t>
             </a:r>
-            <a:endParaRPr lang="en-US" sz="3200" b="0" u="none" strike="noStrike">
-              <a:solidFill>
-                <a:schemeClr val="dk1"/>
-              </a:solidFill>
-              <a:effectLst/>
-              <a:uFillTx/>
-              <a:latin typeface="Calibri"/>
-            </a:endParaRPr>
           </a:p>
           <a:p>
             <a:pPr marL="864000" lvl="1" indent="-324000">
@@ -5286,14 +4912,6 @@
               </a:rPr>
               <a:t>Second Outline Level</a:t>
             </a:r>
-            <a:endParaRPr lang="en-US" sz="2400" b="0" u="none" strike="noStrike">
-              <a:solidFill>
-                <a:schemeClr val="dk1"/>
-              </a:solidFill>
-              <a:effectLst/>
-              <a:uFillTx/>
-              <a:latin typeface="Calibri"/>
-            </a:endParaRPr>
           </a:p>
           <a:p>
             <a:pPr marL="1296000" lvl="2" indent="-288000">
@@ -5318,14 +4936,6 @@
               </a:rPr>
               <a:t>Third Outline Level</a:t>
             </a:r>
-            <a:endParaRPr lang="en-US" sz="2000" b="0" u="none" strike="noStrike">
-              <a:solidFill>
-                <a:schemeClr val="dk1"/>
-              </a:solidFill>
-              <a:effectLst/>
-              <a:uFillTx/>
-              <a:latin typeface="Calibri"/>
-            </a:endParaRPr>
           </a:p>
           <a:p>
             <a:pPr marL="1728000" lvl="3" indent="-216000">
@@ -5350,14 +4960,6 @@
               </a:rPr>
               <a:t>Fourth Outline Level</a:t>
             </a:r>
-            <a:endParaRPr lang="en-US" sz="2000" b="0" u="none" strike="noStrike">
-              <a:solidFill>
-                <a:schemeClr val="dk1"/>
-              </a:solidFill>
-              <a:effectLst/>
-              <a:uFillTx/>
-              <a:latin typeface="Calibri"/>
-            </a:endParaRPr>
           </a:p>
           <a:p>
             <a:pPr marL="2160000" lvl="4" indent="-216000">
@@ -5382,14 +4984,6 @@
               </a:rPr>
               <a:t>Fifth Outline Level</a:t>
             </a:r>
-            <a:endParaRPr lang="en-US" sz="2000" b="0" u="none" strike="noStrike">
-              <a:solidFill>
-                <a:schemeClr val="dk1"/>
-              </a:solidFill>
-              <a:effectLst/>
-              <a:uFillTx/>
-              <a:latin typeface="Calibri"/>
-            </a:endParaRPr>
           </a:p>
           <a:p>
             <a:pPr marL="2592000" lvl="5" indent="-216000">
@@ -5414,14 +5008,6 @@
               </a:rPr>
               <a:t>Sixth Outline Level</a:t>
             </a:r>
-            <a:endParaRPr lang="en-US" sz="2000" b="0" u="none" strike="noStrike">
-              <a:solidFill>
-                <a:schemeClr val="dk1"/>
-              </a:solidFill>
-              <a:effectLst/>
-              <a:uFillTx/>
-              <a:latin typeface="Calibri"/>
-            </a:endParaRPr>
           </a:p>
           <a:p>
             <a:pPr marL="3024000" lvl="6" indent="-216000">
@@ -5446,30 +5032,26 @@
               </a:rPr>
               <a:t>Seventh Outline Level</a:t>
             </a:r>
-            <a:endParaRPr lang="en-US" sz="2000" b="0" u="none" strike="noStrike">
-              <a:solidFill>
-                <a:schemeClr val="dk1"/>
-              </a:solidFill>
-              <a:effectLst/>
-              <a:uFillTx/>
-              <a:latin typeface="Calibri"/>
-            </a:endParaRPr>
           </a:p>
         </p:txBody>
       </p:sp>
     </p:spTree>
   </p:cSld>
+  <p:clrMapOvr>
+    <a:masterClrMapping/>
+  </p:clrMapOvr>
 </p:sldLayout>
 </file>
 
 <file path=ppt/slideLayouts/slideLayout9.xml><?xml version="1.0" encoding="utf-8"?>
-<p:sldLayout xmlns:a="http://schemas.openxmlformats.org/drawingml/2006/main" xmlns:p="http://schemas.openxmlformats.org/presentationml/2006/main" xmlns:r="http://schemas.openxmlformats.org/officeDocument/2006/relationships" xmlns:p14="http://schemas.microsoft.com/office/powerpoint/2010/main" xmlns:p15="http://schemas.microsoft.com/office/powerpoint/2012/main" xmlns:mc="http://schemas.openxmlformats.org/markup-compatibility/2006" type="blank" preserve="1">
+<p:sldLayout xmlns:a="http://schemas.openxmlformats.org/drawingml/2006/main" xmlns:r="http://schemas.openxmlformats.org/officeDocument/2006/relationships" xmlns:p="http://schemas.openxmlformats.org/presentationml/2006/main" type="blank" preserve="1">
   <p:cSld name="Blank">
     <p:bg>
       <p:bgPr>
         <a:solidFill>
-          <a:srgbClr val="ffffff"/>
+          <a:srgbClr val="FFFFFF"/>
         </a:solidFill>
+        <a:effectLst/>
       </p:bgPr>
     </p:bg>
     <p:spTree>
@@ -5510,7 +5092,7 @@
           </a:ln>
         </p:spPr>
         <p:txBody>
-          <a:bodyPr lIns="91440" rIns="91440" tIns="45720" bIns="45720" anchor="ctr">
+          <a:bodyPr lIns="91440" tIns="45720" rIns="91440" bIns="45720" anchor="ctr">
             <a:noAutofit/>
           </a:bodyPr>
           <a:lstStyle>
@@ -5586,7 +5168,7 @@
           </a:ln>
         </p:spPr>
         <p:txBody>
-          <a:bodyPr lIns="91440" rIns="91440" tIns="45720" bIns="45720" anchor="ctr">
+          <a:bodyPr lIns="91440" tIns="45720" rIns="91440" bIns="45720" anchor="ctr">
             <a:noAutofit/>
           </a:bodyPr>
           <a:lstStyle>
@@ -5617,14 +5199,6 @@
               </a:rPr>
               <a:t>&lt;footer&gt;</a:t>
             </a:r>
-            <a:endParaRPr lang="en-IN" sz="1400" b="0" u="none" strike="noStrike">
-              <a:solidFill>
-                <a:srgbClr val="000000"/>
-              </a:solidFill>
-              <a:effectLst/>
-              <a:uFillTx/>
-              <a:latin typeface="Times New Roman"/>
-            </a:endParaRPr>
           </a:p>
         </p:txBody>
       </p:sp>
@@ -5652,7 +5226,7 @@
           </a:ln>
         </p:spPr>
         <p:txBody>
-          <a:bodyPr lIns="91440" rIns="91440" tIns="45720" bIns="45720" anchor="ctr">
+          <a:bodyPr lIns="91440" tIns="45720" rIns="91440" bIns="45720" anchor="ctr">
             <a:noAutofit/>
           </a:bodyPr>
           <a:lstStyle>
@@ -5691,7 +5265,7 @@
                 <a:uFillTx/>
                 <a:latin typeface="Calibri"/>
               </a:rPr>
-              <a:t>&lt;number&gt;</a:t>
+              <a:t>‹#›</a:t>
             </a:fld>
             <a:endParaRPr lang="en-IN" sz="1200" b="0" u="none" strike="noStrike">
               <a:solidFill>
@@ -5706,12 +5280,20 @@
       </p:sp>
     </p:spTree>
   </p:cSld>
+  <p:clrMapOvr>
+    <a:masterClrMapping/>
+  </p:clrMapOvr>
 </p:sldLayout>
 </file>
 
 <file path=ppt/slideMasters/slideMaster1.xml><?xml version="1.0" encoding="utf-8"?>
-<p:sldMaster xmlns:a="http://schemas.openxmlformats.org/drawingml/2006/main" xmlns:p="http://schemas.openxmlformats.org/presentationml/2006/main" xmlns:r="http://schemas.openxmlformats.org/officeDocument/2006/relationships" xmlns:p14="http://schemas.microsoft.com/office/powerpoint/2010/main" xmlns:p15="http://schemas.microsoft.com/office/powerpoint/2012/main" xmlns:mc="http://schemas.openxmlformats.org/markup-compatibility/2006">
+<p:sldMaster xmlns:a="http://schemas.openxmlformats.org/drawingml/2006/main" xmlns:r="http://schemas.openxmlformats.org/officeDocument/2006/relationships" xmlns:p="http://schemas.openxmlformats.org/presentationml/2006/main">
   <p:cSld>
+    <p:bg>
+      <p:bgRef idx="1001">
+        <a:schemeClr val="bg1"/>
+      </p:bgRef>
+    </p:bg>
     <p:spTree>
       <p:nvGrpSpPr>
         <p:cNvPr id="1" name=""/>
@@ -5730,23 +5312,303 @@
   </p:cSld>
   <p:clrMap bg1="lt1" tx1="dk1" bg2="lt2" tx2="dk2" accent1="accent1" accent2="accent2" accent3="accent3" accent4="accent4" accent5="accent5" accent6="accent6" hlink="hlink" folHlink="folHlink"/>
   <p:sldLayoutIdLst>
-    <p:sldLayoutId id="2147483649" r:id="rId2"/>
-    <p:sldLayoutId id="2147483650" r:id="rId3"/>
-    <p:sldLayoutId id="2147483651" r:id="rId4"/>
-    <p:sldLayoutId id="2147483652" r:id="rId5"/>
-    <p:sldLayoutId id="2147483653" r:id="rId6"/>
-    <p:sldLayoutId id="2147483654" r:id="rId7"/>
-    <p:sldLayoutId id="2147483655" r:id="rId8"/>
-    <p:sldLayoutId id="2147483656" r:id="rId9"/>
-    <p:sldLayoutId id="2147483657" r:id="rId10"/>
-    <p:sldLayoutId id="2147483658" r:id="rId11"/>
-    <p:sldLayoutId id="2147483659" r:id="rId12"/>
+    <p:sldLayoutId id="2147483649" r:id="rId1"/>
+    <p:sldLayoutId id="2147483650" r:id="rId2"/>
+    <p:sldLayoutId id="2147483651" r:id="rId3"/>
+    <p:sldLayoutId id="2147483652" r:id="rId4"/>
+    <p:sldLayoutId id="2147483653" r:id="rId5"/>
+    <p:sldLayoutId id="2147483654" r:id="rId6"/>
+    <p:sldLayoutId id="2147483655" r:id="rId7"/>
+    <p:sldLayoutId id="2147483656" r:id="rId8"/>
+    <p:sldLayoutId id="2147483657" r:id="rId9"/>
+    <p:sldLayoutId id="2147483658" r:id="rId10"/>
+    <p:sldLayoutId id="2147483659" r:id="rId11"/>
   </p:sldLayoutIdLst>
+  <p:txStyles>
+    <p:titleStyle>
+      <a:lvl1pPr algn="l" defTabSz="914400" rtl="0" eaLnBrk="1" latinLnBrk="0" hangingPunct="1">
+        <a:lnSpc>
+          <a:spcPct val="90000"/>
+        </a:lnSpc>
+        <a:spcBef>
+          <a:spcPct val="0"/>
+        </a:spcBef>
+        <a:buNone/>
+        <a:defRPr sz="4400" kern="1200">
+          <a:solidFill>
+            <a:schemeClr val="tx1"/>
+          </a:solidFill>
+          <a:latin typeface="+mj-lt"/>
+          <a:ea typeface="+mj-ea"/>
+          <a:cs typeface="+mj-cs"/>
+        </a:defRPr>
+      </a:lvl1pPr>
+    </p:titleStyle>
+    <p:bodyStyle>
+      <a:lvl1pPr marL="228600" indent="-228600" algn="l" defTabSz="914400" rtl="0" eaLnBrk="1" latinLnBrk="0" hangingPunct="1">
+        <a:lnSpc>
+          <a:spcPct val="90000"/>
+        </a:lnSpc>
+        <a:spcBef>
+          <a:spcPts val="1000"/>
+        </a:spcBef>
+        <a:buFont typeface="Arial" panose="020B0604020202020204" pitchFamily="34" charset="0"/>
+        <a:buChar char="•"/>
+        <a:defRPr sz="2800" kern="1200">
+          <a:solidFill>
+            <a:schemeClr val="tx1"/>
+          </a:solidFill>
+          <a:latin typeface="+mn-lt"/>
+          <a:ea typeface="+mn-ea"/>
+          <a:cs typeface="+mn-cs"/>
+        </a:defRPr>
+      </a:lvl1pPr>
+      <a:lvl2pPr marL="685800" indent="-228600" algn="l" defTabSz="914400" rtl="0" eaLnBrk="1" latinLnBrk="0" hangingPunct="1">
+        <a:lnSpc>
+          <a:spcPct val="90000"/>
+        </a:lnSpc>
+        <a:spcBef>
+          <a:spcPts val="500"/>
+        </a:spcBef>
+        <a:buFont typeface="Arial" panose="020B0604020202020204" pitchFamily="34" charset="0"/>
+        <a:buChar char="•"/>
+        <a:defRPr sz="2400" kern="1200">
+          <a:solidFill>
+            <a:schemeClr val="tx1"/>
+          </a:solidFill>
+          <a:latin typeface="+mn-lt"/>
+          <a:ea typeface="+mn-ea"/>
+          <a:cs typeface="+mn-cs"/>
+        </a:defRPr>
+      </a:lvl2pPr>
+      <a:lvl3pPr marL="1143000" indent="-228600" algn="l" defTabSz="914400" rtl="0" eaLnBrk="1" latinLnBrk="0" hangingPunct="1">
+        <a:lnSpc>
+          <a:spcPct val="90000"/>
+        </a:lnSpc>
+        <a:spcBef>
+          <a:spcPts val="500"/>
+        </a:spcBef>
+        <a:buFont typeface="Arial" panose="020B0604020202020204" pitchFamily="34" charset="0"/>
+        <a:buChar char="•"/>
+        <a:defRPr sz="2000" kern="1200">
+          <a:solidFill>
+            <a:schemeClr val="tx1"/>
+          </a:solidFill>
+          <a:latin typeface="+mn-lt"/>
+          <a:ea typeface="+mn-ea"/>
+          <a:cs typeface="+mn-cs"/>
+        </a:defRPr>
+      </a:lvl3pPr>
+      <a:lvl4pPr marL="1600200" indent="-228600" algn="l" defTabSz="914400" rtl="0" eaLnBrk="1" latinLnBrk="0" hangingPunct="1">
+        <a:lnSpc>
+          <a:spcPct val="90000"/>
+        </a:lnSpc>
+        <a:spcBef>
+          <a:spcPts val="500"/>
+        </a:spcBef>
+        <a:buFont typeface="Arial" panose="020B0604020202020204" pitchFamily="34" charset="0"/>
+        <a:buChar char="•"/>
+        <a:defRPr sz="1800" kern="1200">
+          <a:solidFill>
+            <a:schemeClr val="tx1"/>
+          </a:solidFill>
+          <a:latin typeface="+mn-lt"/>
+          <a:ea typeface="+mn-ea"/>
+          <a:cs typeface="+mn-cs"/>
+        </a:defRPr>
+      </a:lvl4pPr>
+      <a:lvl5pPr marL="2057400" indent="-228600" algn="l" defTabSz="914400" rtl="0" eaLnBrk="1" latinLnBrk="0" hangingPunct="1">
+        <a:lnSpc>
+          <a:spcPct val="90000"/>
+        </a:lnSpc>
+        <a:spcBef>
+          <a:spcPts val="500"/>
+        </a:spcBef>
+        <a:buFont typeface="Arial" panose="020B0604020202020204" pitchFamily="34" charset="0"/>
+        <a:buChar char="•"/>
+        <a:defRPr sz="1800" kern="1200">
+          <a:solidFill>
+            <a:schemeClr val="tx1"/>
+          </a:solidFill>
+          <a:latin typeface="+mn-lt"/>
+          <a:ea typeface="+mn-ea"/>
+          <a:cs typeface="+mn-cs"/>
+        </a:defRPr>
+      </a:lvl5pPr>
+      <a:lvl6pPr marL="2514600" indent="-228600" algn="l" defTabSz="914400" rtl="0" eaLnBrk="1" latinLnBrk="0" hangingPunct="1">
+        <a:lnSpc>
+          <a:spcPct val="90000"/>
+        </a:lnSpc>
+        <a:spcBef>
+          <a:spcPts val="500"/>
+        </a:spcBef>
+        <a:buFont typeface="Arial" panose="020B0604020202020204" pitchFamily="34" charset="0"/>
+        <a:buChar char="•"/>
+        <a:defRPr sz="1800" kern="1200">
+          <a:solidFill>
+            <a:schemeClr val="tx1"/>
+          </a:solidFill>
+          <a:latin typeface="+mn-lt"/>
+          <a:ea typeface="+mn-ea"/>
+          <a:cs typeface="+mn-cs"/>
+        </a:defRPr>
+      </a:lvl6pPr>
+      <a:lvl7pPr marL="2971800" indent="-228600" algn="l" defTabSz="914400" rtl="0" eaLnBrk="1" latinLnBrk="0" hangingPunct="1">
+        <a:lnSpc>
+          <a:spcPct val="90000"/>
+        </a:lnSpc>
+        <a:spcBef>
+          <a:spcPts val="500"/>
+        </a:spcBef>
+        <a:buFont typeface="Arial" panose="020B0604020202020204" pitchFamily="34" charset="0"/>
+        <a:buChar char="•"/>
+        <a:defRPr sz="1800" kern="1200">
+          <a:solidFill>
+            <a:schemeClr val="tx1"/>
+          </a:solidFill>
+          <a:latin typeface="+mn-lt"/>
+          <a:ea typeface="+mn-ea"/>
+          <a:cs typeface="+mn-cs"/>
+        </a:defRPr>
+      </a:lvl7pPr>
+      <a:lvl8pPr marL="3429000" indent="-228600" algn="l" defTabSz="914400" rtl="0" eaLnBrk="1" latinLnBrk="0" hangingPunct="1">
+        <a:lnSpc>
+          <a:spcPct val="90000"/>
+        </a:lnSpc>
+        <a:spcBef>
+          <a:spcPts val="500"/>
+        </a:spcBef>
+        <a:buFont typeface="Arial" panose="020B0604020202020204" pitchFamily="34" charset="0"/>
+        <a:buChar char="•"/>
+        <a:defRPr sz="1800" kern="1200">
+          <a:solidFill>
+            <a:schemeClr val="tx1"/>
+          </a:solidFill>
+          <a:latin typeface="+mn-lt"/>
+          <a:ea typeface="+mn-ea"/>
+          <a:cs typeface="+mn-cs"/>
+        </a:defRPr>
+      </a:lvl8pPr>
+      <a:lvl9pPr marL="3886200" indent="-228600" algn="l" defTabSz="914400" rtl="0" eaLnBrk="1" latinLnBrk="0" hangingPunct="1">
+        <a:lnSpc>
+          <a:spcPct val="90000"/>
+        </a:lnSpc>
+        <a:spcBef>
+          <a:spcPts val="500"/>
+        </a:spcBef>
+        <a:buFont typeface="Arial" panose="020B0604020202020204" pitchFamily="34" charset="0"/>
+        <a:buChar char="•"/>
+        <a:defRPr sz="1800" kern="1200">
+          <a:solidFill>
+            <a:schemeClr val="tx1"/>
+          </a:solidFill>
+          <a:latin typeface="+mn-lt"/>
+          <a:ea typeface="+mn-ea"/>
+          <a:cs typeface="+mn-cs"/>
+        </a:defRPr>
+      </a:lvl9pPr>
+    </p:bodyStyle>
+    <p:otherStyle>
+      <a:defPPr>
+        <a:defRPr lang="en-US"/>
+      </a:defPPr>
+      <a:lvl1pPr marL="0" algn="l" defTabSz="914400" rtl="0" eaLnBrk="1" latinLnBrk="0" hangingPunct="1">
+        <a:defRPr sz="1800" kern="1200">
+          <a:solidFill>
+            <a:schemeClr val="tx1"/>
+          </a:solidFill>
+          <a:latin typeface="+mn-lt"/>
+          <a:ea typeface="+mn-ea"/>
+          <a:cs typeface="+mn-cs"/>
+        </a:defRPr>
+      </a:lvl1pPr>
+      <a:lvl2pPr marL="457200" algn="l" defTabSz="914400" rtl="0" eaLnBrk="1" latinLnBrk="0" hangingPunct="1">
+        <a:defRPr sz="1800" kern="1200">
+          <a:solidFill>
+            <a:schemeClr val="tx1"/>
+          </a:solidFill>
+          <a:latin typeface="+mn-lt"/>
+          <a:ea typeface="+mn-ea"/>
+          <a:cs typeface="+mn-cs"/>
+        </a:defRPr>
+      </a:lvl2pPr>
+      <a:lvl3pPr marL="914400" algn="l" defTabSz="914400" rtl="0" eaLnBrk="1" latinLnBrk="0" hangingPunct="1">
+        <a:defRPr sz="1800" kern="1200">
+          <a:solidFill>
+            <a:schemeClr val="tx1"/>
+          </a:solidFill>
+          <a:latin typeface="+mn-lt"/>
+          <a:ea typeface="+mn-ea"/>
+          <a:cs typeface="+mn-cs"/>
+        </a:defRPr>
+      </a:lvl3pPr>
+      <a:lvl4pPr marL="1371600" algn="l" defTabSz="914400" rtl="0" eaLnBrk="1" latinLnBrk="0" hangingPunct="1">
+        <a:defRPr sz="1800" kern="1200">
+          <a:solidFill>
+            <a:schemeClr val="tx1"/>
+          </a:solidFill>
+          <a:latin typeface="+mn-lt"/>
+          <a:ea typeface="+mn-ea"/>
+          <a:cs typeface="+mn-cs"/>
+        </a:defRPr>
+      </a:lvl4pPr>
+      <a:lvl5pPr marL="1828800" algn="l" defTabSz="914400" rtl="0" eaLnBrk="1" latinLnBrk="0" hangingPunct="1">
+        <a:defRPr sz="1800" kern="1200">
+          <a:solidFill>
+            <a:schemeClr val="tx1"/>
+          </a:solidFill>
+          <a:latin typeface="+mn-lt"/>
+          <a:ea typeface="+mn-ea"/>
+          <a:cs typeface="+mn-cs"/>
+        </a:defRPr>
+      </a:lvl5pPr>
+      <a:lvl6pPr marL="2286000" algn="l" defTabSz="914400" rtl="0" eaLnBrk="1" latinLnBrk="0" hangingPunct="1">
+        <a:defRPr sz="1800" kern="1200">
+          <a:solidFill>
+            <a:schemeClr val="tx1"/>
+          </a:solidFill>
+          <a:latin typeface="+mn-lt"/>
+          <a:ea typeface="+mn-ea"/>
+          <a:cs typeface="+mn-cs"/>
+        </a:defRPr>
+      </a:lvl6pPr>
+      <a:lvl7pPr marL="2743200" algn="l" defTabSz="914400" rtl="0" eaLnBrk="1" latinLnBrk="0" hangingPunct="1">
+        <a:defRPr sz="1800" kern="1200">
+          <a:solidFill>
+            <a:schemeClr val="tx1"/>
+          </a:solidFill>
+          <a:latin typeface="+mn-lt"/>
+          <a:ea typeface="+mn-ea"/>
+          <a:cs typeface="+mn-cs"/>
+        </a:defRPr>
+      </a:lvl7pPr>
+      <a:lvl8pPr marL="3200400" algn="l" defTabSz="914400" rtl="0" eaLnBrk="1" latinLnBrk="0" hangingPunct="1">
+        <a:defRPr sz="1800" kern="1200">
+          <a:solidFill>
+            <a:schemeClr val="tx1"/>
+          </a:solidFill>
+          <a:latin typeface="+mn-lt"/>
+          <a:ea typeface="+mn-ea"/>
+          <a:cs typeface="+mn-cs"/>
+        </a:defRPr>
+      </a:lvl8pPr>
+      <a:lvl9pPr marL="3657600" algn="l" defTabSz="914400" rtl="0" eaLnBrk="1" latinLnBrk="0" hangingPunct="1">
+        <a:defRPr sz="1800" kern="1200">
+          <a:solidFill>
+            <a:schemeClr val="tx1"/>
+          </a:solidFill>
+          <a:latin typeface="+mn-lt"/>
+          <a:ea typeface="+mn-ea"/>
+          <a:cs typeface="+mn-cs"/>
+        </a:defRPr>
+      </a:lvl9pPr>
+    </p:otherStyle>
+  </p:txStyles>
 </p:sldMaster>
 </file>
 
 <file path=ppt/slides/slide1.xml><?xml version="1.0" encoding="utf-8"?>
-<p:sld xmlns:a="http://schemas.openxmlformats.org/drawingml/2006/main" xmlns:p="http://schemas.openxmlformats.org/presentationml/2006/main" xmlns:r="http://schemas.openxmlformats.org/officeDocument/2006/relationships" xmlns:p14="http://schemas.microsoft.com/office/powerpoint/2010/main" xmlns:p15="http://schemas.microsoft.com/office/powerpoint/2012/main" xmlns:mc="http://schemas.openxmlformats.org/markup-compatibility/2006">
+<p:sld xmlns:a="http://schemas.openxmlformats.org/drawingml/2006/main" xmlns:r="http://schemas.openxmlformats.org/officeDocument/2006/relationships" xmlns:p="http://schemas.openxmlformats.org/presentationml/2006/main">
   <p:cSld>
     <p:spTree>
       <p:nvGrpSpPr>
@@ -5786,9 +5648,10 @@
           </a:ln>
         </p:spPr>
         <p:txBody>
-          <a:bodyPr lIns="91440" rIns="91440" tIns="45720" bIns="45720" anchor="ctr">
-            <a:normAutofit fontScale="85000" lnSpcReduction="19999"/>
-          </a:bodyPr>
+          <a:bodyPr lIns="91440" tIns="45720" rIns="91440" bIns="45720" anchor="ctr">
+            <a:normAutofit fontScale="90000"/>
+          </a:bodyPr>
+          <a:lstStyle/>
           <a:p>
             <a:pPr indent="0" algn="ctr" defTabSz="457200">
               <a:lnSpc>
@@ -5830,7 +5693,7 @@
         <p:spPr>
           <a:xfrm>
             <a:off x="731520" y="1097280"/>
-            <a:ext cx="5486040" cy="4571640"/>
+            <a:ext cx="10428316" cy="1937538"/>
           </a:xfrm>
           <a:prstGeom prst="rect">
             <a:avLst/>
@@ -5841,15 +5704,22 @@
           </a:ln>
         </p:spPr>
         <p:style>
-          <a:lnRef idx="0"/>
-          <a:fillRef idx="0"/>
-          <a:effectRef idx="0"/>
+          <a:lnRef idx="0">
+            <a:scrgbClr r="0" g="0" b="0"/>
+          </a:lnRef>
+          <a:fillRef idx="0">
+            <a:scrgbClr r="0" g="0" b="0"/>
+          </a:fillRef>
+          <a:effectRef idx="0">
+            <a:scrgbClr r="0" g="0" b="0"/>
+          </a:effectRef>
           <a:fontRef idx="minor"/>
         </p:style>
         <p:txBody>
-          <a:bodyPr wrap="none" lIns="90000" rIns="90000" tIns="45000" bIns="45000" anchor="t">
+          <a:bodyPr wrap="square" lIns="90000" tIns="45000" rIns="90000" bIns="45000" anchor="t">
             <a:spAutoFit/>
           </a:bodyPr>
+          <a:lstStyle/>
           <a:p>
             <a:pPr defTabSz="457200">
               <a:lnSpc>
@@ -5857,23 +5727,21 @@
               </a:lnSpc>
             </a:pPr>
             <a:r>
-              <a:rPr lang="en-US" sz="2000" b="0" u="none" strike="noStrike">
-                <a:solidFill>
-                  <a:schemeClr val="dk1"/>
-                </a:solidFill>
-                <a:effectLst/>
-                <a:uFillTx/>
-                <a:latin typeface="Calibri"/>
-              </a:rPr>
-              <a:t>• Team name</a:t>
-            </a:r>
-            <a:endParaRPr lang="en-IN" sz="2000" b="0" u="none" strike="noStrike">
+              <a:rPr lang="en-US" sz="2000" b="0" u="none" strike="noStrike" dirty="0">
+                <a:solidFill>
+                  <a:schemeClr val="dk1"/>
+                </a:solidFill>
+                <a:effectLst/>
+                <a:uFillTx/>
+              </a:rPr>
+              <a:t>• Team: EduMiners</a:t>
+            </a:r>
+            <a:endParaRPr lang="en-IN" sz="2000" b="0" u="none" strike="noStrike" dirty="0">
               <a:solidFill>
                 <a:srgbClr val="000000"/>
               </a:solidFill>
               <a:effectLst/>
               <a:uFillTx/>
-              <a:latin typeface="Arial"/>
             </a:endParaRPr>
           </a:p>
           <a:p>
@@ -5883,23 +5751,50 @@
               </a:lnSpc>
             </a:pPr>
             <a:r>
-              <a:rPr lang="en-US" sz="2000" b="0" u="none" strike="noStrike">
-                <a:solidFill>
-                  <a:schemeClr val="dk1"/>
-                </a:solidFill>
-                <a:effectLst/>
-                <a:uFillTx/>
-                <a:latin typeface="Calibri"/>
-              </a:rPr>
-              <a:t>• Members</a:t>
-            </a:r>
-            <a:endParaRPr lang="en-IN" sz="2000" b="0" u="none" strike="noStrike">
+              <a:rPr lang="en-US" sz="2000" b="0" u="none" strike="noStrike" dirty="0">
+                <a:solidFill>
+                  <a:schemeClr val="dk1"/>
+                </a:solidFill>
+                <a:effectLst/>
+                <a:uFillTx/>
+              </a:rPr>
+              <a:t>• Members: Shreyas S K, Vaishnavi S B</a:t>
+            </a:r>
+          </a:p>
+          <a:p>
+            <a:pPr defTabSz="457200">
+              <a:lnSpc>
+                <a:spcPct val="100000"/>
+              </a:lnSpc>
+            </a:pPr>
+            <a:r>
+              <a:rPr lang="en-US" sz="2000" b="0" u="none" strike="noStrike" dirty="0">
+                <a:solidFill>
+                  <a:schemeClr val="dk1"/>
+                </a:solidFill>
+                <a:effectLst/>
+                <a:uFillTx/>
+              </a:rPr>
+              <a:t>• Challenge area: </a:t>
+            </a:r>
+            <a:r>
+              <a:rPr lang="en-US" sz="2000" dirty="0"/>
+              <a:t>Weak foundational </a:t>
+            </a:r>
+            <a:r>
+              <a:rPr lang="en-US" sz="2000" dirty="0" err="1"/>
+              <a:t>maths</a:t>
+            </a:r>
+            <a:r>
+              <a:rPr lang="en-US" sz="2000" dirty="0"/>
+              <a:t> in rural Karnataka government schools (grades 4–6)</a:t>
+            </a:r>
+            <a:endParaRPr lang="en-US" sz="2000" b="0" u="none" strike="noStrike" dirty="0">
               <a:solidFill>
-                <a:srgbClr val="000000"/>
+                <a:schemeClr val="dk1"/>
               </a:solidFill>
               <a:effectLst/>
               <a:uFillTx/>
-              <a:latin typeface="Arial"/>
             </a:endParaRPr>
           </a:p>
           <a:p>
@@ -5909,23 +5804,25 @@
               </a:lnSpc>
             </a:pPr>
             <a:r>
-              <a:rPr lang="en-US" sz="2000" b="0" u="none" strike="noStrike">
-                <a:solidFill>
-                  <a:schemeClr val="dk1"/>
-                </a:solidFill>
-                <a:effectLst/>
-                <a:uFillTx/>
-                <a:latin typeface="Calibri"/>
-              </a:rPr>
-              <a:t>• Challenge area</a:t>
-            </a:r>
-            <a:endParaRPr lang="en-IN" sz="2000" b="0" u="none" strike="noStrike">
+              <a:rPr lang="en-US" sz="2000" b="0" u="none" strike="noStrike" dirty="0">
+                <a:solidFill>
+                  <a:schemeClr val="dk1"/>
+                </a:solidFill>
+                <a:effectLst/>
+                <a:uFillTx/>
+              </a:rPr>
+              <a:t>• One-line solution: </a:t>
+            </a:r>
+            <a:r>
+              <a:rPr lang="en-US" sz="2000" dirty="0"/>
+              <a:t>We combine contest scores with health and Class-10 data to find which districts are falling behind — and flag the ones where schools need the most help.</a:t>
+            </a:r>
+            <a:endParaRPr lang="en-US" sz="2000" b="0" u="none" strike="noStrike" dirty="0">
               <a:solidFill>
-                <a:srgbClr val="000000"/>
+                <a:schemeClr val="dk1"/>
               </a:solidFill>
               <a:effectLst/>
               <a:uFillTx/>
-              <a:latin typeface="Arial"/>
             </a:endParaRPr>
           </a:p>
           <a:p>
@@ -5935,49 +5832,29 @@
               </a:lnSpc>
             </a:pPr>
             <a:r>
-              <a:rPr lang="en-US" sz="2000" b="0" u="none" strike="noStrike">
-                <a:solidFill>
-                  <a:schemeClr val="dk1"/>
-                </a:solidFill>
-                <a:effectLst/>
-                <a:uFillTx/>
-                <a:latin typeface="Calibri"/>
-              </a:rPr>
-              <a:t>• One-line solution</a:t>
-            </a:r>
-            <a:endParaRPr lang="en-IN" sz="2000" b="0" u="none" strike="noStrike">
+              <a:rPr lang="en-US" sz="2000" b="0" u="none" strike="noStrike" dirty="0">
+                <a:solidFill>
+                  <a:schemeClr val="dk1"/>
+                </a:solidFill>
+                <a:effectLst/>
+                <a:uFillTx/>
+              </a:rPr>
+              <a:t>• Contact: </a:t>
+            </a:r>
+            <a:r>
+              <a:rPr lang="en-US" sz="2000" dirty="0">
+                <a:solidFill>
+                  <a:schemeClr val="dk1"/>
+                </a:solidFill>
+              </a:rPr>
+              <a:t>skshreyas714@gmail.com</a:t>
+            </a:r>
+            <a:endParaRPr lang="en-IN" sz="2000" b="0" u="none" strike="noStrike" dirty="0">
               <a:solidFill>
                 <a:srgbClr val="000000"/>
               </a:solidFill>
               <a:effectLst/>
               <a:uFillTx/>
-              <a:latin typeface="Arial"/>
-            </a:endParaRPr>
-          </a:p>
-          <a:p>
-            <a:pPr defTabSz="457200">
-              <a:lnSpc>
-                <a:spcPct val="100000"/>
-              </a:lnSpc>
-            </a:pPr>
-            <a:r>
-              <a:rPr lang="en-US" sz="2000" b="0" u="none" strike="noStrike">
-                <a:solidFill>
-                  <a:schemeClr val="dk1"/>
-                </a:solidFill>
-                <a:effectLst/>
-                <a:uFillTx/>
-                <a:latin typeface="Calibri"/>
-              </a:rPr>
-              <a:t>• Contact</a:t>
-            </a:r>
-            <a:endParaRPr lang="en-IN" sz="2000" b="0" u="none" strike="noStrike">
-              <a:solidFill>
-                <a:srgbClr val="000000"/>
-              </a:solidFill>
-              <a:effectLst/>
-              <a:uFillTx/>
-              <a:latin typeface="Arial"/>
             </a:endParaRPr>
           </a:p>
         </p:txBody>
@@ -6016,19 +5893,14 @@
       </p:sp>
     </p:spTree>
   </p:cSld>
-  <mc:AlternateContent>
-    <mc:Choice Requires="p14">
-      <p:transition spd="slow" p14:dur="2000"/>
-    </mc:Choice>
-    <mc:Fallback>
-      <p:transition spd="slow"/>
-    </mc:Fallback>
-  </mc:AlternateContent>
+  <p:clrMapOvr>
+    <a:masterClrMapping/>
+  </p:clrMapOvr>
 </p:sld>
 </file>
 
 <file path=ppt/slides/slide10.xml><?xml version="1.0" encoding="utf-8"?>
-<p:sld xmlns:a="http://schemas.openxmlformats.org/drawingml/2006/main" xmlns:p="http://schemas.openxmlformats.org/presentationml/2006/main" xmlns:r="http://schemas.openxmlformats.org/officeDocument/2006/relationships" xmlns:p14="http://schemas.microsoft.com/office/powerpoint/2010/main" xmlns:p15="http://schemas.microsoft.com/office/powerpoint/2012/main" xmlns:mc="http://schemas.openxmlformats.org/markup-compatibility/2006">
+<p:sld xmlns:a="http://schemas.openxmlformats.org/drawingml/2006/main" xmlns:r="http://schemas.openxmlformats.org/officeDocument/2006/relationships" xmlns:p="http://schemas.openxmlformats.org/presentationml/2006/main">
   <p:cSld>
     <p:spTree>
       <p:nvGrpSpPr>
@@ -6068,9 +5940,10 @@
           </a:ln>
         </p:spPr>
         <p:txBody>
-          <a:bodyPr lIns="91440" rIns="91440" tIns="45720" bIns="45720" anchor="ctr">
-            <a:normAutofit fontScale="85000" lnSpcReduction="19999"/>
-          </a:bodyPr>
+          <a:bodyPr lIns="91440" tIns="45720" rIns="91440" bIns="45720" anchor="ctr">
+            <a:normAutofit fontScale="90000"/>
+          </a:bodyPr>
+          <a:lstStyle/>
           <a:p>
             <a:pPr indent="0" algn="ctr" defTabSz="457200">
               <a:lnSpc>
@@ -6111,8 +5984,8 @@
         </p:nvSpPr>
         <p:spPr>
           <a:xfrm>
-            <a:off x="731520" y="1097280"/>
-            <a:ext cx="5486040" cy="4571640"/>
+            <a:off x="731519" y="1097280"/>
+            <a:ext cx="9981508" cy="1321985"/>
           </a:xfrm>
           <a:prstGeom prst="rect">
             <a:avLst/>
@@ -6123,15 +5996,22 @@
           </a:ln>
         </p:spPr>
         <p:style>
-          <a:lnRef idx="0"/>
-          <a:fillRef idx="0"/>
-          <a:effectRef idx="0"/>
+          <a:lnRef idx="0">
+            <a:scrgbClr r="0" g="0" b="0"/>
+          </a:lnRef>
+          <a:fillRef idx="0">
+            <a:scrgbClr r="0" g="0" b="0"/>
+          </a:fillRef>
+          <a:effectRef idx="0">
+            <a:scrgbClr r="0" g="0" b="0"/>
+          </a:effectRef>
           <a:fontRef idx="minor"/>
         </p:style>
         <p:txBody>
-          <a:bodyPr wrap="none" lIns="90000" rIns="90000" tIns="45000" bIns="45000" anchor="t">
+          <a:bodyPr wrap="square" lIns="90000" tIns="45000" rIns="90000" bIns="45000" anchor="t">
             <a:spAutoFit/>
           </a:bodyPr>
+          <a:lstStyle/>
           <a:p>
             <a:pPr defTabSz="457200">
               <a:lnSpc>
@@ -6139,17 +6019,17 @@
               </a:lnSpc>
             </a:pPr>
             <a:r>
-              <a:rPr lang="en-US" sz="2000" b="0" u="none" strike="noStrike">
-                <a:solidFill>
-                  <a:schemeClr val="dk1"/>
-                </a:solidFill>
-                <a:effectLst/>
-                <a:uFillTx/>
-                <a:latin typeface="Calibri"/>
-              </a:rPr>
-              <a:t>• Novelty</a:t>
-            </a:r>
-            <a:endParaRPr lang="en-IN" sz="2000" b="0" u="none" strike="noStrike">
+              <a:rPr lang="en-US" sz="2000" b="0" u="none" strike="noStrike" dirty="0">
+                <a:solidFill>
+                  <a:schemeClr val="dk1"/>
+                </a:solidFill>
+                <a:effectLst/>
+                <a:uFillTx/>
+                <a:latin typeface="Calibri"/>
+              </a:rPr>
+              <a:t>• Novelty: Contest ↔ NFHS ↔ SSLC triangulation + residual-gap targeting of districts</a:t>
+            </a:r>
+            <a:endParaRPr lang="en-IN" sz="2000" b="0" u="none" strike="noStrike" dirty="0">
               <a:solidFill>
                 <a:srgbClr val="000000"/>
               </a:solidFill>
@@ -6165,17 +6045,17 @@
               </a:lnSpc>
             </a:pPr>
             <a:r>
-              <a:rPr lang="en-US" sz="2000" b="0" u="none" strike="noStrike">
-                <a:solidFill>
-                  <a:schemeClr val="dk1"/>
-                </a:solidFill>
-                <a:effectLst/>
-                <a:uFillTx/>
-                <a:latin typeface="Calibri"/>
-              </a:rPr>
-              <a:t>• Scalability</a:t>
-            </a:r>
-            <a:endParaRPr lang="en-IN" sz="2000" b="0" u="none" strike="noStrike">
+              <a:rPr lang="en-US" sz="2000" b="0" u="none" strike="noStrike" dirty="0">
+                <a:solidFill>
+                  <a:schemeClr val="dk1"/>
+                </a:solidFill>
+                <a:effectLst/>
+                <a:uFillTx/>
+                <a:latin typeface="Calibri"/>
+              </a:rPr>
+              <a:t>• Scalability: Crosswalk + pipeline are reusable for every new contest year and district</a:t>
+            </a:r>
+            <a:endParaRPr lang="en-IN" sz="2000" b="0" u="none" strike="noStrike" dirty="0">
               <a:solidFill>
                 <a:srgbClr val="000000"/>
               </a:solidFill>
@@ -6191,17 +6071,17 @@
               </a:lnSpc>
             </a:pPr>
             <a:r>
-              <a:rPr lang="en-US" sz="2000" b="0" u="none" strike="noStrike">
-                <a:solidFill>
-                  <a:schemeClr val="dk1"/>
-                </a:solidFill>
-                <a:effectLst/>
-                <a:uFillTx/>
-                <a:latin typeface="Calibri"/>
-              </a:rPr>
-              <a:t>• Limitations</a:t>
-            </a:r>
-            <a:endParaRPr lang="en-IN" sz="2000" b="0" u="none" strike="noStrike">
+              <a:rPr lang="en-US" sz="2000" b="0" u="none" strike="noStrike" dirty="0">
+                <a:solidFill>
+                  <a:schemeClr val="dk1"/>
+                </a:solidFill>
+                <a:effectLst/>
+                <a:uFillTx/>
+                <a:latin typeface="Calibri"/>
+              </a:rPr>
+              <a:t>• Limitations: Ecological (district-level) inference; SSLC cohort differs ~4–6 yrs; small coastal n</a:t>
+            </a:r>
+            <a:endParaRPr lang="en-IN" sz="2000" b="0" u="none" strike="noStrike" dirty="0">
               <a:solidFill>
                 <a:srgbClr val="000000"/>
               </a:solidFill>
@@ -6217,17 +6097,61 @@
               </a:lnSpc>
             </a:pPr>
             <a:r>
-              <a:rPr lang="en-US" sz="2000" b="0" u="none" strike="noStrike">
-                <a:solidFill>
-                  <a:schemeClr val="dk1"/>
-                </a:solidFill>
-                <a:effectLst/>
-                <a:uFillTx/>
-                <a:latin typeface="Calibri"/>
-              </a:rPr>
-              <a:t>• Expected impact</a:t>
-            </a:r>
-            <a:endParaRPr lang="en-IN" sz="2000" b="0" u="none" strike="noStrike">
+              <a:rPr lang="en-US" sz="2000" b="0" u="none" strike="noStrike" dirty="0">
+                <a:solidFill>
+                  <a:schemeClr val="dk1"/>
+                </a:solidFill>
+                <a:effectLst/>
+                <a:uFillTx/>
+                <a:latin typeface="Calibri"/>
+              </a:rPr>
+              <a:t>• Expected impact: Sharper, evidence-based </a:t>
+            </a:r>
+            <a:r>
+              <a:rPr lang="en-US" sz="2000" b="0" u="none" strike="noStrike" dirty="0" err="1">
+                <a:solidFill>
+                  <a:schemeClr val="dk1"/>
+                </a:solidFill>
+                <a:effectLst/>
+                <a:uFillTx/>
+                <a:latin typeface="Calibri"/>
+              </a:rPr>
+              <a:t>prioritisation</a:t>
+            </a:r>
+            <a:r>
+              <a:rPr lang="en-US" sz="2000" b="0" u="none" strike="noStrike" dirty="0">
+                <a:solidFill>
+                  <a:schemeClr val="dk1"/>
+                </a:solidFill>
+                <a:effectLst/>
+                <a:uFillTx/>
+                <a:latin typeface="Calibri"/>
+              </a:rPr>
+              <a:t> for foundational-</a:t>
+            </a:r>
+            <a:r>
+              <a:rPr lang="en-US" sz="2000" b="0" u="none" strike="noStrike" dirty="0" err="1">
+                <a:solidFill>
+                  <a:schemeClr val="dk1"/>
+                </a:solidFill>
+                <a:effectLst/>
+                <a:uFillTx/>
+                <a:latin typeface="Calibri"/>
+              </a:rPr>
+              <a:t>maths</a:t>
+            </a:r>
+            <a:r>
+              <a:rPr lang="en-US" sz="2000" b="0" u="none" strike="noStrike" dirty="0">
+                <a:solidFill>
+                  <a:schemeClr val="dk1"/>
+                </a:solidFill>
+                <a:effectLst/>
+                <a:uFillTx/>
+                <a:latin typeface="Calibri"/>
+              </a:rPr>
+              <a:t> intervention</a:t>
+            </a:r>
+            <a:endParaRPr lang="en-IN" sz="2000" b="0" u="none" strike="noStrike" dirty="0">
               <a:solidFill>
                 <a:srgbClr val="000000"/>
               </a:solidFill>
@@ -6272,19 +6196,14 @@
       </p:sp>
     </p:spTree>
   </p:cSld>
-  <mc:AlternateContent>
-    <mc:Choice Requires="p14">
-      <p:transition spd="slow" p14:dur="2000"/>
-    </mc:Choice>
-    <mc:Fallback>
-      <p:transition spd="slow"/>
-    </mc:Fallback>
-  </mc:AlternateContent>
+  <p:clrMapOvr>
+    <a:masterClrMapping/>
+  </p:clrMapOvr>
 </p:sld>
 </file>
 
 <file path=ppt/slides/slide11.xml><?xml version="1.0" encoding="utf-8"?>
-<p:sld xmlns:a="http://schemas.openxmlformats.org/drawingml/2006/main" xmlns:p="http://schemas.openxmlformats.org/presentationml/2006/main" xmlns:r="http://schemas.openxmlformats.org/officeDocument/2006/relationships" xmlns:p14="http://schemas.microsoft.com/office/powerpoint/2010/main" xmlns:p15="http://schemas.microsoft.com/office/powerpoint/2012/main" xmlns:mc="http://schemas.openxmlformats.org/markup-compatibility/2006">
+<p:sld xmlns:a="http://schemas.openxmlformats.org/drawingml/2006/main" xmlns:r="http://schemas.openxmlformats.org/officeDocument/2006/relationships" xmlns:p="http://schemas.openxmlformats.org/presentationml/2006/main">
   <p:cSld>
     <p:spTree>
       <p:nvGrpSpPr>
@@ -6324,9 +6243,10 @@
           </a:ln>
         </p:spPr>
         <p:txBody>
-          <a:bodyPr lIns="91440" rIns="91440" tIns="45720" bIns="45720" anchor="ctr">
-            <a:normAutofit fontScale="85000" lnSpcReduction="19999"/>
-          </a:bodyPr>
+          <a:bodyPr lIns="91440" tIns="45720" rIns="91440" bIns="45720" anchor="ctr">
+            <a:normAutofit fontScale="90000"/>
+          </a:bodyPr>
+          <a:lstStyle/>
           <a:p>
             <a:pPr indent="0" algn="ctr" defTabSz="457200">
               <a:lnSpc>
@@ -6367,8 +6287,8 @@
         </p:nvSpPr>
         <p:spPr>
           <a:xfrm>
-            <a:off x="731520" y="1097280"/>
-            <a:ext cx="5486040" cy="4571640"/>
+            <a:off x="731519" y="1097280"/>
+            <a:ext cx="9752907" cy="1014209"/>
           </a:xfrm>
           <a:prstGeom prst="rect">
             <a:avLst/>
@@ -6379,15 +6299,22 @@
           </a:ln>
         </p:spPr>
         <p:style>
-          <a:lnRef idx="0"/>
-          <a:fillRef idx="0"/>
-          <a:effectRef idx="0"/>
+          <a:lnRef idx="0">
+            <a:scrgbClr r="0" g="0" b="0"/>
+          </a:lnRef>
+          <a:fillRef idx="0">
+            <a:scrgbClr r="0" g="0" b="0"/>
+          </a:fillRef>
+          <a:effectRef idx="0">
+            <a:scrgbClr r="0" g="0" b="0"/>
+          </a:effectRef>
           <a:fontRef idx="minor"/>
         </p:style>
         <p:txBody>
-          <a:bodyPr wrap="none" lIns="90000" rIns="90000" tIns="45000" bIns="45000" anchor="t">
+          <a:bodyPr wrap="square" lIns="90000" tIns="45000" rIns="90000" bIns="45000" anchor="t">
             <a:spAutoFit/>
           </a:bodyPr>
+          <a:lstStyle/>
           <a:p>
             <a:pPr defTabSz="457200">
               <a:lnSpc>
@@ -6395,17 +6322,17 @@
               </a:lnSpc>
             </a:pPr>
             <a:r>
-              <a:rPr lang="en-US" sz="2000" b="0" u="none" strike="noStrike">
-                <a:solidFill>
-                  <a:schemeClr val="dk1"/>
-                </a:solidFill>
-                <a:effectLst/>
-                <a:uFillTx/>
-                <a:latin typeface="Calibri"/>
-              </a:rPr>
-              <a:t>• Top takeaways</a:t>
-            </a:r>
-            <a:endParaRPr lang="en-IN" sz="2000" b="0" u="none" strike="noStrike">
+              <a:rPr lang="en-US" sz="2000" b="0" u="none" strike="noStrike" dirty="0">
+                <a:solidFill>
+                  <a:schemeClr val="dk1"/>
+                </a:solidFill>
+                <a:effectLst/>
+                <a:uFillTx/>
+                <a:latin typeface="Calibri"/>
+              </a:rPr>
+              <a:t>• Top takeaways: Gaps are between-district &amp; structural. development explains ~43%; the residual gap is an action list</a:t>
+            </a:r>
+            <a:endParaRPr lang="en-IN" sz="2000" b="0" u="none" strike="noStrike" dirty="0">
               <a:solidFill>
                 <a:srgbClr val="000000"/>
               </a:solidFill>
@@ -6421,17 +6348,17 @@
               </a:lnSpc>
             </a:pPr>
             <a:r>
-              <a:rPr lang="en-US" sz="2000" b="0" u="none" strike="noStrike">
-                <a:solidFill>
-                  <a:schemeClr val="dk1"/>
-                </a:solidFill>
-                <a:effectLst/>
-                <a:uFillTx/>
-                <a:latin typeface="Calibri"/>
-              </a:rPr>
-              <a:t>• Next steps</a:t>
-            </a:r>
-            <a:endParaRPr lang="en-IN" sz="2000" b="0" u="none" strike="noStrike">
+              <a:rPr lang="en-US" sz="2000" b="0" u="none" strike="noStrike" dirty="0">
+                <a:solidFill>
+                  <a:schemeClr val="dk1"/>
+                </a:solidFill>
+                <a:effectLst/>
+                <a:uFillTx/>
+                <a:latin typeface="Calibri"/>
+              </a:rPr>
+              <a:t>• Next steps: Competency-level drill-down; validate priority districts on the ground</a:t>
+            </a:r>
+            <a:endParaRPr lang="en-IN" sz="2000" b="0" u="none" strike="noStrike" dirty="0">
               <a:solidFill>
                 <a:srgbClr val="000000"/>
               </a:solidFill>
@@ -6440,32 +6367,6 @@
               <a:latin typeface="Arial"/>
             </a:endParaRPr>
           </a:p>
-          <a:p>
-            <a:pPr defTabSz="457200">
-              <a:lnSpc>
-                <a:spcPct val="100000"/>
-              </a:lnSpc>
-            </a:pPr>
-            <a:r>
-              <a:rPr lang="en-US" sz="2000" b="0" u="none" strike="noStrike">
-                <a:solidFill>
-                  <a:schemeClr val="dk1"/>
-                </a:solidFill>
-                <a:effectLst/>
-                <a:uFillTx/>
-                <a:latin typeface="Calibri"/>
-              </a:rPr>
-              <a:t>• Thank you</a:t>
-            </a:r>
-            <a:endParaRPr lang="en-IN" sz="2000" b="0" u="none" strike="noStrike">
-              <a:solidFill>
-                <a:srgbClr val="000000"/>
-              </a:solidFill>
-              <a:effectLst/>
-              <a:uFillTx/>
-              <a:latin typeface="Arial"/>
-            </a:endParaRPr>
-          </a:p>
         </p:txBody>
       </p:sp>
       <p:sp>
@@ -6502,19 +6403,14 @@
       </p:sp>
     </p:spTree>
   </p:cSld>
-  <mc:AlternateContent>
-    <mc:Choice Requires="p14">
-      <p:transition spd="slow" p14:dur="2000"/>
-    </mc:Choice>
-    <mc:Fallback>
-      <p:transition spd="slow"/>
-    </mc:Fallback>
-  </mc:AlternateContent>
+  <p:clrMapOvr>
+    <a:masterClrMapping/>
+  </p:clrMapOvr>
 </p:sld>
 </file>
 
 <file path=ppt/slides/slide2.xml><?xml version="1.0" encoding="utf-8"?>
-<p:sld xmlns:a="http://schemas.openxmlformats.org/drawingml/2006/main" xmlns:p="http://schemas.openxmlformats.org/presentationml/2006/main" xmlns:r="http://schemas.openxmlformats.org/officeDocument/2006/relationships" xmlns:p14="http://schemas.microsoft.com/office/powerpoint/2010/main" xmlns:p15="http://schemas.microsoft.com/office/powerpoint/2012/main" xmlns:mc="http://schemas.openxmlformats.org/markup-compatibility/2006">
+<p:sld xmlns:a="http://schemas.openxmlformats.org/drawingml/2006/main" xmlns:r="http://schemas.openxmlformats.org/officeDocument/2006/relationships" xmlns:p="http://schemas.openxmlformats.org/presentationml/2006/main">
   <p:cSld>
     <p:spTree>
       <p:nvGrpSpPr>
@@ -6554,9 +6450,10 @@
           </a:ln>
         </p:spPr>
         <p:txBody>
-          <a:bodyPr lIns="91440" rIns="91440" tIns="45720" bIns="45720" anchor="ctr">
-            <a:normAutofit fontScale="85000" lnSpcReduction="19999"/>
-          </a:bodyPr>
+          <a:bodyPr lIns="91440" tIns="45720" rIns="91440" bIns="45720" anchor="ctr">
+            <a:normAutofit fontScale="90000"/>
+          </a:bodyPr>
+          <a:lstStyle/>
           <a:p>
             <a:pPr indent="0" algn="ctr" defTabSz="457200">
               <a:lnSpc>
@@ -6598,7 +6495,7 @@
         <p:spPr>
           <a:xfrm>
             <a:off x="731520" y="1097280"/>
-            <a:ext cx="5486040" cy="4571640"/>
+            <a:ext cx="10449098" cy="2029871"/>
           </a:xfrm>
           <a:prstGeom prst="rect">
             <a:avLst/>
@@ -6609,15 +6506,22 @@
           </a:ln>
         </p:spPr>
         <p:style>
-          <a:lnRef idx="0"/>
-          <a:fillRef idx="0"/>
-          <a:effectRef idx="0"/>
+          <a:lnRef idx="0">
+            <a:scrgbClr r="0" g="0" b="0"/>
+          </a:lnRef>
+          <a:fillRef idx="0">
+            <a:scrgbClr r="0" g="0" b="0"/>
+          </a:fillRef>
+          <a:effectRef idx="0">
+            <a:scrgbClr r="0" g="0" b="0"/>
+          </a:effectRef>
           <a:fontRef idx="minor"/>
         </p:style>
         <p:txBody>
-          <a:bodyPr wrap="none" lIns="90000" rIns="90000" tIns="45000" bIns="45000" anchor="t">
+          <a:bodyPr wrap="square" lIns="90000" tIns="45000" rIns="90000" bIns="45000" anchor="t">
             <a:spAutoFit/>
           </a:bodyPr>
+          <a:lstStyle/>
           <a:p>
             <a:pPr defTabSz="457200">
               <a:lnSpc>
@@ -6625,23 +6529,75 @@
               </a:lnSpc>
             </a:pPr>
             <a:r>
-              <a:rPr lang="en-US" sz="2000" b="0" u="none" strike="noStrike">
-                <a:solidFill>
-                  <a:schemeClr val="dk1"/>
-                </a:solidFill>
-                <a:effectLst/>
-                <a:uFillTx/>
-                <a:latin typeface="Calibri"/>
-              </a:rPr>
-              <a:t>• Educational challenge</a:t>
-            </a:r>
-            <a:endParaRPr lang="en-IN" sz="2000" b="0" u="none" strike="noStrike">
+              <a:rPr lang="en-US" b="0" u="none" strike="noStrike" dirty="0">
+                <a:solidFill>
+                  <a:schemeClr val="dk1"/>
+                </a:solidFill>
+                <a:effectLst/>
+                <a:uFillTx/>
+              </a:rPr>
+              <a:t>• Educational challenge: </a:t>
+            </a:r>
+            <a:r>
+              <a:rPr lang="en-US" dirty="0"/>
+              <a:t>Rural </a:t>
+            </a:r>
+            <a:r>
+              <a:rPr lang="en-US" dirty="0" err="1"/>
+              <a:t>maths</a:t>
+            </a:r>
+            <a:r>
+              <a:rPr lang="en-US" dirty="0"/>
+              <a:t> is stuck — only about 53% of answers are correct, and it stays flat from grade 4 to 6. The big differences are between districts, not within them.</a:t>
+            </a:r>
+          </a:p>
+          <a:p>
+            <a:pPr defTabSz="457200">
+              <a:lnSpc>
+                <a:spcPct val="100000"/>
+              </a:lnSpc>
+            </a:pPr>
+            <a:r>
+              <a:rPr lang="en-US" b="0" u="none" strike="noStrike" dirty="0">
+                <a:solidFill>
+                  <a:schemeClr val="dk1"/>
+                </a:solidFill>
+                <a:effectLst/>
+                <a:uFillTx/>
+              </a:rPr>
+              <a:t>• Objectives: </a:t>
+            </a:r>
+            <a:r>
+              <a:rPr lang="en-US" dirty="0"/>
+              <a:t>Find where the gaps are (by district, gender, and topic) and see if health and Class-10 results help explain them.</a:t>
+            </a:r>
+          </a:p>
+          <a:p>
+            <a:pPr defTabSz="457200">
+              <a:lnSpc>
+                <a:spcPct val="100000"/>
+              </a:lnSpc>
+            </a:pPr>
+            <a:r>
+              <a:rPr lang="en-US" b="0" u="none" strike="noStrike" dirty="0">
+                <a:solidFill>
+                  <a:schemeClr val="dk1"/>
+                </a:solidFill>
+                <a:effectLst/>
+                <a:uFillTx/>
+              </a:rPr>
+              <a:t>• Key questions: </a:t>
+            </a:r>
+            <a:r>
+              <a:rPr lang="en-US" dirty="0"/>
+              <a:t>Which districts are weakest? What explains it? Which districts do worse than their background would suggest?</a:t>
+            </a:r>
+            <a:endParaRPr lang="en-US" b="0" u="none" strike="noStrike" dirty="0">
               <a:solidFill>
-                <a:srgbClr val="000000"/>
+                <a:schemeClr val="dk1"/>
               </a:solidFill>
               <a:effectLst/>
               <a:uFillTx/>
-              <a:latin typeface="Arial"/>
             </a:endParaRPr>
           </a:p>
           <a:p>
@@ -6651,75 +6607,25 @@
               </a:lnSpc>
             </a:pPr>
             <a:r>
-              <a:rPr lang="en-US" sz="2000" b="0" u="none" strike="noStrike">
-                <a:solidFill>
-                  <a:schemeClr val="dk1"/>
-                </a:solidFill>
-                <a:effectLst/>
-                <a:uFillTx/>
-                <a:latin typeface="Calibri"/>
-              </a:rPr>
-              <a:t>• Objectives</a:t>
-            </a:r>
-            <a:endParaRPr lang="en-IN" sz="2000" b="0" u="none" strike="noStrike">
+              <a:rPr lang="en-US" b="0" u="none" strike="noStrike" dirty="0">
+                <a:solidFill>
+                  <a:schemeClr val="dk1"/>
+                </a:solidFill>
+                <a:effectLst/>
+                <a:uFillTx/>
+              </a:rPr>
+              <a:t>• Why it matters: </a:t>
+            </a:r>
+            <a:r>
+              <a:rPr lang="en-US" dirty="0"/>
+              <a:t>Helps send limited time and money to the districts and topics that can improve the most.</a:t>
+            </a:r>
+            <a:endParaRPr lang="en-IN" b="0" u="none" strike="noStrike" dirty="0">
               <a:solidFill>
                 <a:srgbClr val="000000"/>
               </a:solidFill>
               <a:effectLst/>
               <a:uFillTx/>
-              <a:latin typeface="Arial"/>
-            </a:endParaRPr>
-          </a:p>
-          <a:p>
-            <a:pPr defTabSz="457200">
-              <a:lnSpc>
-                <a:spcPct val="100000"/>
-              </a:lnSpc>
-            </a:pPr>
-            <a:r>
-              <a:rPr lang="en-US" sz="2000" b="0" u="none" strike="noStrike">
-                <a:solidFill>
-                  <a:schemeClr val="dk1"/>
-                </a:solidFill>
-                <a:effectLst/>
-                <a:uFillTx/>
-                <a:latin typeface="Calibri"/>
-              </a:rPr>
-              <a:t>• Key questions</a:t>
-            </a:r>
-            <a:endParaRPr lang="en-IN" sz="2000" b="0" u="none" strike="noStrike">
-              <a:solidFill>
-                <a:srgbClr val="000000"/>
-              </a:solidFill>
-              <a:effectLst/>
-              <a:uFillTx/>
-              <a:latin typeface="Arial"/>
-            </a:endParaRPr>
-          </a:p>
-          <a:p>
-            <a:pPr defTabSz="457200">
-              <a:lnSpc>
-                <a:spcPct val="100000"/>
-              </a:lnSpc>
-            </a:pPr>
-            <a:r>
-              <a:rPr lang="en-US" sz="2000" b="0" u="none" strike="noStrike">
-                <a:solidFill>
-                  <a:schemeClr val="dk1"/>
-                </a:solidFill>
-                <a:effectLst/>
-                <a:uFillTx/>
-                <a:latin typeface="Calibri"/>
-              </a:rPr>
-              <a:t>• Why it matters</a:t>
-            </a:r>
-            <a:endParaRPr lang="en-IN" sz="2000" b="0" u="none" strike="noStrike">
-              <a:solidFill>
-                <a:srgbClr val="000000"/>
-              </a:solidFill>
-              <a:effectLst/>
-              <a:uFillTx/>
-              <a:latin typeface="Arial"/>
             </a:endParaRPr>
           </a:p>
         </p:txBody>
@@ -6758,19 +6664,14 @@
       </p:sp>
     </p:spTree>
   </p:cSld>
-  <mc:AlternateContent>
-    <mc:Choice Requires="p14">
-      <p:transition spd="slow" p14:dur="2000"/>
-    </mc:Choice>
-    <mc:Fallback>
-      <p:transition spd="slow"/>
-    </mc:Fallback>
-  </mc:AlternateContent>
+  <p:clrMapOvr>
+    <a:masterClrMapping/>
+  </p:clrMapOvr>
 </p:sld>
 </file>
 
 <file path=ppt/slides/slide3.xml><?xml version="1.0" encoding="utf-8"?>
-<p:sld xmlns:a="http://schemas.openxmlformats.org/drawingml/2006/main" xmlns:p="http://schemas.openxmlformats.org/presentationml/2006/main" xmlns:r="http://schemas.openxmlformats.org/officeDocument/2006/relationships" xmlns:p14="http://schemas.microsoft.com/office/powerpoint/2010/main" xmlns:p15="http://schemas.microsoft.com/office/powerpoint/2012/main" xmlns:mc="http://schemas.openxmlformats.org/markup-compatibility/2006">
+<p:sld xmlns:a="http://schemas.openxmlformats.org/drawingml/2006/main" xmlns:r="http://schemas.openxmlformats.org/officeDocument/2006/relationships" xmlns:p="http://schemas.openxmlformats.org/presentationml/2006/main">
   <p:cSld>
     <p:spTree>
       <p:nvGrpSpPr>
@@ -6810,9 +6711,10 @@
           </a:ln>
         </p:spPr>
         <p:txBody>
-          <a:bodyPr lIns="91440" rIns="91440" tIns="45720" bIns="45720" anchor="ctr">
-            <a:normAutofit fontScale="85000" lnSpcReduction="19999"/>
-          </a:bodyPr>
+          <a:bodyPr lIns="91440" tIns="45720" rIns="91440" bIns="45720" anchor="ctr">
+            <a:normAutofit fontScale="90000"/>
+          </a:bodyPr>
+          <a:lstStyle/>
           <a:p>
             <a:pPr indent="0" algn="ctr" defTabSz="457200">
               <a:lnSpc>
@@ -6853,8 +6755,8 @@
         </p:nvSpPr>
         <p:spPr>
           <a:xfrm>
-            <a:off x="731520" y="1097280"/>
-            <a:ext cx="5486040" cy="4571640"/>
+            <a:off x="731519" y="1097280"/>
+            <a:ext cx="10688089" cy="1937538"/>
           </a:xfrm>
           <a:prstGeom prst="rect">
             <a:avLst/>
@@ -6865,15 +6767,22 @@
           </a:ln>
         </p:spPr>
         <p:style>
-          <a:lnRef idx="0"/>
-          <a:fillRef idx="0"/>
-          <a:effectRef idx="0"/>
+          <a:lnRef idx="0">
+            <a:scrgbClr r="0" g="0" b="0"/>
+          </a:lnRef>
+          <a:fillRef idx="0">
+            <a:scrgbClr r="0" g="0" b="0"/>
+          </a:fillRef>
+          <a:effectRef idx="0">
+            <a:scrgbClr r="0" g="0" b="0"/>
+          </a:effectRef>
           <a:fontRef idx="minor"/>
         </p:style>
         <p:txBody>
-          <a:bodyPr wrap="none" lIns="90000" rIns="90000" tIns="45000" bIns="45000" anchor="t">
+          <a:bodyPr wrap="square" lIns="90000" tIns="45000" rIns="90000" bIns="45000" anchor="t">
             <a:spAutoFit/>
           </a:bodyPr>
+          <a:lstStyle/>
           <a:p>
             <a:pPr defTabSz="457200">
               <a:lnSpc>
@@ -6881,17 +6790,39 @@
               </a:lnSpc>
             </a:pPr>
             <a:r>
-              <a:rPr lang="en-US" sz="2000" b="0" u="none" strike="noStrike">
-                <a:solidFill>
-                  <a:schemeClr val="dk1"/>
-                </a:solidFill>
-                <a:effectLst/>
-                <a:uFillTx/>
-                <a:latin typeface="Calibri"/>
-              </a:rPr>
-              <a:t>• Dataset summary</a:t>
-            </a:r>
-            <a:endParaRPr lang="en-IN" sz="2000" b="0" u="none" strike="noStrike">
+              <a:rPr lang="en-US" sz="2000" b="0" u="none" strike="noStrike" dirty="0">
+                <a:solidFill>
+                  <a:schemeClr val="dk1"/>
+                </a:solidFill>
+                <a:effectLst/>
+                <a:uFillTx/>
+                <a:latin typeface="Calibri"/>
+              </a:rPr>
+              <a:t>• Dataset summary: Akshara GP </a:t>
+            </a:r>
+            <a:r>
+              <a:rPr lang="en-US" sz="2000" b="0" u="none" strike="noStrike" dirty="0" err="1">
+                <a:solidFill>
+                  <a:schemeClr val="dk1"/>
+                </a:solidFill>
+                <a:effectLst/>
+                <a:uFillTx/>
+                <a:latin typeface="Calibri"/>
+              </a:rPr>
+              <a:t>Maths</a:t>
+            </a:r>
+            <a:r>
+              <a:rPr lang="en-US" sz="2000" b="0" u="none" strike="noStrike" dirty="0">
+                <a:solidFill>
+                  <a:schemeClr val="dk1"/>
+                </a:solidFill>
+                <a:effectLst/>
+                <a:uFillTx/>
+                <a:latin typeface="Calibri"/>
+              </a:rPr>
+              <a:t> Contest — 1.38M students, grades 4–6, 2022–23 to 2024–25, 31 districts</a:t>
+            </a:r>
+            <a:endParaRPr lang="en-IN" sz="2000" b="0" u="none" strike="noStrike" dirty="0">
               <a:solidFill>
                 <a:srgbClr val="000000"/>
               </a:solidFill>
@@ -6907,17 +6838,77 @@
               </a:lnSpc>
             </a:pPr>
             <a:r>
-              <a:rPr lang="en-US" sz="2000" b="0" u="none" strike="noStrike">
-                <a:solidFill>
-                  <a:schemeClr val="dk1"/>
-                </a:solidFill>
-                <a:effectLst/>
-                <a:uFillTx/>
-                <a:latin typeface="Calibri"/>
-              </a:rPr>
-              <a:t>• Variables</a:t>
-            </a:r>
-            <a:endParaRPr lang="en-IN" sz="2000" b="0" u="none" strike="noStrike">
+              <a:rPr lang="en-US" sz="2000" b="0" u="none" strike="noStrike" dirty="0">
+                <a:solidFill>
+                  <a:schemeClr val="dk1"/>
+                </a:solidFill>
+                <a:effectLst/>
+                <a:uFillTx/>
+                <a:latin typeface="Calibri"/>
+              </a:rPr>
+              <a:t>• Variables: Q1–Q20 (0/1) → score; geography District, Block</a:t>
+            </a:r>
+            <a:r>
+              <a:rPr lang="en-US" sz="2000" dirty="0">
+                <a:solidFill>
+                  <a:schemeClr val="dk1"/>
+                </a:solidFill>
+                <a:latin typeface="Calibri"/>
+              </a:rPr>
+              <a:t>, </a:t>
+            </a:r>
+            <a:r>
+              <a:rPr lang="en-US" sz="2000" b="0" u="none" strike="noStrike" dirty="0">
+                <a:solidFill>
+                  <a:schemeClr val="dk1"/>
+                </a:solidFill>
+                <a:effectLst/>
+                <a:uFillTx/>
+                <a:latin typeface="Calibri"/>
+              </a:rPr>
+              <a:t>Cluster</a:t>
+            </a:r>
+            <a:r>
+              <a:rPr lang="en-US" sz="2000" dirty="0">
+                <a:solidFill>
+                  <a:schemeClr val="dk1"/>
+                </a:solidFill>
+                <a:latin typeface="Calibri"/>
+              </a:rPr>
+              <a:t>, </a:t>
+            </a:r>
+            <a:r>
+              <a:rPr lang="en-US" sz="2000" b="0" u="none" strike="noStrike" dirty="0">
+                <a:solidFill>
+                  <a:schemeClr val="dk1"/>
+                </a:solidFill>
+                <a:effectLst/>
+                <a:uFillTx/>
+                <a:latin typeface="Calibri"/>
+              </a:rPr>
+              <a:t>GP</a:t>
+            </a:r>
+            <a:r>
+              <a:rPr lang="en-US" sz="2000" dirty="0">
+                <a:solidFill>
+                  <a:schemeClr val="dk1"/>
+                </a:solidFill>
+                <a:latin typeface="Calibri"/>
+              </a:rPr>
+              <a:t>,</a:t>
+            </a:r>
+            <a:r>
+              <a:rPr lang="en-US" sz="2000" b="0" u="none" strike="noStrike" dirty="0">
+                <a:solidFill>
+                  <a:schemeClr val="dk1"/>
+                </a:solidFill>
+                <a:effectLst/>
+                <a:uFillTx/>
+                <a:latin typeface="Calibri"/>
+              </a:rPr>
+              <a:t> Gender</a:t>
+            </a:r>
+            <a:endParaRPr lang="en-IN" sz="2000" b="0" u="none" strike="noStrike" dirty="0">
               <a:solidFill>
                 <a:srgbClr val="000000"/>
               </a:solidFill>
@@ -6933,17 +6924,39 @@
               </a:lnSpc>
             </a:pPr>
             <a:r>
-              <a:rPr lang="en-US" sz="2000" b="0" u="none" strike="noStrike">
-                <a:solidFill>
-                  <a:schemeClr val="dk1"/>
-                </a:solidFill>
-                <a:effectLst/>
-                <a:uFillTx/>
-                <a:latin typeface="Calibri"/>
-              </a:rPr>
-              <a:t>• Cleaning</a:t>
-            </a:r>
-            <a:endParaRPr lang="en-IN" sz="2000" b="0" u="none" strike="noStrike">
+              <a:rPr lang="en-US" sz="2000" b="0" u="none" strike="noStrike" dirty="0">
+                <a:solidFill>
+                  <a:schemeClr val="dk1"/>
+                </a:solidFill>
+                <a:effectLst/>
+                <a:uFillTx/>
+                <a:latin typeface="Calibri"/>
+              </a:rPr>
+              <a:t>• Context data: NFHS-5 (health/development) + SSLC 2025 Class-10 </a:t>
+            </a:r>
+            <a:r>
+              <a:rPr lang="en-US" sz="2000" b="0" u="none" strike="noStrike" dirty="0" err="1">
+                <a:solidFill>
+                  <a:schemeClr val="dk1"/>
+                </a:solidFill>
+                <a:effectLst/>
+                <a:uFillTx/>
+                <a:latin typeface="Calibri"/>
+              </a:rPr>
+              <a:t>maths</a:t>
+            </a:r>
+            <a:r>
+              <a:rPr lang="en-US" sz="2000" b="0" u="none" strike="noStrike" dirty="0">
+                <a:solidFill>
+                  <a:schemeClr val="dk1"/>
+                </a:solidFill>
+                <a:effectLst/>
+                <a:uFillTx/>
+                <a:latin typeface="Calibri"/>
+              </a:rPr>
+              <a:t> pass%</a:t>
+            </a:r>
+            <a:endParaRPr lang="en-IN" sz="2000" b="0" u="none" strike="noStrike" dirty="0">
               <a:solidFill>
                 <a:srgbClr val="000000"/>
               </a:solidFill>
@@ -6959,17 +6972,17 @@
               </a:lnSpc>
             </a:pPr>
             <a:r>
-              <a:rPr lang="en-US" sz="2000" b="0" u="none" strike="noStrike">
-                <a:solidFill>
-                  <a:schemeClr val="dk1"/>
-                </a:solidFill>
-                <a:effectLst/>
-                <a:uFillTx/>
-                <a:latin typeface="Calibri"/>
-              </a:rPr>
-              <a:t>• Assumptions</a:t>
-            </a:r>
-            <a:endParaRPr lang="en-IN" sz="2000" b="0" u="none" strike="noStrike">
+              <a:rPr lang="en-US" sz="2000" b="0" u="none" strike="noStrike" dirty="0">
+                <a:solidFill>
+                  <a:schemeClr val="dk1"/>
+                </a:solidFill>
+                <a:effectLst/>
+                <a:uFillTx/>
+                <a:latin typeface="Calibri"/>
+              </a:rPr>
+              <a:t>• Cleaning &amp; assumptions: Composite GP key, dynamic competency-header detection; NFHS/SSLC links are district-level</a:t>
+            </a:r>
+            <a:endParaRPr lang="en-IN" sz="2000" b="0" u="none" strike="noStrike" dirty="0">
               <a:solidFill>
                 <a:srgbClr val="000000"/>
               </a:solidFill>
@@ -7014,19 +7027,14 @@
       </p:sp>
     </p:spTree>
   </p:cSld>
-  <mc:AlternateContent>
-    <mc:Choice Requires="p14">
-      <p:transition spd="slow" p14:dur="2000"/>
-    </mc:Choice>
-    <mc:Fallback>
-      <p:transition spd="slow"/>
-    </mc:Fallback>
-  </mc:AlternateContent>
+  <p:clrMapOvr>
+    <a:masterClrMapping/>
+  </p:clrMapOvr>
 </p:sld>
 </file>
 
 <file path=ppt/slides/slide4.xml><?xml version="1.0" encoding="utf-8"?>
-<p:sld xmlns:a="http://schemas.openxmlformats.org/drawingml/2006/main" xmlns:p="http://schemas.openxmlformats.org/presentationml/2006/main" xmlns:r="http://schemas.openxmlformats.org/officeDocument/2006/relationships" xmlns:p14="http://schemas.microsoft.com/office/powerpoint/2010/main" xmlns:p15="http://schemas.microsoft.com/office/powerpoint/2012/main" xmlns:mc="http://schemas.openxmlformats.org/markup-compatibility/2006">
+<p:sld xmlns:a="http://schemas.openxmlformats.org/drawingml/2006/main" xmlns:r="http://schemas.openxmlformats.org/officeDocument/2006/relationships" xmlns:p="http://schemas.openxmlformats.org/presentationml/2006/main">
   <p:cSld>
     <p:spTree>
       <p:nvGrpSpPr>
@@ -7066,9 +7074,10 @@
           </a:ln>
         </p:spPr>
         <p:txBody>
-          <a:bodyPr lIns="91440" rIns="91440" tIns="45720" bIns="45720" anchor="ctr">
-            <a:normAutofit fontScale="85000" lnSpcReduction="19999"/>
-          </a:bodyPr>
+          <a:bodyPr lIns="91440" tIns="45720" rIns="91440" bIns="45720" anchor="ctr">
+            <a:normAutofit fontScale="90000"/>
+          </a:bodyPr>
+          <a:lstStyle/>
           <a:p>
             <a:pPr indent="0" algn="ctr" defTabSz="457200">
               <a:lnSpc>
@@ -7109,8 +7118,8 @@
         </p:nvSpPr>
         <p:spPr>
           <a:xfrm>
-            <a:off x="731520" y="1097280"/>
-            <a:ext cx="5486040" cy="4571640"/>
+            <a:off x="731519" y="1097280"/>
+            <a:ext cx="10553007" cy="1475873"/>
           </a:xfrm>
           <a:prstGeom prst="rect">
             <a:avLst/>
@@ -7121,117 +7130,123 @@
           </a:ln>
         </p:spPr>
         <p:style>
-          <a:lnRef idx="0"/>
-          <a:fillRef idx="0"/>
-          <a:effectRef idx="0"/>
+          <a:lnRef idx="0">
+            <a:scrgbClr r="0" g="0" b="0"/>
+          </a:lnRef>
+          <a:fillRef idx="0">
+            <a:scrgbClr r="0" g="0" b="0"/>
+          </a:fillRef>
+          <a:effectRef idx="0">
+            <a:scrgbClr r="0" g="0" b="0"/>
+          </a:effectRef>
           <a:fontRef idx="minor"/>
         </p:style>
         <p:txBody>
-          <a:bodyPr wrap="none" lIns="90000" rIns="90000" tIns="45000" bIns="45000" anchor="t">
+          <a:bodyPr wrap="square" lIns="90000" tIns="45000" rIns="90000" bIns="45000" anchor="t">
             <a:spAutoFit/>
           </a:bodyPr>
-          <a:p>
-            <a:pPr defTabSz="457200">
-              <a:lnSpc>
-                <a:spcPct val="100000"/>
-              </a:lnSpc>
-            </a:pPr>
-            <a:r>
-              <a:rPr lang="en-US" sz="2000" b="0" u="none" strike="noStrike">
-                <a:solidFill>
-                  <a:schemeClr val="dk1"/>
-                </a:solidFill>
-                <a:effectLst/>
-                <a:uFillTx/>
-                <a:latin typeface="Calibri"/>
-              </a:rPr>
-              <a:t>• Workflow</a:t>
-            </a:r>
-            <a:endParaRPr lang="en-IN" sz="2000" b="0" u="none" strike="noStrike">
+          <a:lstStyle/>
+          <a:p>
+            <a:pPr algn="just" defTabSz="457200">
+              <a:lnSpc>
+                <a:spcPct val="100000"/>
+              </a:lnSpc>
+            </a:pPr>
+            <a:r>
+              <a:rPr lang="en-US" b="0" u="none" strike="noStrike" dirty="0">
+                <a:solidFill>
+                  <a:schemeClr val="dk1"/>
+                </a:solidFill>
+                <a:effectLst/>
+                <a:uFillTx/>
+              </a:rPr>
+              <a:t>• Workflow: </a:t>
+            </a:r>
+            <a:r>
+              <a:rPr lang="en-US" dirty="0"/>
+              <a:t>EDA (accuracy, trends, gender, competency, NFHS correlation) → diagnostic model with residual segmentation → SSLC cross-board check → dashboard</a:t>
+            </a:r>
+          </a:p>
+          <a:p>
+            <a:pPr algn="just" defTabSz="457200">
+              <a:lnSpc>
+                <a:spcPct val="100000"/>
+              </a:lnSpc>
+            </a:pPr>
+            <a:r>
+              <a:rPr lang="en-US" b="0" u="none" strike="noStrike" dirty="0">
+                <a:solidFill>
+                  <a:schemeClr val="dk1"/>
+                </a:solidFill>
+                <a:effectLst/>
+                <a:uFillTx/>
+              </a:rPr>
+              <a:t>• Methods: Student-weighted district accuracy; Spearman rank correlations vs NFHS &amp; SSLC</a:t>
+            </a:r>
+            <a:endParaRPr lang="en-IN" b="0" u="none" strike="noStrike" dirty="0">
               <a:solidFill>
                 <a:srgbClr val="000000"/>
               </a:solidFill>
               <a:effectLst/>
               <a:uFillTx/>
-              <a:latin typeface="Arial"/>
             </a:endParaRPr>
           </a:p>
           <a:p>
-            <a:pPr defTabSz="457200">
-              <a:lnSpc>
-                <a:spcPct val="100000"/>
-              </a:lnSpc>
-            </a:pPr>
-            <a:r>
-              <a:rPr lang="en-US" sz="2000" b="0" u="none" strike="noStrike">
-                <a:solidFill>
-                  <a:schemeClr val="dk1"/>
-                </a:solidFill>
-                <a:effectLst/>
-                <a:uFillTx/>
-                <a:latin typeface="Calibri"/>
-              </a:rPr>
-              <a:t>• Methods</a:t>
-            </a:r>
-            <a:endParaRPr lang="en-IN" sz="2000" b="0" u="none" strike="noStrike">
+            <a:pPr algn="just" defTabSz="457200">
+              <a:lnSpc>
+                <a:spcPct val="100000"/>
+              </a:lnSpc>
+            </a:pPr>
+            <a:r>
+              <a:rPr lang="en-US" b="0" u="none" strike="noStrike" dirty="0">
+                <a:solidFill>
+                  <a:schemeClr val="dk1"/>
+                </a:solidFill>
+                <a:effectLst/>
+                <a:uFillTx/>
+              </a:rPr>
+              <a:t>• Models: OLS on one standardized development index (3 collinear NFHS features)</a:t>
+            </a:r>
+            <a:endParaRPr lang="en-IN" b="0" u="none" strike="noStrike" dirty="0">
               <a:solidFill>
                 <a:srgbClr val="000000"/>
               </a:solidFill>
               <a:effectLst/>
               <a:uFillTx/>
-              <a:latin typeface="Arial"/>
             </a:endParaRPr>
           </a:p>
           <a:p>
-            <a:pPr defTabSz="457200">
-              <a:lnSpc>
-                <a:spcPct val="100000"/>
-              </a:lnSpc>
-            </a:pPr>
-            <a:r>
-              <a:rPr lang="en-US" sz="2000" b="0" u="none" strike="noStrike">
-                <a:solidFill>
-                  <a:schemeClr val="dk1"/>
-                </a:solidFill>
-                <a:effectLst/>
-                <a:uFillTx/>
-                <a:latin typeface="Calibri"/>
-              </a:rPr>
-              <a:t>• Models</a:t>
-            </a:r>
-            <a:endParaRPr lang="en-IN" sz="2000" b="0" u="none" strike="noStrike">
+            <a:pPr algn="just" defTabSz="457200">
+              <a:lnSpc>
+                <a:spcPct val="100000"/>
+              </a:lnSpc>
+            </a:pPr>
+            <a:r>
+              <a:rPr lang="en-US" b="0" u="none" strike="noStrike" dirty="0">
+                <a:solidFill>
+                  <a:schemeClr val="dk1"/>
+                </a:solidFill>
+                <a:effectLst/>
+                <a:uFillTx/>
+              </a:rPr>
+              <a:t>• Validation: reproducible (seed 42); accuracy aggregated </a:t>
+            </a:r>
+            <a:r>
+              <a:rPr lang="en-US" b="0" u="none" strike="noStrike">
+                <a:solidFill>
+                  <a:schemeClr val="dk1"/>
+                </a:solidFill>
+                <a:effectLst/>
+                <a:uFillTx/>
+              </a:rPr>
+              <a:t>to NFHS</a:t>
+            </a:r>
+            <a:endParaRPr lang="en-IN" b="0" u="none" strike="noStrike" dirty="0">
               <a:solidFill>
                 <a:srgbClr val="000000"/>
               </a:solidFill>
               <a:effectLst/>
               <a:uFillTx/>
-              <a:latin typeface="Arial"/>
-            </a:endParaRPr>
-          </a:p>
-          <a:p>
-            <a:pPr defTabSz="457200">
-              <a:lnSpc>
-                <a:spcPct val="100000"/>
-              </a:lnSpc>
-            </a:pPr>
-            <a:r>
-              <a:rPr lang="en-US" sz="2000" b="0" u="none" strike="noStrike">
-                <a:solidFill>
-                  <a:schemeClr val="dk1"/>
-                </a:solidFill>
-                <a:effectLst/>
-                <a:uFillTx/>
-                <a:latin typeface="Calibri"/>
-              </a:rPr>
-              <a:t>• Validation</a:t>
-            </a:r>
-            <a:endParaRPr lang="en-IN" sz="2000" b="0" u="none" strike="noStrike">
-              <a:solidFill>
-                <a:srgbClr val="000000"/>
-              </a:solidFill>
-              <a:effectLst/>
-              <a:uFillTx/>
-              <a:latin typeface="Arial"/>
             </a:endParaRPr>
           </a:p>
         </p:txBody>
@@ -7270,19 +7285,14 @@
       </p:sp>
     </p:spTree>
   </p:cSld>
-  <mc:AlternateContent>
-    <mc:Choice Requires="p14">
-      <p:transition spd="slow" p14:dur="2000"/>
-    </mc:Choice>
-    <mc:Fallback>
-      <p:transition spd="slow"/>
-    </mc:Fallback>
-  </mc:AlternateContent>
+  <p:clrMapOvr>
+    <a:masterClrMapping/>
+  </p:clrMapOvr>
 </p:sld>
 </file>
 
 <file path=ppt/slides/slide5.xml><?xml version="1.0" encoding="utf-8"?>
-<p:sld xmlns:a="http://schemas.openxmlformats.org/drawingml/2006/main" xmlns:p="http://schemas.openxmlformats.org/presentationml/2006/main" xmlns:r="http://schemas.openxmlformats.org/officeDocument/2006/relationships" xmlns:p14="http://schemas.microsoft.com/office/powerpoint/2010/main" xmlns:p15="http://schemas.microsoft.com/office/powerpoint/2012/main" xmlns:mc="http://schemas.openxmlformats.org/markup-compatibility/2006">
+<p:sld xmlns:a="http://schemas.openxmlformats.org/drawingml/2006/main" xmlns:r="http://schemas.openxmlformats.org/officeDocument/2006/relationships" xmlns:p="http://schemas.openxmlformats.org/presentationml/2006/main">
   <p:cSld>
     <p:spTree>
       <p:nvGrpSpPr>
@@ -7322,9 +7332,10 @@
           </a:ln>
         </p:spPr>
         <p:txBody>
-          <a:bodyPr lIns="91440" rIns="91440" tIns="45720" bIns="45720" anchor="ctr">
-            <a:normAutofit fontScale="85000" lnSpcReduction="19999"/>
-          </a:bodyPr>
+          <a:bodyPr lIns="91440" tIns="45720" rIns="91440" bIns="45720" anchor="ctr">
+            <a:normAutofit fontScale="90000"/>
+          </a:bodyPr>
+          <a:lstStyle/>
           <a:p>
             <a:pPr indent="0" algn="ctr" defTabSz="457200">
               <a:lnSpc>
@@ -7365,8 +7376,8 @@
         </p:nvSpPr>
         <p:spPr>
           <a:xfrm>
-            <a:off x="731520" y="1097280"/>
-            <a:ext cx="5486040" cy="4571640"/>
+            <a:off x="731519" y="1097280"/>
+            <a:ext cx="10178935" cy="1629762"/>
           </a:xfrm>
           <a:prstGeom prst="rect">
             <a:avLst/>
@@ -7377,15 +7388,22 @@
           </a:ln>
         </p:spPr>
         <p:style>
-          <a:lnRef idx="0"/>
-          <a:fillRef idx="0"/>
-          <a:effectRef idx="0"/>
+          <a:lnRef idx="0">
+            <a:scrgbClr r="0" g="0" b="0"/>
+          </a:lnRef>
+          <a:fillRef idx="0">
+            <a:scrgbClr r="0" g="0" b="0"/>
+          </a:fillRef>
+          <a:effectRef idx="0">
+            <a:scrgbClr r="0" g="0" b="0"/>
+          </a:effectRef>
           <a:fontRef idx="minor"/>
         </p:style>
         <p:txBody>
-          <a:bodyPr wrap="none" lIns="90000" rIns="90000" tIns="45000" bIns="45000" anchor="t">
+          <a:bodyPr wrap="square" lIns="90000" tIns="45000" rIns="90000" bIns="45000" anchor="t">
             <a:spAutoFit/>
           </a:bodyPr>
+          <a:lstStyle/>
           <a:p>
             <a:pPr defTabSz="457200">
               <a:lnSpc>
@@ -7393,17 +7411,17 @@
               </a:lnSpc>
             </a:pPr>
             <a:r>
-              <a:rPr lang="en-US" sz="2000" b="0" u="none" strike="noStrike">
-                <a:solidFill>
-                  <a:schemeClr val="dk1"/>
-                </a:solidFill>
-                <a:effectLst/>
-                <a:uFillTx/>
-                <a:latin typeface="Calibri"/>
-              </a:rPr>
-              <a:t>• Finding</a:t>
-            </a:r>
-            <a:endParaRPr lang="en-IN" sz="2000" b="0" u="none" strike="noStrike">
+              <a:rPr lang="en-US" sz="2000" b="0" u="none" strike="noStrike" dirty="0">
+                <a:solidFill>
+                  <a:schemeClr val="dk1"/>
+                </a:solidFill>
+                <a:effectLst/>
+                <a:uFillTx/>
+                <a:latin typeface="Calibri"/>
+              </a:rPr>
+              <a:t>• Finding: Overall accuracy ~53%, flat across grades 4/5/6, and declining year-on-year</a:t>
+            </a:r>
+            <a:endParaRPr lang="en-IN" sz="2000" b="0" u="none" strike="noStrike" dirty="0">
               <a:solidFill>
                 <a:srgbClr val="000000"/>
               </a:solidFill>
@@ -7419,17 +7437,127 @@
               </a:lnSpc>
             </a:pPr>
             <a:r>
-              <a:rPr lang="en-US" sz="2000" b="0" u="none" strike="noStrike">
-                <a:solidFill>
-                  <a:schemeClr val="dk1"/>
-                </a:solidFill>
-                <a:effectLst/>
-                <a:uFillTx/>
-                <a:latin typeface="Calibri"/>
-              </a:rPr>
-              <a:t>• Evidence</a:t>
-            </a:r>
-            <a:endParaRPr lang="en-IN" sz="2000" b="0" u="none" strike="noStrike">
+              <a:rPr lang="en-US" sz="2000" b="0" u="none" strike="noStrike" dirty="0">
+                <a:solidFill>
+                  <a:schemeClr val="dk1"/>
+                </a:solidFill>
+                <a:effectLst/>
+                <a:uFillTx/>
+                <a:latin typeface="Calibri"/>
+              </a:rPr>
+              <a:t>• Evidence: Kalyana-Karnataka belt (</a:t>
+            </a:r>
+            <a:r>
+              <a:rPr lang="en-US" sz="2000" b="0" u="none" strike="noStrike" dirty="0" err="1">
+                <a:solidFill>
+                  <a:schemeClr val="dk1"/>
+                </a:solidFill>
+                <a:effectLst/>
+                <a:uFillTx/>
+                <a:latin typeface="Calibri"/>
+              </a:rPr>
+              <a:t>kalaburgi</a:t>
+            </a:r>
+            <a:r>
+              <a:rPr lang="en-US" sz="2000" b="0" u="none" strike="noStrike" dirty="0">
+                <a:solidFill>
+                  <a:schemeClr val="dk1"/>
+                </a:solidFill>
+                <a:effectLst/>
+                <a:uFillTx/>
+                <a:latin typeface="Calibri"/>
+              </a:rPr>
+              <a:t>, </a:t>
+            </a:r>
+            <a:r>
+              <a:rPr lang="en-US" sz="2000" b="0" u="none" strike="noStrike" dirty="0" err="1">
+                <a:solidFill>
+                  <a:schemeClr val="dk1"/>
+                </a:solidFill>
+                <a:effectLst/>
+                <a:uFillTx/>
+                <a:latin typeface="Calibri"/>
+              </a:rPr>
+              <a:t>raichur</a:t>
+            </a:r>
+            <a:r>
+              <a:rPr lang="en-US" sz="2000" b="0" u="none" strike="noStrike" dirty="0">
+                <a:solidFill>
+                  <a:schemeClr val="dk1"/>
+                </a:solidFill>
+                <a:effectLst/>
+                <a:uFillTx/>
+                <a:latin typeface="Calibri"/>
+              </a:rPr>
+              <a:t>, bidar, </a:t>
+            </a:r>
+            <a:r>
+              <a:rPr lang="en-US" sz="2000" b="0" u="none" strike="noStrike" dirty="0" err="1">
+                <a:solidFill>
+                  <a:schemeClr val="dk1"/>
+                </a:solidFill>
+                <a:effectLst/>
+                <a:uFillTx/>
+                <a:latin typeface="Calibri"/>
+              </a:rPr>
+              <a:t>ballari</a:t>
+            </a:r>
+            <a:r>
+              <a:rPr lang="en-US" sz="2000" b="0" u="none" strike="noStrike" dirty="0">
+                <a:solidFill>
+                  <a:schemeClr val="dk1"/>
+                </a:solidFill>
+                <a:effectLst/>
+                <a:uFillTx/>
+                <a:latin typeface="Calibri"/>
+              </a:rPr>
+              <a:t>) uniformly low; </a:t>
+            </a:r>
+            <a:r>
+              <a:rPr lang="en-US" sz="2000" b="0" u="none" strike="noStrike" dirty="0" err="1">
+                <a:solidFill>
+                  <a:schemeClr val="dk1"/>
+                </a:solidFill>
+                <a:effectLst/>
+                <a:uFillTx/>
+                <a:latin typeface="Calibri"/>
+              </a:rPr>
+              <a:t>dakshina</a:t>
+            </a:r>
+            <a:r>
+              <a:rPr lang="en-US" sz="2000" b="0" u="none" strike="noStrike" dirty="0">
+                <a:solidFill>
+                  <a:schemeClr val="dk1"/>
+                </a:solidFill>
+                <a:effectLst/>
+                <a:uFillTx/>
+                <a:latin typeface="Calibri"/>
+              </a:rPr>
+              <a:t> </a:t>
+            </a:r>
+            <a:r>
+              <a:rPr lang="en-US" sz="2000" b="0" u="none" strike="noStrike" dirty="0" err="1">
+                <a:solidFill>
+                  <a:schemeClr val="dk1"/>
+                </a:solidFill>
+                <a:effectLst/>
+                <a:uFillTx/>
+                <a:latin typeface="Calibri"/>
+              </a:rPr>
+              <a:t>kannada</a:t>
+            </a:r>
+            <a:r>
+              <a:rPr lang="en-US" sz="2000" b="0" u="none" strike="noStrike" dirty="0">
+                <a:solidFill>
+                  <a:schemeClr val="dk1"/>
+                </a:solidFill>
+                <a:effectLst/>
+                <a:uFillTx/>
+                <a:latin typeface="Calibri"/>
+              </a:rPr>
+              <a:t> consistently high</a:t>
+            </a:r>
+            <a:endParaRPr lang="en-IN" sz="2000" b="0" u="none" strike="noStrike" dirty="0">
               <a:solidFill>
                 <a:srgbClr val="000000"/>
               </a:solidFill>
@@ -7445,17 +7573,17 @@
               </a:lnSpc>
             </a:pPr>
             <a:r>
-              <a:rPr lang="en-US" sz="2000" b="0" u="none" strike="noStrike">
-                <a:solidFill>
-                  <a:schemeClr val="dk1"/>
-                </a:solidFill>
-                <a:effectLst/>
-                <a:uFillTx/>
-                <a:latin typeface="Calibri"/>
-              </a:rPr>
-              <a:t>• Interpretation</a:t>
-            </a:r>
-            <a:endParaRPr lang="en-IN" sz="2000" b="0" u="none" strike="noStrike">
+              <a:rPr lang="en-US" sz="2000" b="0" u="none" strike="noStrike" dirty="0">
+                <a:solidFill>
+                  <a:schemeClr val="dk1"/>
+                </a:solidFill>
+                <a:effectLst/>
+                <a:uFillTx/>
+                <a:latin typeface="Calibri"/>
+              </a:rPr>
+              <a:t>• Interpretation: Variation is between districts, not within → a district-targeted response fits the data</a:t>
+            </a:r>
+            <a:endParaRPr lang="en-IN" sz="2000" b="0" u="none" strike="noStrike" dirty="0">
               <a:solidFill>
                 <a:srgbClr val="000000"/>
               </a:solidFill>
@@ -7500,19 +7628,14 @@
       </p:sp>
     </p:spTree>
   </p:cSld>
-  <mc:AlternateContent>
-    <mc:Choice Requires="p14">
-      <p:transition spd="slow" p14:dur="2000"/>
-    </mc:Choice>
-    <mc:Fallback>
-      <p:transition spd="slow"/>
-    </mc:Fallback>
-  </mc:AlternateContent>
+  <p:clrMapOvr>
+    <a:masterClrMapping/>
+  </p:clrMapOvr>
 </p:sld>
 </file>
 
 <file path=ppt/slides/slide6.xml><?xml version="1.0" encoding="utf-8"?>
-<p:sld xmlns:a="http://schemas.openxmlformats.org/drawingml/2006/main" xmlns:p="http://schemas.openxmlformats.org/presentationml/2006/main" xmlns:r="http://schemas.openxmlformats.org/officeDocument/2006/relationships" xmlns:p14="http://schemas.microsoft.com/office/powerpoint/2010/main" xmlns:p15="http://schemas.microsoft.com/office/powerpoint/2012/main" xmlns:mc="http://schemas.openxmlformats.org/markup-compatibility/2006">
+<p:sld xmlns:a="http://schemas.openxmlformats.org/drawingml/2006/main" xmlns:r="http://schemas.openxmlformats.org/officeDocument/2006/relationships" xmlns:p="http://schemas.openxmlformats.org/presentationml/2006/main">
   <p:cSld>
     <p:spTree>
       <p:nvGrpSpPr>
@@ -7552,9 +7675,10 @@
           </a:ln>
         </p:spPr>
         <p:txBody>
-          <a:bodyPr lIns="91440" rIns="91440" tIns="45720" bIns="45720" anchor="ctr">
-            <a:normAutofit fontScale="85000" lnSpcReduction="19999"/>
-          </a:bodyPr>
+          <a:bodyPr lIns="91440" tIns="45720" rIns="91440" bIns="45720" anchor="ctr">
+            <a:normAutofit fontScale="90000"/>
+          </a:bodyPr>
+          <a:lstStyle/>
           <a:p>
             <a:pPr indent="0" algn="ctr" defTabSz="457200">
               <a:lnSpc>
@@ -7595,8 +7719,8 @@
         </p:nvSpPr>
         <p:spPr>
           <a:xfrm>
-            <a:off x="731520" y="1097280"/>
-            <a:ext cx="5486040" cy="4571640"/>
+            <a:off x="731519" y="1097280"/>
+            <a:ext cx="10023071" cy="1937538"/>
           </a:xfrm>
           <a:prstGeom prst="rect">
             <a:avLst/>
@@ -7607,15 +7731,22 @@
           </a:ln>
         </p:spPr>
         <p:style>
-          <a:lnRef idx="0"/>
-          <a:fillRef idx="0"/>
-          <a:effectRef idx="0"/>
+          <a:lnRef idx="0">
+            <a:scrgbClr r="0" g="0" b="0"/>
+          </a:lnRef>
+          <a:fillRef idx="0">
+            <a:scrgbClr r="0" g="0" b="0"/>
+          </a:fillRef>
+          <a:effectRef idx="0">
+            <a:scrgbClr r="0" g="0" b="0"/>
+          </a:effectRef>
           <a:fontRef idx="minor"/>
         </p:style>
         <p:txBody>
-          <a:bodyPr wrap="none" lIns="90000" rIns="90000" tIns="45000" bIns="45000" anchor="t">
+          <a:bodyPr wrap="square" lIns="90000" tIns="45000" rIns="90000" bIns="45000" anchor="t">
             <a:spAutoFit/>
           </a:bodyPr>
+          <a:lstStyle/>
           <a:p>
             <a:pPr defTabSz="457200">
               <a:lnSpc>
@@ -7623,17 +7754,39 @@
               </a:lnSpc>
             </a:pPr>
             <a:r>
-              <a:rPr lang="en-US" sz="2000" b="0" u="none" strike="noStrike">
-                <a:solidFill>
-                  <a:schemeClr val="dk1"/>
-                </a:solidFill>
-                <a:effectLst/>
-                <a:uFillTx/>
-                <a:latin typeface="Calibri"/>
-              </a:rPr>
-              <a:t>• Finding</a:t>
-            </a:r>
-            <a:endParaRPr lang="en-IN" sz="2000" b="0" u="none" strike="noStrike">
+              <a:rPr lang="en-US" sz="2000" b="0" u="none" strike="noStrike" dirty="0">
+                <a:solidFill>
+                  <a:schemeClr val="dk1"/>
+                </a:solidFill>
+                <a:effectLst/>
+                <a:uFillTx/>
+                <a:latin typeface="Calibri"/>
+              </a:rPr>
+              <a:t>• Finding: District </a:t>
+            </a:r>
+            <a:r>
+              <a:rPr lang="en-US" sz="2000" b="0" u="none" strike="noStrike" dirty="0" err="1">
+                <a:solidFill>
+                  <a:schemeClr val="dk1"/>
+                </a:solidFill>
+                <a:effectLst/>
+                <a:uFillTx/>
+                <a:latin typeface="Calibri"/>
+              </a:rPr>
+              <a:t>maths</a:t>
+            </a:r>
+            <a:r>
+              <a:rPr lang="en-US" sz="2000" b="0" u="none" strike="noStrike" dirty="0">
+                <a:solidFill>
+                  <a:schemeClr val="dk1"/>
+                </a:solidFill>
+                <a:effectLst/>
+                <a:uFillTx/>
+                <a:latin typeface="Calibri"/>
+              </a:rPr>
+              <a:t> gaps are structural, they track development and persist to the Class-10 board</a:t>
+            </a:r>
+            <a:endParaRPr lang="en-IN" sz="2000" b="0" u="none" strike="noStrike" dirty="0">
               <a:solidFill>
                 <a:srgbClr val="000000"/>
               </a:solidFill>
@@ -7649,17 +7802,61 @@
               </a:lnSpc>
             </a:pPr>
             <a:r>
-              <a:rPr lang="en-US" sz="2000" b="0" u="none" strike="noStrike">
-                <a:solidFill>
-                  <a:schemeClr val="dk1"/>
-                </a:solidFill>
-                <a:effectLst/>
-                <a:uFillTx/>
-                <a:latin typeface="Calibri"/>
-              </a:rPr>
-              <a:t>• Evidence</a:t>
-            </a:r>
-            <a:endParaRPr lang="en-IN" sz="2000" b="0" u="none" strike="noStrike">
+              <a:rPr lang="en-US" sz="2000" b="0" u="none" strike="noStrike" dirty="0">
+                <a:solidFill>
+                  <a:schemeClr val="dk1"/>
+                </a:solidFill>
+                <a:effectLst/>
+                <a:uFillTx/>
+                <a:latin typeface="Calibri"/>
+              </a:rPr>
+              <a:t>• Evidence: NFHS Spearman ~+0.6 (female schooling, sanitation, women's 10-yr schooling); SSLC </a:t>
+            </a:r>
+            <a:r>
+              <a:rPr lang="en-US" sz="2000" b="0" u="none" strike="noStrike" dirty="0" err="1">
+                <a:solidFill>
+                  <a:schemeClr val="dk1"/>
+                </a:solidFill>
+                <a:effectLst/>
+                <a:uFillTx/>
+                <a:latin typeface="Calibri"/>
+              </a:rPr>
+              <a:t>maths</a:t>
+            </a:r>
+            <a:r>
+              <a:rPr lang="en-US" sz="2000" b="0" u="none" strike="noStrike" dirty="0">
+                <a:solidFill>
+                  <a:schemeClr val="dk1"/>
+                </a:solidFill>
+                <a:effectLst/>
+                <a:uFillTx/>
+                <a:latin typeface="Calibri"/>
+              </a:rPr>
+              <a:t> pass% </a:t>
+            </a:r>
+            <a:r>
+              <a:rPr lang="en-US" sz="2000" b="0" u="none" strike="noStrike" dirty="0" err="1">
+                <a:solidFill>
+                  <a:schemeClr val="dk1"/>
+                </a:solidFill>
+                <a:effectLst/>
+                <a:uFillTx/>
+                <a:latin typeface="Calibri"/>
+              </a:rPr>
+              <a:t>ρ</a:t>
+            </a:r>
+            <a:r>
+              <a:rPr lang="en-US" sz="2000" b="0" u="none" strike="noStrike" dirty="0">
+                <a:solidFill>
+                  <a:schemeClr val="dk1"/>
+                </a:solidFill>
+                <a:effectLst/>
+                <a:uFillTx/>
+                <a:latin typeface="Calibri"/>
+              </a:rPr>
+              <a:t> = +0.57</a:t>
+            </a:r>
+            <a:endParaRPr lang="en-IN" sz="2000" b="0" u="none" strike="noStrike" dirty="0">
               <a:solidFill>
                 <a:srgbClr val="000000"/>
               </a:solidFill>
@@ -7675,17 +7872,39 @@
               </a:lnSpc>
             </a:pPr>
             <a:r>
-              <a:rPr lang="en-US" sz="2000" b="0" u="none" strike="noStrike">
-                <a:solidFill>
-                  <a:schemeClr val="dk1"/>
-                </a:solidFill>
-                <a:effectLst/>
-                <a:uFillTx/>
-                <a:latin typeface="Calibri"/>
-              </a:rPr>
-              <a:t>• Implications</a:t>
-            </a:r>
-            <a:endParaRPr lang="en-IN" sz="2000" b="0" u="none" strike="noStrike">
+              <a:rPr lang="en-US" sz="2000" b="0" u="none" strike="noStrike" dirty="0">
+                <a:solidFill>
+                  <a:schemeClr val="dk1"/>
+                </a:solidFill>
+                <a:effectLst/>
+                <a:uFillTx/>
+                <a:latin typeface="Calibri"/>
+              </a:rPr>
+              <a:t>• Implications: Early rural </a:t>
+            </a:r>
+            <a:r>
+              <a:rPr lang="en-US" sz="2000" b="0" u="none" strike="noStrike" dirty="0" err="1">
+                <a:solidFill>
+                  <a:schemeClr val="dk1"/>
+                </a:solidFill>
+                <a:effectLst/>
+                <a:uFillTx/>
+                <a:latin typeface="Calibri"/>
+              </a:rPr>
+              <a:t>maths</a:t>
+            </a:r>
+            <a:r>
+              <a:rPr lang="en-US" sz="2000" b="0" u="none" strike="noStrike" dirty="0">
+                <a:solidFill>
+                  <a:schemeClr val="dk1"/>
+                </a:solidFill>
+                <a:effectLst/>
+                <a:uFillTx/>
+                <a:latin typeface="Calibri"/>
+              </a:rPr>
+              <a:t> gaps foreshadow board outcomes ~4–6 years later in the same districts</a:t>
+            </a:r>
+            <a:endParaRPr lang="en-IN" sz="2000" b="0" u="none" strike="noStrike" dirty="0">
               <a:solidFill>
                 <a:srgbClr val="000000"/>
               </a:solidFill>
@@ -7730,19 +7949,14 @@
       </p:sp>
     </p:spTree>
   </p:cSld>
-  <mc:AlternateContent>
-    <mc:Choice Requires="p14">
-      <p:transition spd="slow" p14:dur="2000"/>
-    </mc:Choice>
-    <mc:Fallback>
-      <p:transition spd="slow"/>
-    </mc:Fallback>
-  </mc:AlternateContent>
+  <p:clrMapOvr>
+    <a:masterClrMapping/>
+  </p:clrMapOvr>
 </p:sld>
 </file>
 
 <file path=ppt/slides/slide7.xml><?xml version="1.0" encoding="utf-8"?>
-<p:sld xmlns:a="http://schemas.openxmlformats.org/drawingml/2006/main" xmlns:p="http://schemas.openxmlformats.org/presentationml/2006/main" xmlns:r="http://schemas.openxmlformats.org/officeDocument/2006/relationships" xmlns:p14="http://schemas.microsoft.com/office/powerpoint/2010/main" xmlns:p15="http://schemas.microsoft.com/office/powerpoint/2012/main" xmlns:mc="http://schemas.openxmlformats.org/markup-compatibility/2006">
+<p:sld xmlns:a="http://schemas.openxmlformats.org/drawingml/2006/main" xmlns:r="http://schemas.openxmlformats.org/officeDocument/2006/relationships" xmlns:p="http://schemas.openxmlformats.org/presentationml/2006/main">
   <p:cSld>
     <p:spTree>
       <p:nvGrpSpPr>
@@ -7782,9 +7996,10 @@
           </a:ln>
         </p:spPr>
         <p:txBody>
-          <a:bodyPr lIns="91440" rIns="91440" tIns="45720" bIns="45720" anchor="ctr">
-            <a:normAutofit fontScale="85000" lnSpcReduction="19999"/>
-          </a:bodyPr>
+          <a:bodyPr lIns="91440" tIns="45720" rIns="91440" bIns="45720" anchor="ctr">
+            <a:normAutofit fontScale="90000"/>
+          </a:bodyPr>
+          <a:lstStyle/>
           <a:p>
             <a:pPr indent="0" algn="ctr" defTabSz="457200">
               <a:lnSpc>
@@ -7837,15 +8052,22 @@
           </a:ln>
         </p:spPr>
         <p:style>
-          <a:lnRef idx="0"/>
-          <a:fillRef idx="0"/>
-          <a:effectRef idx="0"/>
+          <a:lnRef idx="0">
+            <a:scrgbClr r="0" g="0" b="0"/>
+          </a:lnRef>
+          <a:fillRef idx="0">
+            <a:scrgbClr r="0" g="0" b="0"/>
+          </a:fillRef>
+          <a:effectRef idx="0">
+            <a:scrgbClr r="0" g="0" b="0"/>
+          </a:effectRef>
           <a:fontRef idx="minor"/>
         </p:style>
         <p:txBody>
-          <a:bodyPr wrap="none" lIns="90000" rIns="90000" tIns="45000" bIns="45000" anchor="t">
+          <a:bodyPr wrap="none" lIns="90000" tIns="45000" rIns="90000" bIns="45000" anchor="t">
             <a:spAutoFit/>
           </a:bodyPr>
+          <a:lstStyle/>
           <a:p>
             <a:pPr defTabSz="457200">
               <a:lnSpc>
@@ -7861,7 +8083,7 @@
                 <a:uFillTx/>
                 <a:latin typeface="Calibri"/>
               </a:rPr>
-              <a:t>• Model</a:t>
+              <a:t>• Model: OLS of district accuracy on a standardized development index (n = 31 districts)</a:t>
             </a:r>
             <a:endParaRPr lang="en-IN" sz="2000" b="0" u="none" strike="noStrike">
               <a:solidFill>
@@ -7887,7 +8109,7 @@
                 <a:uFillTx/>
                 <a:latin typeface="Calibri"/>
               </a:rPr>
-              <a:t>• Metrics</a:t>
+              <a:t>• Metrics: R² = 0.43; +1 SD of the development index ≈ +5.9 pp accuracy</a:t>
             </a:r>
             <a:endParaRPr lang="en-IN" sz="2000" b="0" u="none" strike="noStrike">
               <a:solidFill>
@@ -7913,7 +8135,7 @@
                 <a:uFillTx/>
                 <a:latin typeface="Calibri"/>
               </a:rPr>
-              <a:t>• Important predictors</a:t>
+              <a:t>• Important predictors: female_ever_school, improved_sanitation, women_10yr_schooling</a:t>
             </a:r>
             <a:endParaRPr lang="en-IN" sz="2000" b="0" u="none" strike="noStrike">
               <a:solidFill>
@@ -7939,7 +8161,7 @@
                 <a:uFillTx/>
                 <a:latin typeface="Calibri"/>
               </a:rPr>
-              <a:t>• Early warning</a:t>
+              <a:t>• Early warning: Residual gap flags under-performers — chitradurga −12.8 pp, davanagere, ballari</a:t>
             </a:r>
             <a:endParaRPr lang="en-IN" sz="2000" b="0" u="none" strike="noStrike">
               <a:solidFill>
@@ -7986,19 +8208,14 @@
       </p:sp>
     </p:spTree>
   </p:cSld>
-  <mc:AlternateContent>
-    <mc:Choice Requires="p14">
-      <p:transition spd="slow" p14:dur="2000"/>
-    </mc:Choice>
-    <mc:Fallback>
-      <p:transition spd="slow"/>
-    </mc:Fallback>
-  </mc:AlternateContent>
+  <p:clrMapOvr>
+    <a:masterClrMapping/>
+  </p:clrMapOvr>
 </p:sld>
 </file>
 
 <file path=ppt/slides/slide8.xml><?xml version="1.0" encoding="utf-8"?>
-<p:sld xmlns:a="http://schemas.openxmlformats.org/drawingml/2006/main" xmlns:p="http://schemas.openxmlformats.org/presentationml/2006/main" xmlns:r="http://schemas.openxmlformats.org/officeDocument/2006/relationships" xmlns:p14="http://schemas.microsoft.com/office/powerpoint/2010/main" xmlns:p15="http://schemas.microsoft.com/office/powerpoint/2012/main" xmlns:mc="http://schemas.openxmlformats.org/markup-compatibility/2006">
+<p:sld xmlns:a="http://schemas.openxmlformats.org/drawingml/2006/main" xmlns:r="http://schemas.openxmlformats.org/officeDocument/2006/relationships" xmlns:p="http://schemas.openxmlformats.org/presentationml/2006/main">
   <p:cSld>
     <p:spTree>
       <p:nvGrpSpPr>
@@ -8038,9 +8255,10 @@
           </a:ln>
         </p:spPr>
         <p:txBody>
-          <a:bodyPr lIns="91440" rIns="91440" tIns="45720" bIns="45720" anchor="ctr">
-            <a:normAutofit fontScale="85000" lnSpcReduction="19999"/>
-          </a:bodyPr>
+          <a:bodyPr lIns="91440" tIns="45720" rIns="91440" bIns="45720" anchor="ctr">
+            <a:normAutofit fontScale="90000"/>
+          </a:bodyPr>
+          <a:lstStyle/>
           <a:p>
             <a:pPr indent="0" algn="ctr" defTabSz="457200">
               <a:lnSpc>
@@ -8093,15 +8311,22 @@
           </a:ln>
         </p:spPr>
         <p:style>
-          <a:lnRef idx="0"/>
-          <a:fillRef idx="0"/>
-          <a:effectRef idx="0"/>
+          <a:lnRef idx="0">
+            <a:scrgbClr r="0" g="0" b="0"/>
+          </a:lnRef>
+          <a:fillRef idx="0">
+            <a:scrgbClr r="0" g="0" b="0"/>
+          </a:fillRef>
+          <a:effectRef idx="0">
+            <a:scrgbClr r="0" g="0" b="0"/>
+          </a:effectRef>
           <a:fontRef idx="minor"/>
         </p:style>
         <p:txBody>
-          <a:bodyPr wrap="none" lIns="90000" rIns="90000" tIns="45000" bIns="45000" anchor="t">
+          <a:bodyPr wrap="none" lIns="90000" tIns="45000" rIns="90000" bIns="45000" anchor="t">
             <a:spAutoFit/>
           </a:bodyPr>
+          <a:lstStyle/>
           <a:p>
             <a:pPr defTabSz="457200">
               <a:lnSpc>
@@ -8139,15 +8364,22 @@
           </a:ln>
         </p:spPr>
         <p:style>
-          <a:lnRef idx="0"/>
-          <a:fillRef idx="0"/>
-          <a:effectRef idx="0"/>
+          <a:lnRef idx="0">
+            <a:scrgbClr r="0" g="0" b="0"/>
+          </a:lnRef>
+          <a:fillRef idx="0">
+            <a:scrgbClr r="0" g="0" b="0"/>
+          </a:fillRef>
+          <a:effectRef idx="0">
+            <a:scrgbClr r="0" g="0" b="0"/>
+          </a:effectRef>
           <a:fontRef idx="minor"/>
         </p:style>
         <p:txBody>
-          <a:bodyPr wrap="none" lIns="90000" rIns="90000" tIns="45000" bIns="45000" anchor="t">
+          <a:bodyPr wrap="none" lIns="90000" tIns="45000" rIns="90000" bIns="45000" anchor="t">
             <a:spAutoFit/>
           </a:bodyPr>
+          <a:lstStyle/>
           <a:p>
             <a:pPr defTabSz="457200">
               <a:lnSpc>
@@ -8163,7 +8395,7 @@
                 <a:uFillTx/>
                 <a:latin typeface="Calibri"/>
               </a:rPr>
-              <a:t>• Dashboard screenshots</a:t>
+              <a:t>• Dashboard: outputs/figures/dashboard.html — interactive Plotly, runs offline</a:t>
             </a:r>
             <a:endParaRPr lang="en-IN" sz="2000" b="0" u="none" strike="noStrike">
               <a:solidFill>
@@ -8189,7 +8421,7 @@
                 <a:uFillTx/>
                 <a:latin typeface="Calibri"/>
               </a:rPr>
-              <a:t>• KPIs</a:t>
+              <a:t>• KPIs: 53.1% overall accuracy | 31 districts | SSLC ρ +0.57 | model R² 0.43</a:t>
             </a:r>
             <a:endParaRPr lang="en-IN" sz="2000" b="0" u="none" strike="noStrike">
               <a:solidFill>
@@ -8215,7 +8447,7 @@
                 <a:uFillTx/>
                 <a:latin typeface="Calibri"/>
               </a:rPr>
-              <a:t>• Maps/Charts</a:t>
+              <a:t>• Charts: grade/year trend, gender gap, NFHS correlation bars, SSLC scatter, district residual-gap ranking</a:t>
             </a:r>
             <a:endParaRPr lang="en-IN" sz="2000" b="0" u="none" strike="noStrike">
               <a:solidFill>
@@ -8262,19 +8494,14 @@
       </p:sp>
     </p:spTree>
   </p:cSld>
-  <mc:AlternateContent>
-    <mc:Choice Requires="p14">
-      <p:transition spd="slow" p14:dur="2000"/>
-    </mc:Choice>
-    <mc:Fallback>
-      <p:transition spd="slow"/>
-    </mc:Fallback>
-  </mc:AlternateContent>
+  <p:clrMapOvr>
+    <a:masterClrMapping/>
+  </p:clrMapOvr>
 </p:sld>
 </file>
 
 <file path=ppt/slides/slide9.xml><?xml version="1.0" encoding="utf-8"?>
-<p:sld xmlns:a="http://schemas.openxmlformats.org/drawingml/2006/main" xmlns:p="http://schemas.openxmlformats.org/presentationml/2006/main" xmlns:r="http://schemas.openxmlformats.org/officeDocument/2006/relationships" xmlns:p14="http://schemas.microsoft.com/office/powerpoint/2010/main" xmlns:p15="http://schemas.microsoft.com/office/powerpoint/2012/main" xmlns:mc="http://schemas.openxmlformats.org/markup-compatibility/2006">
+<p:sld xmlns:a="http://schemas.openxmlformats.org/drawingml/2006/main" xmlns:r="http://schemas.openxmlformats.org/officeDocument/2006/relationships" xmlns:p="http://schemas.openxmlformats.org/presentationml/2006/main">
   <p:cSld>
     <p:spTree>
       <p:nvGrpSpPr>
@@ -8314,9 +8541,10 @@
           </a:ln>
         </p:spPr>
         <p:txBody>
-          <a:bodyPr lIns="91440" rIns="91440" tIns="45720" bIns="45720" anchor="ctr">
-            <a:normAutofit fontScale="85000" lnSpcReduction="19999"/>
-          </a:bodyPr>
+          <a:bodyPr lIns="91440" tIns="45720" rIns="91440" bIns="45720" anchor="ctr">
+            <a:normAutofit fontScale="90000"/>
+          </a:bodyPr>
+          <a:lstStyle/>
           <a:p>
             <a:pPr indent="0" algn="ctr" defTabSz="457200">
               <a:lnSpc>
@@ -8369,15 +8597,22 @@
           </a:ln>
         </p:spPr>
         <p:style>
-          <a:lnRef idx="0"/>
-          <a:fillRef idx="0"/>
-          <a:effectRef idx="0"/>
+          <a:lnRef idx="0">
+            <a:scrgbClr r="0" g="0" b="0"/>
+          </a:lnRef>
+          <a:fillRef idx="0">
+            <a:scrgbClr r="0" g="0" b="0"/>
+          </a:fillRef>
+          <a:effectRef idx="0">
+            <a:scrgbClr r="0" g="0" b="0"/>
+          </a:effectRef>
           <a:fontRef idx="minor"/>
         </p:style>
         <p:txBody>
-          <a:bodyPr wrap="none" lIns="90000" rIns="90000" tIns="45000" bIns="45000" anchor="t">
+          <a:bodyPr wrap="none" lIns="90000" tIns="45000" rIns="90000" bIns="45000" anchor="t">
             <a:spAutoFit/>
           </a:bodyPr>
+          <a:lstStyle/>
           <a:p>
             <a:pPr defTabSz="457200">
               <a:lnSpc>
@@ -8404,7 +8639,7 @@
         <p:spPr>
           <a:xfrm>
             <a:off x="731520" y="1097280"/>
-            <a:ext cx="5486040" cy="4571640"/>
+            <a:ext cx="9711344" cy="1629762"/>
           </a:xfrm>
           <a:prstGeom prst="rect">
             <a:avLst/>
@@ -8415,15 +8650,22 @@
           </a:ln>
         </p:spPr>
         <p:style>
-          <a:lnRef idx="0"/>
-          <a:fillRef idx="0"/>
-          <a:effectRef idx="0"/>
+          <a:lnRef idx="0">
+            <a:scrgbClr r="0" g="0" b="0"/>
+          </a:lnRef>
+          <a:fillRef idx="0">
+            <a:scrgbClr r="0" g="0" b="0"/>
+          </a:fillRef>
+          <a:effectRef idx="0">
+            <a:scrgbClr r="0" g="0" b="0"/>
+          </a:effectRef>
           <a:fontRef idx="minor"/>
         </p:style>
         <p:txBody>
-          <a:bodyPr wrap="none" lIns="90000" rIns="90000" tIns="45000" bIns="45000" anchor="t">
+          <a:bodyPr wrap="square" lIns="90000" tIns="45000" rIns="90000" bIns="45000" anchor="t">
             <a:spAutoFit/>
           </a:bodyPr>
+          <a:lstStyle/>
           <a:p>
             <a:pPr defTabSz="457200">
               <a:lnSpc>
@@ -8431,17 +8673,17 @@
               </a:lnSpc>
             </a:pPr>
             <a:r>
-              <a:rPr lang="en-US" sz="2000" b="0" u="none" strike="noStrike">
-                <a:solidFill>
-                  <a:schemeClr val="dk1"/>
-                </a:solidFill>
-                <a:effectLst/>
-                <a:uFillTx/>
-                <a:latin typeface="Calibri"/>
-              </a:rPr>
-              <a:t>• Priority actions</a:t>
-            </a:r>
-            <a:endParaRPr lang="en-IN" sz="2000" b="0" u="none" strike="noStrike">
+              <a:rPr lang="en-US" sz="2000" b="0" u="none" strike="noStrike" dirty="0">
+                <a:solidFill>
+                  <a:schemeClr val="dk1"/>
+                </a:solidFill>
+                <a:effectLst/>
+                <a:uFillTx/>
+                <a:latin typeface="Calibri"/>
+              </a:rPr>
+              <a:t>• Priority actions: Focus school-side support on negative-residual districts (they under-perform their development context)</a:t>
+            </a:r>
+            <a:endParaRPr lang="en-IN" sz="2000" b="0" u="none" strike="noStrike" dirty="0">
               <a:solidFill>
                 <a:srgbClr val="000000"/>
               </a:solidFill>
@@ -8457,17 +8699,17 @@
               </a:lnSpc>
             </a:pPr>
             <a:r>
-              <a:rPr lang="en-US" sz="2000" b="0" u="none" strike="noStrike">
-                <a:solidFill>
-                  <a:schemeClr val="dk1"/>
-                </a:solidFill>
-                <a:effectLst/>
-                <a:uFillTx/>
-                <a:latin typeface="Calibri"/>
-              </a:rPr>
-              <a:t>• Impact</a:t>
-            </a:r>
-            <a:endParaRPr lang="en-IN" sz="2000" b="0" u="none" strike="noStrike">
+              <a:rPr lang="en-US" sz="2000" b="0" u="none" strike="noStrike" dirty="0">
+                <a:solidFill>
+                  <a:schemeClr val="dk1"/>
+                </a:solidFill>
+                <a:effectLst/>
+                <a:uFillTx/>
+                <a:latin typeface="Calibri"/>
+              </a:rPr>
+              <a:t>• Impact: Directs limited resources where health/development does not explain the gap</a:t>
+            </a:r>
+            <a:endParaRPr lang="en-IN" sz="2000" b="0" u="none" strike="noStrike" dirty="0">
               <a:solidFill>
                 <a:srgbClr val="000000"/>
               </a:solidFill>
@@ -8483,17 +8725,17 @@
               </a:lnSpc>
             </a:pPr>
             <a:r>
-              <a:rPr lang="en-US" sz="2000" b="0" u="none" strike="noStrike">
-                <a:solidFill>
-                  <a:schemeClr val="dk1"/>
-                </a:solidFill>
-                <a:effectLst/>
-                <a:uFillTx/>
-                <a:latin typeface="Calibri"/>
-              </a:rPr>
-              <a:t>• Feasibility</a:t>
-            </a:r>
-            <a:endParaRPr lang="en-IN" sz="2000" b="0" u="none" strike="noStrike">
+              <a:rPr lang="en-US" sz="2000" b="0" u="none" strike="noStrike" dirty="0">
+                <a:solidFill>
+                  <a:schemeClr val="dk1"/>
+                </a:solidFill>
+                <a:effectLst/>
+                <a:uFillTx/>
+                <a:latin typeface="Calibri"/>
+              </a:rPr>
+              <a:t>• Feasibility: Uses only public district data; one reproducible pipeline reruns each contest year</a:t>
+            </a:r>
+            <a:endParaRPr lang="en-IN" sz="2000" b="0" u="none" strike="noStrike" dirty="0">
               <a:solidFill>
                 <a:srgbClr val="000000"/>
               </a:solidFill>
@@ -8538,53 +8780,48 @@
       </p:sp>
     </p:spTree>
   </p:cSld>
-  <mc:AlternateContent>
-    <mc:Choice Requires="p14">
-      <p:transition spd="slow" p14:dur="2000"/>
-    </mc:Choice>
-    <mc:Fallback>
-      <p:transition spd="slow"/>
-    </mc:Fallback>
-  </mc:AlternateContent>
+  <p:clrMapOvr>
+    <a:masterClrMapping/>
+  </p:clrMapOvr>
 </p:sld>
 </file>
 
 <file path=ppt/theme/theme1.xml><?xml version="1.0" encoding="utf-8"?>
-<a:theme xmlns:a="http://schemas.openxmlformats.org/drawingml/2006/main" xmlns:r="http://schemas.openxmlformats.org/officeDocument/2006/relationships" name="Office Theme">
+<a:theme xmlns:a="http://schemas.openxmlformats.org/drawingml/2006/main" name="Office Theme">
   <a:themeElements>
     <a:clrScheme name="Office">
       <a:dk1>
         <a:srgbClr val="000000"/>
       </a:dk1>
       <a:lt1>
-        <a:srgbClr val="ffffff"/>
+        <a:srgbClr val="FFFFFF"/>
       </a:lt1>
       <a:dk2>
-        <a:srgbClr val="1f497d"/>
+        <a:srgbClr val="1F497D"/>
       </a:dk2>
       <a:lt2>
-        <a:srgbClr val="eeece1"/>
+        <a:srgbClr val="EEECE1"/>
       </a:lt2>
       <a:accent1>
-        <a:srgbClr val="4f81bd"/>
+        <a:srgbClr val="4F81BD"/>
       </a:accent1>
       <a:accent2>
-        <a:srgbClr val="c0504d"/>
+        <a:srgbClr val="C0504D"/>
       </a:accent2>
       <a:accent3>
-        <a:srgbClr val="9bbb59"/>
+        <a:srgbClr val="9BBB59"/>
       </a:accent3>
       <a:accent4>
-        <a:srgbClr val="8064a2"/>
+        <a:srgbClr val="8064A2"/>
       </a:accent4>
       <a:accent5>
-        <a:srgbClr val="4bacc6"/>
+        <a:srgbClr val="4BACC6"/>
       </a:accent5>
       <a:accent6>
-        <a:srgbClr val="f79646"/>
+        <a:srgbClr val="F79646"/>
       </a:accent6>
       <a:hlink>
-        <a:srgbClr val="0000ff"/>
+        <a:srgbClr val="0000FF"/>
       </a:hlink>
       <a:folHlink>
         <a:srgbClr val="800080"/>
@@ -8592,12 +8829,12 @@
     </a:clrScheme>
     <a:fontScheme name="Office">
       <a:majorFont>
-        <a:latin typeface="Calibri" pitchFamily="0" charset="1"/>
+        <a:latin typeface="Calibri"/>
         <a:ea typeface=""/>
         <a:cs typeface=""/>
       </a:majorFont>
       <a:minorFont>
-        <a:latin typeface="Calibri" pitchFamily="0" charset="1"/>
+        <a:latin typeface="Calibri"/>
         <a:ea typeface=""/>
         <a:cs typeface=""/>
       </a:minorFont>
@@ -8626,7 +8863,7 @@
             </a:gs>
           </a:gsLst>
           <a:lin ang="16200000" scaled="1"/>
-          <a:tileRect l="0" t="0" r="0" b="0"/>
+          <a:tileRect/>
         </a:gradFill>
         <a:gradFill>
           <a:gsLst>
@@ -8644,7 +8881,7 @@
             </a:gs>
           </a:gsLst>
           <a:lin ang="16200000" scaled="0"/>
-          <a:tileRect l="0" t="0" r="0" b="0"/>
+          <a:tileRect/>
         </a:gradFill>
       </a:fillStyleLst>
       <a:lnStyleLst>
@@ -8695,7 +8932,7 @@
           <a:path path="circle">
             <a:fillToRect l="50000" t="-80000" r="50000" b="180000"/>
           </a:path>
-          <a:tileRect l="0" t="0" r="0" b="0"/>
+          <a:tileRect/>
         </a:gradFill>
         <a:gradFill>
           <a:gsLst>
@@ -8713,10 +8950,12 @@
           <a:path path="circle">
             <a:fillToRect l="50000" t="50000" r="50000" b="50000"/>
           </a:path>
-          <a:tileRect l="0" t="0" r="0" b="0"/>
+          <a:tileRect/>
         </a:gradFill>
       </a:bgFillStyleLst>
     </a:fmtScheme>
   </a:themeElements>
+  <a:objectDefaults/>
+  <a:extraClrSchemeLst/>
 </a:theme>
 </file>
--- a/slides.pptx
+++ b/slides.pptx
@@ -5693,7 +5693,7 @@
         <p:spPr>
           <a:xfrm>
             <a:off x="731520" y="1097280"/>
-            <a:ext cx="10428316" cy="1937538"/>
+            <a:ext cx="10428316" cy="2813163"/>
           </a:xfrm>
           <a:prstGeom prst="rect">
             <a:avLst/>
@@ -5721,9 +5721,9 @@
           </a:bodyPr>
           <a:lstStyle/>
           <a:p>
-            <a:pPr defTabSz="457200">
-              <a:lnSpc>
-                <a:spcPct val="100000"/>
+            <a:pPr algn="just" defTabSz="457200">
+              <a:lnSpc>
+                <a:spcPct val="150000"/>
               </a:lnSpc>
             </a:pPr>
             <a:r>
@@ -5745,9 +5745,9 @@
             </a:endParaRPr>
           </a:p>
           <a:p>
-            <a:pPr defTabSz="457200">
-              <a:lnSpc>
-                <a:spcPct val="100000"/>
+            <a:pPr algn="just" defTabSz="457200">
+              <a:lnSpc>
+                <a:spcPct val="150000"/>
               </a:lnSpc>
             </a:pPr>
             <a:r>
@@ -5762,9 +5762,9 @@
             </a:r>
           </a:p>
           <a:p>
-            <a:pPr defTabSz="457200">
-              <a:lnSpc>
-                <a:spcPct val="100000"/>
+            <a:pPr algn="just" defTabSz="457200">
+              <a:lnSpc>
+                <a:spcPct val="150000"/>
               </a:lnSpc>
             </a:pPr>
             <a:r>
@@ -5779,15 +5779,7 @@
             </a:r>
             <a:r>
               <a:rPr lang="en-US" sz="2000" dirty="0"/>
-              <a:t>Weak foundational </a:t>
-            </a:r>
-            <a:r>
-              <a:rPr lang="en-US" sz="2000" dirty="0" err="1"/>
-              <a:t>maths</a:t>
-            </a:r>
-            <a:r>
-              <a:rPr lang="en-US" sz="2000" dirty="0"/>
-              <a:t> in rural Karnataka government schools (grades 4–6)</a:t>
+              <a:t>Weak foundational maths in rural Karnataka government schools (grades 4–6)</a:t>
             </a:r>
             <a:endParaRPr lang="en-US" sz="2000" b="0" u="none" strike="noStrike" dirty="0">
               <a:solidFill>
@@ -5798,9 +5790,9 @@
             </a:endParaRPr>
           </a:p>
           <a:p>
-            <a:pPr defTabSz="457200">
-              <a:lnSpc>
-                <a:spcPct val="100000"/>
+            <a:pPr algn="just" defTabSz="457200">
+              <a:lnSpc>
+                <a:spcPct val="150000"/>
               </a:lnSpc>
             </a:pPr>
             <a:r>
@@ -5826,9 +5818,9 @@
             </a:endParaRPr>
           </a:p>
           <a:p>
-            <a:pPr defTabSz="457200">
-              <a:lnSpc>
-                <a:spcPct val="100000"/>
+            <a:pPr algn="just" defTabSz="457200">
+              <a:lnSpc>
+                <a:spcPct val="150000"/>
               </a:lnSpc>
             </a:pPr>
             <a:r>
@@ -5985,7 +5977,7 @@
         <p:spPr>
           <a:xfrm>
             <a:off x="731519" y="1097280"/>
-            <a:ext cx="9981508" cy="1321985"/>
+            <a:ext cx="9981508" cy="1889833"/>
           </a:xfrm>
           <a:prstGeom prst="rect">
             <a:avLst/>
@@ -6013,9 +6005,9 @@
           </a:bodyPr>
           <a:lstStyle/>
           <a:p>
-            <a:pPr defTabSz="457200">
-              <a:lnSpc>
-                <a:spcPct val="100000"/>
+            <a:pPr algn="just" defTabSz="457200">
+              <a:lnSpc>
+                <a:spcPct val="150000"/>
               </a:lnSpc>
             </a:pPr>
             <a:r>
@@ -6025,7 +6017,6 @@
                 </a:solidFill>
                 <a:effectLst/>
                 <a:uFillTx/>
-                <a:latin typeface="Calibri"/>
               </a:rPr>
               <a:t>• Novelty: Contest ↔ NFHS ↔ SSLC triangulation + residual-gap targeting of districts</a:t>
             </a:r>
@@ -6035,13 +6026,12 @@
               </a:solidFill>
               <a:effectLst/>
               <a:uFillTx/>
-              <a:latin typeface="Arial"/>
             </a:endParaRPr>
           </a:p>
           <a:p>
-            <a:pPr defTabSz="457200">
-              <a:lnSpc>
-                <a:spcPct val="100000"/>
+            <a:pPr algn="just" defTabSz="457200">
+              <a:lnSpc>
+                <a:spcPct val="150000"/>
               </a:lnSpc>
             </a:pPr>
             <a:r>
@@ -6051,7 +6041,6 @@
                 </a:solidFill>
                 <a:effectLst/>
                 <a:uFillTx/>
-                <a:latin typeface="Calibri"/>
               </a:rPr>
               <a:t>• Scalability: Crosswalk + pipeline are reusable for every new contest year and district</a:t>
             </a:r>
@@ -6061,13 +6050,12 @@
               </a:solidFill>
               <a:effectLst/>
               <a:uFillTx/>
-              <a:latin typeface="Arial"/>
             </a:endParaRPr>
           </a:p>
           <a:p>
-            <a:pPr defTabSz="457200">
-              <a:lnSpc>
-                <a:spcPct val="100000"/>
+            <a:pPr algn="just" defTabSz="457200">
+              <a:lnSpc>
+                <a:spcPct val="150000"/>
               </a:lnSpc>
             </a:pPr>
             <a:r>
@@ -6077,7 +6065,6 @@
                 </a:solidFill>
                 <a:effectLst/>
                 <a:uFillTx/>
-                <a:latin typeface="Calibri"/>
               </a:rPr>
               <a:t>• Limitations: Ecological (district-level) inference; SSLC cohort differs ~4–6 yrs; small coastal n</a:t>
             </a:r>
@@ -6087,13 +6074,12 @@
               </a:solidFill>
               <a:effectLst/>
               <a:uFillTx/>
-              <a:latin typeface="Arial"/>
             </a:endParaRPr>
           </a:p>
           <a:p>
-            <a:pPr defTabSz="457200">
-              <a:lnSpc>
-                <a:spcPct val="100000"/>
+            <a:pPr algn="just" defTabSz="457200">
+              <a:lnSpc>
+                <a:spcPct val="150000"/>
               </a:lnSpc>
             </a:pPr>
             <a:r>
@@ -6103,7 +6089,6 @@
                 </a:solidFill>
                 <a:effectLst/>
                 <a:uFillTx/>
-                <a:latin typeface="Calibri"/>
               </a:rPr>
               <a:t>• Expected impact: Sharper, evidence-based </a:t>
             </a:r>
@@ -6114,7 +6099,6 @@
                 </a:solidFill>
                 <a:effectLst/>
                 <a:uFillTx/>
-                <a:latin typeface="Calibri"/>
               </a:rPr>
               <a:t>prioritisation</a:t>
             </a:r>
@@ -6125,7 +6109,6 @@
                 </a:solidFill>
                 <a:effectLst/>
                 <a:uFillTx/>
-                <a:latin typeface="Calibri"/>
               </a:rPr>
               <a:t> for foundational-</a:t>
             </a:r>
@@ -6136,7 +6119,6 @@
                 </a:solidFill>
                 <a:effectLst/>
                 <a:uFillTx/>
-                <a:latin typeface="Calibri"/>
               </a:rPr>
               <a:t>maths</a:t>
             </a:r>
@@ -6147,7 +6129,6 @@
                 </a:solidFill>
                 <a:effectLst/>
                 <a:uFillTx/>
-                <a:latin typeface="Calibri"/>
               </a:rPr>
               <a:t> intervention</a:t>
             </a:r>
@@ -6157,7 +6138,6 @@
               </a:solidFill>
               <a:effectLst/>
               <a:uFillTx/>
-              <a:latin typeface="Arial"/>
             </a:endParaRPr>
           </a:p>
         </p:txBody>
@@ -6288,7 +6268,7 @@
         <p:spPr>
           <a:xfrm>
             <a:off x="731519" y="1097280"/>
-            <a:ext cx="9752907" cy="1014209"/>
+            <a:ext cx="9752907" cy="1428168"/>
           </a:xfrm>
           <a:prstGeom prst="rect">
             <a:avLst/>
@@ -6316,9 +6296,9 @@
           </a:bodyPr>
           <a:lstStyle/>
           <a:p>
-            <a:pPr defTabSz="457200">
-              <a:lnSpc>
-                <a:spcPct val="100000"/>
+            <a:pPr algn="just" defTabSz="457200">
+              <a:lnSpc>
+                <a:spcPct val="150000"/>
               </a:lnSpc>
             </a:pPr>
             <a:r>
@@ -6328,7 +6308,6 @@
                 </a:solidFill>
                 <a:effectLst/>
                 <a:uFillTx/>
-                <a:latin typeface="Calibri"/>
               </a:rPr>
               <a:t>• Top takeaways: Gaps are between-district &amp; structural. development explains ~43%; the residual gap is an action list</a:t>
             </a:r>
@@ -6338,13 +6317,12 @@
               </a:solidFill>
               <a:effectLst/>
               <a:uFillTx/>
-              <a:latin typeface="Arial"/>
             </a:endParaRPr>
           </a:p>
           <a:p>
-            <a:pPr defTabSz="457200">
-              <a:lnSpc>
-                <a:spcPct val="100000"/>
+            <a:pPr algn="just" defTabSz="457200">
+              <a:lnSpc>
+                <a:spcPct val="150000"/>
               </a:lnSpc>
             </a:pPr>
             <a:r>
@@ -6354,7 +6332,6 @@
                 </a:solidFill>
                 <a:effectLst/>
                 <a:uFillTx/>
-                <a:latin typeface="Calibri"/>
               </a:rPr>
               <a:t>• Next steps: Competency-level drill-down; validate priority districts on the ground</a:t>
             </a:r>
@@ -6364,7 +6341,6 @@
               </a:solidFill>
               <a:effectLst/>
               <a:uFillTx/>
-              <a:latin typeface="Arial"/>
             </a:endParaRPr>
           </a:p>
         </p:txBody>
@@ -6495,7 +6471,7 @@
         <p:spPr>
           <a:xfrm>
             <a:off x="731520" y="1097280"/>
-            <a:ext cx="10449098" cy="2029871"/>
+            <a:ext cx="10449098" cy="2956407"/>
           </a:xfrm>
           <a:prstGeom prst="rect">
             <a:avLst/>
@@ -6523,9 +6499,9 @@
           </a:bodyPr>
           <a:lstStyle/>
           <a:p>
-            <a:pPr defTabSz="457200">
-              <a:lnSpc>
-                <a:spcPct val="100000"/>
+            <a:pPr algn="just" defTabSz="457200">
+              <a:lnSpc>
+                <a:spcPct val="150000"/>
               </a:lnSpc>
             </a:pPr>
             <a:r>
@@ -6540,21 +6516,13 @@
             </a:r>
             <a:r>
               <a:rPr lang="en-US" dirty="0"/>
-              <a:t>Rural </a:t>
-            </a:r>
-            <a:r>
-              <a:rPr lang="en-US" dirty="0" err="1"/>
-              <a:t>maths</a:t>
-            </a:r>
-            <a:r>
-              <a:rPr lang="en-US" dirty="0"/>
-              <a:t> is stuck — only about 53% of answers are correct, and it stays flat from grade 4 to 6. The big differences are between districts, not within them.</a:t>
-            </a:r>
-          </a:p>
-          <a:p>
-            <a:pPr defTabSz="457200">
-              <a:lnSpc>
-                <a:spcPct val="100000"/>
+              <a:t>Rural maths is stuck — only about 53% of answers are correct, and it stays flat from grade 4 to 6. The big differences are between districts, not within them.</a:t>
+            </a:r>
+          </a:p>
+          <a:p>
+            <a:pPr algn="just" defTabSz="457200">
+              <a:lnSpc>
+                <a:spcPct val="150000"/>
               </a:lnSpc>
             </a:pPr>
             <a:r>
@@ -6573,9 +6541,9 @@
             </a:r>
           </a:p>
           <a:p>
-            <a:pPr defTabSz="457200">
-              <a:lnSpc>
-                <a:spcPct val="100000"/>
+            <a:pPr algn="just" defTabSz="457200">
+              <a:lnSpc>
+                <a:spcPct val="150000"/>
               </a:lnSpc>
             </a:pPr>
             <a:r>
@@ -6601,9 +6569,9 @@
             </a:endParaRPr>
           </a:p>
           <a:p>
-            <a:pPr defTabSz="457200">
-              <a:lnSpc>
-                <a:spcPct val="100000"/>
+            <a:pPr algn="just" defTabSz="457200">
+              <a:lnSpc>
+                <a:spcPct val="150000"/>
               </a:lnSpc>
             </a:pPr>
             <a:r>
@@ -6755,8 +6723,8 @@
         </p:nvSpPr>
         <p:spPr>
           <a:xfrm>
-            <a:off x="731519" y="1097280"/>
-            <a:ext cx="10688089" cy="1937538"/>
+            <a:off x="920705" y="1044056"/>
+            <a:ext cx="9326521" cy="2813163"/>
           </a:xfrm>
           <a:prstGeom prst="rect">
             <a:avLst/>
@@ -6784,9 +6752,9 @@
           </a:bodyPr>
           <a:lstStyle/>
           <a:p>
-            <a:pPr defTabSz="457200">
-              <a:lnSpc>
-                <a:spcPct val="100000"/>
+            <a:pPr algn="just" defTabSz="457200">
+              <a:lnSpc>
+                <a:spcPct val="150000"/>
               </a:lnSpc>
             </a:pPr>
             <a:r>
@@ -6796,31 +6764,8 @@
                 </a:solidFill>
                 <a:effectLst/>
                 <a:uFillTx/>
-                <a:latin typeface="Calibri"/>
-              </a:rPr>
-              <a:t>• Dataset summary: Akshara GP </a:t>
-            </a:r>
-            <a:r>
-              <a:rPr lang="en-US" sz="2000" b="0" u="none" strike="noStrike" dirty="0" err="1">
-                <a:solidFill>
-                  <a:schemeClr val="dk1"/>
-                </a:solidFill>
-                <a:effectLst/>
-                <a:uFillTx/>
-                <a:latin typeface="Calibri"/>
-              </a:rPr>
-              <a:t>Maths</a:t>
-            </a:r>
-            <a:r>
-              <a:rPr lang="en-US" sz="2000" b="0" u="none" strike="noStrike" dirty="0">
-                <a:solidFill>
-                  <a:schemeClr val="dk1"/>
-                </a:solidFill>
-                <a:effectLst/>
-                <a:uFillTx/>
-                <a:latin typeface="Calibri"/>
-              </a:rPr>
-              <a:t> Contest — 1.38M students, grades 4–6, 2022–23 to 2024–25, 31 districts</a:t>
+              </a:rPr>
+              <a:t>• Dataset summary: Akshara GP Maths Contest — 1.38M students, grades 4–6, 2022–23 to 2024–25, 31 districts</a:t>
             </a:r>
             <a:endParaRPr lang="en-IN" sz="2000" b="0" u="none" strike="noStrike" dirty="0">
               <a:solidFill>
@@ -6828,13 +6773,12 @@
               </a:solidFill>
               <a:effectLst/>
               <a:uFillTx/>
-              <a:latin typeface="Arial"/>
             </a:endParaRPr>
           </a:p>
           <a:p>
-            <a:pPr defTabSz="457200">
-              <a:lnSpc>
-                <a:spcPct val="100000"/>
+            <a:pPr algn="just" defTabSz="457200">
+              <a:lnSpc>
+                <a:spcPct val="150000"/>
               </a:lnSpc>
             </a:pPr>
             <a:r>
@@ -6844,7 +6788,6 @@
                 </a:solidFill>
                 <a:effectLst/>
                 <a:uFillTx/>
-                <a:latin typeface="Calibri"/>
               </a:rPr>
               <a:t>• Variables: Q1–Q20 (0/1) → score; geography District, Block</a:t>
             </a:r>
@@ -6853,7 +6796,6 @@
                 <a:solidFill>
                   <a:schemeClr val="dk1"/>
                 </a:solidFill>
-                <a:latin typeface="Calibri"/>
               </a:rPr>
               <a:t>, </a:t>
             </a:r>
@@ -6864,7 +6806,6 @@
                 </a:solidFill>
                 <a:effectLst/>
                 <a:uFillTx/>
-                <a:latin typeface="Calibri"/>
               </a:rPr>
               <a:t>Cluster</a:t>
             </a:r>
@@ -6873,7 +6814,6 @@
                 <a:solidFill>
                   <a:schemeClr val="dk1"/>
                 </a:solidFill>
-                <a:latin typeface="Calibri"/>
               </a:rPr>
               <a:t>, </a:t>
             </a:r>
@@ -6884,7 +6824,6 @@
                 </a:solidFill>
                 <a:effectLst/>
                 <a:uFillTx/>
-                <a:latin typeface="Calibri"/>
               </a:rPr>
               <a:t>GP</a:t>
             </a:r>
@@ -6893,7 +6832,6 @@
                 <a:solidFill>
                   <a:schemeClr val="dk1"/>
                 </a:solidFill>
-                <a:latin typeface="Calibri"/>
               </a:rPr>
               <a:t>,</a:t>
             </a:r>
@@ -6904,7 +6842,6 @@
                 </a:solidFill>
                 <a:effectLst/>
                 <a:uFillTx/>
-                <a:latin typeface="Calibri"/>
               </a:rPr>
               <a:t> Gender</a:t>
             </a:r>
@@ -6914,13 +6851,12 @@
               </a:solidFill>
               <a:effectLst/>
               <a:uFillTx/>
-              <a:latin typeface="Arial"/>
             </a:endParaRPr>
           </a:p>
           <a:p>
-            <a:pPr defTabSz="457200">
-              <a:lnSpc>
-                <a:spcPct val="100000"/>
+            <a:pPr algn="just" defTabSz="457200">
+              <a:lnSpc>
+                <a:spcPct val="150000"/>
               </a:lnSpc>
             </a:pPr>
             <a:r>
@@ -6930,31 +6866,8 @@
                 </a:solidFill>
                 <a:effectLst/>
                 <a:uFillTx/>
-                <a:latin typeface="Calibri"/>
-              </a:rPr>
-              <a:t>• Context data: NFHS-5 (health/development) + SSLC 2025 Class-10 </a:t>
-            </a:r>
-            <a:r>
-              <a:rPr lang="en-US" sz="2000" b="0" u="none" strike="noStrike" dirty="0" err="1">
-                <a:solidFill>
-                  <a:schemeClr val="dk1"/>
-                </a:solidFill>
-                <a:effectLst/>
-                <a:uFillTx/>
-                <a:latin typeface="Calibri"/>
-              </a:rPr>
-              <a:t>maths</a:t>
-            </a:r>
-            <a:r>
-              <a:rPr lang="en-US" sz="2000" b="0" u="none" strike="noStrike" dirty="0">
-                <a:solidFill>
-                  <a:schemeClr val="dk1"/>
-                </a:solidFill>
-                <a:effectLst/>
-                <a:uFillTx/>
-                <a:latin typeface="Calibri"/>
-              </a:rPr>
-              <a:t> pass%</a:t>
+              </a:rPr>
+              <a:t>• Context data: NFHS-5 (health/development) + SSLC 2025 Class-10 maths pass%</a:t>
             </a:r>
             <a:endParaRPr lang="en-IN" sz="2000" b="0" u="none" strike="noStrike" dirty="0">
               <a:solidFill>
@@ -6962,13 +6875,12 @@
               </a:solidFill>
               <a:effectLst/>
               <a:uFillTx/>
-              <a:latin typeface="Arial"/>
             </a:endParaRPr>
           </a:p>
           <a:p>
-            <a:pPr defTabSz="457200">
-              <a:lnSpc>
-                <a:spcPct val="100000"/>
+            <a:pPr algn="just" defTabSz="457200">
+              <a:lnSpc>
+                <a:spcPct val="150000"/>
               </a:lnSpc>
             </a:pPr>
             <a:r>
@@ -6978,7 +6890,6 @@
                 </a:solidFill>
                 <a:effectLst/>
                 <a:uFillTx/>
-                <a:latin typeface="Calibri"/>
               </a:rPr>
               <a:t>• Cleaning &amp; assumptions: Composite GP key, dynamic competency-header detection; NFHS/SSLC links are district-level</a:t>
             </a:r>
@@ -6988,7 +6899,6 @@
               </a:solidFill>
               <a:effectLst/>
               <a:uFillTx/>
-              <a:latin typeface="Arial"/>
             </a:endParaRPr>
           </a:p>
         </p:txBody>
@@ -7119,7 +7029,7 @@
         <p:spPr>
           <a:xfrm>
             <a:off x="731519" y="1097280"/>
-            <a:ext cx="10553007" cy="1475873"/>
+            <a:ext cx="10553007" cy="2125410"/>
           </a:xfrm>
           <a:prstGeom prst="rect">
             <a:avLst/>
@@ -7149,7 +7059,7 @@
           <a:p>
             <a:pPr algn="just" defTabSz="457200">
               <a:lnSpc>
-                <a:spcPct val="100000"/>
+                <a:spcPct val="150000"/>
               </a:lnSpc>
             </a:pPr>
             <a:r>
@@ -7170,7 +7080,7 @@
           <a:p>
             <a:pPr algn="just" defTabSz="457200">
               <a:lnSpc>
-                <a:spcPct val="100000"/>
+                <a:spcPct val="150000"/>
               </a:lnSpc>
             </a:pPr>
             <a:r>
@@ -7194,7 +7104,7 @@
           <a:p>
             <a:pPr algn="just" defTabSz="457200">
               <a:lnSpc>
-                <a:spcPct val="100000"/>
+                <a:spcPct val="150000"/>
               </a:lnSpc>
             </a:pPr>
             <a:r>
@@ -7218,7 +7128,7 @@
           <a:p>
             <a:pPr algn="just" defTabSz="457200">
               <a:lnSpc>
-                <a:spcPct val="100000"/>
+                <a:spcPct val="150000"/>
               </a:lnSpc>
             </a:pPr>
             <a:r>
@@ -7229,17 +7139,7 @@
                 <a:effectLst/>
                 <a:uFillTx/>
               </a:rPr>
-              <a:t>• Validation: reproducible (seed 42); accuracy aggregated </a:t>
-            </a:r>
-            <a:r>
-              <a:rPr lang="en-US" b="0" u="none" strike="noStrike">
-                <a:solidFill>
-                  <a:schemeClr val="dk1"/>
-                </a:solidFill>
-                <a:effectLst/>
-                <a:uFillTx/>
-              </a:rPr>
-              <a:t>to NFHS</a:t>
+              <a:t>• Validation: reproducible (seed 42); accuracy aggregated to NFHS</a:t>
             </a:r>
             <a:endParaRPr lang="en-IN" b="0" u="none" strike="noStrike" dirty="0">
               <a:solidFill>
@@ -7376,8 +7276,8 @@
         </p:nvSpPr>
         <p:spPr>
           <a:xfrm>
-            <a:off x="731519" y="1097280"/>
-            <a:ext cx="10178935" cy="1629762"/>
+            <a:off x="731520" y="1097280"/>
+            <a:ext cx="5852160" cy="3274827"/>
           </a:xfrm>
           <a:prstGeom prst="rect">
             <a:avLst/>
@@ -7405,9 +7305,9 @@
           </a:bodyPr>
           <a:lstStyle/>
           <a:p>
-            <a:pPr defTabSz="457200">
-              <a:lnSpc>
-                <a:spcPct val="100000"/>
+            <a:pPr algn="just" defTabSz="457200">
+              <a:lnSpc>
+                <a:spcPct val="150000"/>
               </a:lnSpc>
             </a:pPr>
             <a:r>
@@ -7417,7 +7317,6 @@
                 </a:solidFill>
                 <a:effectLst/>
                 <a:uFillTx/>
-                <a:latin typeface="Calibri"/>
               </a:rPr>
               <a:t>• Finding: Overall accuracy ~53%, flat across grades 4/5/6, and declining year-on-year</a:t>
             </a:r>
@@ -7427,13 +7326,12 @@
               </a:solidFill>
               <a:effectLst/>
               <a:uFillTx/>
-              <a:latin typeface="Arial"/>
             </a:endParaRPr>
           </a:p>
           <a:p>
-            <a:pPr defTabSz="457200">
-              <a:lnSpc>
-                <a:spcPct val="100000"/>
+            <a:pPr algn="just" defTabSz="457200">
+              <a:lnSpc>
+                <a:spcPct val="150000"/>
               </a:lnSpc>
             </a:pPr>
             <a:r>
@@ -7443,119 +7341,8 @@
                 </a:solidFill>
                 <a:effectLst/>
                 <a:uFillTx/>
-                <a:latin typeface="Calibri"/>
-              </a:rPr>
-              <a:t>• Evidence: Kalyana-Karnataka belt (</a:t>
-            </a:r>
-            <a:r>
-              <a:rPr lang="en-US" sz="2000" b="0" u="none" strike="noStrike" dirty="0" err="1">
-                <a:solidFill>
-                  <a:schemeClr val="dk1"/>
-                </a:solidFill>
-                <a:effectLst/>
-                <a:uFillTx/>
-                <a:latin typeface="Calibri"/>
-              </a:rPr>
-              <a:t>kalaburgi</a:t>
-            </a:r>
-            <a:r>
-              <a:rPr lang="en-US" sz="2000" b="0" u="none" strike="noStrike" dirty="0">
-                <a:solidFill>
-                  <a:schemeClr val="dk1"/>
-                </a:solidFill>
-                <a:effectLst/>
-                <a:uFillTx/>
-                <a:latin typeface="Calibri"/>
-              </a:rPr>
-              <a:t>, </a:t>
-            </a:r>
-            <a:r>
-              <a:rPr lang="en-US" sz="2000" b="0" u="none" strike="noStrike" dirty="0" err="1">
-                <a:solidFill>
-                  <a:schemeClr val="dk1"/>
-                </a:solidFill>
-                <a:effectLst/>
-                <a:uFillTx/>
-                <a:latin typeface="Calibri"/>
-              </a:rPr>
-              <a:t>raichur</a:t>
-            </a:r>
-            <a:r>
-              <a:rPr lang="en-US" sz="2000" b="0" u="none" strike="noStrike" dirty="0">
-                <a:solidFill>
-                  <a:schemeClr val="dk1"/>
-                </a:solidFill>
-                <a:effectLst/>
-                <a:uFillTx/>
-                <a:latin typeface="Calibri"/>
-              </a:rPr>
-              <a:t>, bidar, </a:t>
-            </a:r>
-            <a:r>
-              <a:rPr lang="en-US" sz="2000" b="0" u="none" strike="noStrike" dirty="0" err="1">
-                <a:solidFill>
-                  <a:schemeClr val="dk1"/>
-                </a:solidFill>
-                <a:effectLst/>
-                <a:uFillTx/>
-                <a:latin typeface="Calibri"/>
-              </a:rPr>
-              <a:t>ballari</a:t>
-            </a:r>
-            <a:r>
-              <a:rPr lang="en-US" sz="2000" b="0" u="none" strike="noStrike" dirty="0">
-                <a:solidFill>
-                  <a:schemeClr val="dk1"/>
-                </a:solidFill>
-                <a:effectLst/>
-                <a:uFillTx/>
-                <a:latin typeface="Calibri"/>
-              </a:rPr>
-              <a:t>) uniformly low; </a:t>
-            </a:r>
-            <a:r>
-              <a:rPr lang="en-US" sz="2000" b="0" u="none" strike="noStrike" dirty="0" err="1">
-                <a:solidFill>
-                  <a:schemeClr val="dk1"/>
-                </a:solidFill>
-                <a:effectLst/>
-                <a:uFillTx/>
-                <a:latin typeface="Calibri"/>
-              </a:rPr>
-              <a:t>dakshina</a:t>
-            </a:r>
-            <a:r>
-              <a:rPr lang="en-US" sz="2000" b="0" u="none" strike="noStrike" dirty="0">
-                <a:solidFill>
-                  <a:schemeClr val="dk1"/>
-                </a:solidFill>
-                <a:effectLst/>
-                <a:uFillTx/>
-                <a:latin typeface="Calibri"/>
-              </a:rPr>
-              <a:t> </a:t>
-            </a:r>
-            <a:r>
-              <a:rPr lang="en-US" sz="2000" b="0" u="none" strike="noStrike" dirty="0" err="1">
-                <a:solidFill>
-                  <a:schemeClr val="dk1"/>
-                </a:solidFill>
-                <a:effectLst/>
-                <a:uFillTx/>
-                <a:latin typeface="Calibri"/>
-              </a:rPr>
-              <a:t>kannada</a:t>
-            </a:r>
-            <a:r>
-              <a:rPr lang="en-US" sz="2000" b="0" u="none" strike="noStrike" dirty="0">
-                <a:solidFill>
-                  <a:schemeClr val="dk1"/>
-                </a:solidFill>
-                <a:effectLst/>
-                <a:uFillTx/>
-                <a:latin typeface="Calibri"/>
-              </a:rPr>
-              <a:t> consistently high</a:t>
+              </a:rPr>
+              <a:t>• Evidence: Kalyana-Karnataka belt (Kalaburgi, Raichur, Bidar, Ballari) uniformly low; Dakshina Kannada consistently high</a:t>
             </a:r>
             <a:endParaRPr lang="en-IN" sz="2000" b="0" u="none" strike="noStrike" dirty="0">
               <a:solidFill>
@@ -7563,13 +7350,12 @@
               </a:solidFill>
               <a:effectLst/>
               <a:uFillTx/>
-              <a:latin typeface="Arial"/>
             </a:endParaRPr>
           </a:p>
           <a:p>
-            <a:pPr defTabSz="457200">
-              <a:lnSpc>
-                <a:spcPct val="100000"/>
+            <a:pPr algn="just" defTabSz="457200">
+              <a:lnSpc>
+                <a:spcPct val="150000"/>
               </a:lnSpc>
             </a:pPr>
             <a:r>
@@ -7579,7 +7365,6 @@
                 </a:solidFill>
                 <a:effectLst/>
                 <a:uFillTx/>
-                <a:latin typeface="Calibri"/>
               </a:rPr>
               <a:t>• Interpretation: Variation is between districts, not within → a district-targeted response fits the data</a:t>
             </a:r>
@@ -7589,7 +7374,6 @@
               </a:solidFill>
               <a:effectLst/>
               <a:uFillTx/>
-              <a:latin typeface="Arial"/>
             </a:endParaRPr>
           </a:p>
         </p:txBody>
@@ -7622,6 +7406,64 @@
             <a:r>
               <a:rPr lang="en-US" sz="1000" dirty="0"/>
               <a:t>Evaluation: Depth of analysis | Policy relevance | Cross-dataset analysis | Innovation | Clarity of insights | Visualisation &amp; presentation</a:t>
+            </a:r>
+          </a:p>
+        </p:txBody>
+      </p:sp>
+      <p:pic>
+        <p:nvPicPr>
+          <p:cNvPr id="71" name="Picture 70" descr="b1_district_accuracy.png"/>
+          <p:cNvPicPr>
+            <a:picLocks noChangeAspect="1"/>
+          </p:cNvPicPr>
+          <p:nvPr/>
+        </p:nvPicPr>
+        <p:blipFill>
+          <a:blip r:embed="rId2"/>
+          <a:stretch>
+            <a:fillRect/>
+          </a:stretch>
+        </p:blipFill>
+        <p:spPr>
+          <a:xfrm>
+            <a:off x="7453988" y="1050120"/>
+            <a:ext cx="3701332" cy="4480560"/>
+          </a:xfrm>
+          <a:prstGeom prst="rect">
+            <a:avLst/>
+          </a:prstGeom>
+        </p:spPr>
+      </p:pic>
+      <p:sp>
+        <p:nvSpPr>
+          <p:cNvPr id="72" name="TextBox 71"/>
+          <p:cNvSpPr txBox="1"/>
+          <p:nvPr/>
+        </p:nvSpPr>
+        <p:spPr>
+          <a:xfrm>
+            <a:off x="6949440" y="5715000"/>
+            <a:ext cx="4937760" cy="640080"/>
+          </a:xfrm>
+          <a:prstGeom prst="rect">
+            <a:avLst/>
+          </a:prstGeom>
+          <a:noFill/>
+        </p:spPr>
+        <p:txBody>
+          <a:bodyPr wrap="square">
+            <a:spAutoFit/>
+          </a:bodyPr>
+          <a:lstStyle/>
+          <a:p>
+            <a:pPr algn="l"/>
+            <a:r>
+              <a:rPr sz="1000" i="1">
+                <a:solidFill>
+                  <a:srgbClr val="555555"/>
+                </a:solidFill>
+              </a:rPr>
+              <a:t>Blue = above the 53.1% state average, red = below. Top vs bottom differ ~30 points: the achievement gap is mainly BETWEEN districts, not within a grade.</a:t>
             </a:r>
           </a:p>
         </p:txBody>
@@ -7719,8 +7561,8 @@
         </p:nvSpPr>
         <p:spPr>
           <a:xfrm>
-            <a:off x="731519" y="1097280"/>
-            <a:ext cx="10023071" cy="1937538"/>
+            <a:off x="731520" y="1097280"/>
+            <a:ext cx="5394960" cy="4198157"/>
           </a:xfrm>
           <a:prstGeom prst="rect">
             <a:avLst/>
@@ -7748,9 +7590,9 @@
           </a:bodyPr>
           <a:lstStyle/>
           <a:p>
-            <a:pPr defTabSz="457200">
-              <a:lnSpc>
-                <a:spcPct val="100000"/>
+            <a:pPr algn="just" defTabSz="457200">
+              <a:lnSpc>
+                <a:spcPct val="150000"/>
               </a:lnSpc>
             </a:pPr>
             <a:r>
@@ -7760,20 +7602,18 @@
                 </a:solidFill>
                 <a:effectLst/>
                 <a:uFillTx/>
-                <a:latin typeface="Calibri"/>
-              </a:rPr>
-              <a:t>• Finding: District </a:t>
-            </a:r>
-            <a:r>
-              <a:rPr lang="en-US" sz="2000" b="0" u="none" strike="noStrike" dirty="0" err="1">
-                <a:solidFill>
-                  <a:schemeClr val="dk1"/>
-                </a:solidFill>
-                <a:effectLst/>
-                <a:uFillTx/>
-                <a:latin typeface="Calibri"/>
-              </a:rPr>
-              <a:t>maths</a:t>
+              </a:rPr>
+              <a:t>• </a:t>
+            </a:r>
+            <a:r>
+              <a:rPr lang="en-US" sz="2000" b="1" u="none" strike="noStrike" dirty="0">
+                <a:solidFill>
+                  <a:schemeClr val="dk1"/>
+                </a:solidFill>
+                <a:effectLst/>
+                <a:uFillTx/>
+              </a:rPr>
+              <a:t>Finding: </a:t>
             </a:r>
             <a:r>
               <a:rPr lang="en-US" sz="2000" b="0" u="none" strike="noStrike" dirty="0">
@@ -7782,9 +7622,8 @@
                 </a:solidFill>
                 <a:effectLst/>
                 <a:uFillTx/>
-                <a:latin typeface="Calibri"/>
-              </a:rPr>
-              <a:t> gaps are structural, they track development and persist to the Class-10 board</a:t>
+              </a:rPr>
+              <a:t>District maths gaps are structural, they track development and persist to the Class-10 board</a:t>
             </a:r>
             <a:endParaRPr lang="en-IN" sz="2000" b="0" u="none" strike="noStrike" dirty="0">
               <a:solidFill>
@@ -7792,13 +7631,12 @@
               </a:solidFill>
               <a:effectLst/>
               <a:uFillTx/>
-              <a:latin typeface="Arial"/>
             </a:endParaRPr>
           </a:p>
           <a:p>
-            <a:pPr defTabSz="457200">
-              <a:lnSpc>
-                <a:spcPct val="100000"/>
+            <a:pPr algn="just" defTabSz="457200">
+              <a:lnSpc>
+                <a:spcPct val="150000"/>
               </a:lnSpc>
             </a:pPr>
             <a:r>
@@ -7808,20 +7646,18 @@
                 </a:solidFill>
                 <a:effectLst/>
                 <a:uFillTx/>
-                <a:latin typeface="Calibri"/>
-              </a:rPr>
-              <a:t>• Evidence: NFHS Spearman ~+0.6 (female schooling, sanitation, women's 10-yr schooling); SSLC </a:t>
-            </a:r>
-            <a:r>
-              <a:rPr lang="en-US" sz="2000" b="0" u="none" strike="noStrike" dirty="0" err="1">
-                <a:solidFill>
-                  <a:schemeClr val="dk1"/>
-                </a:solidFill>
-                <a:effectLst/>
-                <a:uFillTx/>
-                <a:latin typeface="Calibri"/>
-              </a:rPr>
-              <a:t>maths</a:t>
+              </a:rPr>
+              <a:t>• </a:t>
+            </a:r>
+            <a:r>
+              <a:rPr lang="en-US" sz="2000" b="1" u="none" strike="noStrike" dirty="0">
+                <a:solidFill>
+                  <a:schemeClr val="dk1"/>
+                </a:solidFill>
+                <a:effectLst/>
+                <a:uFillTx/>
+              </a:rPr>
+              <a:t>Evidence: </a:t>
             </a:r>
             <a:r>
               <a:rPr lang="en-US" sz="2000" b="0" u="none" strike="noStrike" dirty="0">
@@ -7830,31 +7666,8 @@
                 </a:solidFill>
                 <a:effectLst/>
                 <a:uFillTx/>
-                <a:latin typeface="Calibri"/>
-              </a:rPr>
-              <a:t> pass% </a:t>
-            </a:r>
-            <a:r>
-              <a:rPr lang="en-US" sz="2000" b="0" u="none" strike="noStrike" dirty="0" err="1">
-                <a:solidFill>
-                  <a:schemeClr val="dk1"/>
-                </a:solidFill>
-                <a:effectLst/>
-                <a:uFillTx/>
-                <a:latin typeface="Calibri"/>
-              </a:rPr>
-              <a:t>ρ</a:t>
-            </a:r>
-            <a:r>
-              <a:rPr lang="en-US" sz="2000" b="0" u="none" strike="noStrike" dirty="0">
-                <a:solidFill>
-                  <a:schemeClr val="dk1"/>
-                </a:solidFill>
-                <a:effectLst/>
-                <a:uFillTx/>
-                <a:latin typeface="Calibri"/>
-              </a:rPr>
-              <a:t> = +0.57</a:t>
+              </a:rPr>
+              <a:t>NFHS Spearman ~+0.6 (female schooling, sanitation, women's 10-yr schooling); SSLC maths pass% ρ = +0.57</a:t>
             </a:r>
             <a:endParaRPr lang="en-IN" sz="2000" b="0" u="none" strike="noStrike" dirty="0">
               <a:solidFill>
@@ -7862,13 +7675,12 @@
               </a:solidFill>
               <a:effectLst/>
               <a:uFillTx/>
-              <a:latin typeface="Arial"/>
             </a:endParaRPr>
           </a:p>
           <a:p>
-            <a:pPr defTabSz="457200">
-              <a:lnSpc>
-                <a:spcPct val="100000"/>
+            <a:pPr algn="just" defTabSz="457200">
+              <a:lnSpc>
+                <a:spcPct val="150000"/>
               </a:lnSpc>
             </a:pPr>
             <a:r>
@@ -7878,20 +7690,18 @@
                 </a:solidFill>
                 <a:effectLst/>
                 <a:uFillTx/>
-                <a:latin typeface="Calibri"/>
-              </a:rPr>
-              <a:t>• Implications: Early rural </a:t>
-            </a:r>
-            <a:r>
-              <a:rPr lang="en-US" sz="2000" b="0" u="none" strike="noStrike" dirty="0" err="1">
-                <a:solidFill>
-                  <a:schemeClr val="dk1"/>
-                </a:solidFill>
-                <a:effectLst/>
-                <a:uFillTx/>
-                <a:latin typeface="Calibri"/>
-              </a:rPr>
-              <a:t>maths</a:t>
+              </a:rPr>
+              <a:t>• </a:t>
+            </a:r>
+            <a:r>
+              <a:rPr lang="en-US" sz="2000" b="1" u="none" strike="noStrike" dirty="0">
+                <a:solidFill>
+                  <a:schemeClr val="dk1"/>
+                </a:solidFill>
+                <a:effectLst/>
+                <a:uFillTx/>
+              </a:rPr>
+              <a:t>Implications: </a:t>
             </a:r>
             <a:r>
               <a:rPr lang="en-US" sz="2000" b="0" u="none" strike="noStrike" dirty="0">
@@ -7900,9 +7710,8 @@
                 </a:solidFill>
                 <a:effectLst/>
                 <a:uFillTx/>
-                <a:latin typeface="Calibri"/>
-              </a:rPr>
-              <a:t> gaps foreshadow board outcomes ~4–6 years later in the same districts</a:t>
+              </a:rPr>
+              <a:t>Early rural maths gaps foreshadow board outcomes ~4–6 years later in the same districts</a:t>
             </a:r>
             <a:endParaRPr lang="en-IN" sz="2000" b="0" u="none" strike="noStrike" dirty="0">
               <a:solidFill>
@@ -7910,7 +7719,6 @@
               </a:solidFill>
               <a:effectLst/>
               <a:uFillTx/>
-              <a:latin typeface="Arial"/>
             </a:endParaRPr>
           </a:p>
         </p:txBody>
@@ -7943,6 +7751,80 @@
             <a:r>
               <a:rPr lang="en-US" sz="1000" dirty="0"/>
               <a:t>Evaluation: Depth of analysis | Policy relevance | Cross-dataset analysis | Innovation | Clarity of insights | Visualisation &amp; presentation</a:t>
+            </a:r>
+          </a:p>
+        </p:txBody>
+      </p:sp>
+      <p:pic>
+        <p:nvPicPr>
+          <p:cNvPr id="73" name="Picture 72" descr="b4_sslc_scatter.png"/>
+          <p:cNvPicPr>
+            <a:picLocks noChangeAspect="1"/>
+          </p:cNvPicPr>
+          <p:nvPr/>
+        </p:nvPicPr>
+        <p:blipFill>
+          <a:blip r:embed="rId2"/>
+          <a:stretch>
+            <a:fillRect/>
+          </a:stretch>
+        </p:blipFill>
+        <p:spPr>
+          <a:xfrm>
+            <a:off x="6446520" y="1164427"/>
+            <a:ext cx="5394960" cy="3923607"/>
+          </a:xfrm>
+          <a:prstGeom prst="rect">
+            <a:avLst/>
+          </a:prstGeom>
+        </p:spPr>
+      </p:pic>
+      <p:sp>
+        <p:nvSpPr>
+          <p:cNvPr id="74" name="TextBox 73"/>
+          <p:cNvSpPr txBox="1"/>
+          <p:nvPr/>
+        </p:nvSpPr>
+        <p:spPr>
+          <a:xfrm>
+            <a:off x="6446520" y="5209452"/>
+            <a:ext cx="5394960" cy="640080"/>
+          </a:xfrm>
+          <a:prstGeom prst="rect">
+            <a:avLst/>
+          </a:prstGeom>
+          <a:noFill/>
+        </p:spPr>
+        <p:txBody>
+          <a:bodyPr wrap="square">
+            <a:spAutoFit/>
+          </a:bodyPr>
+          <a:lstStyle/>
+          <a:p>
+            <a:pPr algn="l"/>
+            <a:r>
+              <a:rPr sz="1000" i="1" dirty="0">
+                <a:solidFill>
+                  <a:srgbClr val="555555"/>
+                </a:solidFill>
+              </a:rPr>
+              <a:t>Each dot = a district. Up-right trend (Spearman rho +0.57) means the Grade 4-6 contest agrees with the independent Class-10 board exam 4-6 years later. </a:t>
+            </a:r>
+            <a:r>
+              <a:rPr sz="1000" i="1" dirty="0" err="1">
+                <a:solidFill>
+                  <a:srgbClr val="555555"/>
+                </a:solidFill>
+              </a:rPr>
+              <a:t>Colour</a:t>
+            </a:r>
+            <a:r>
+              <a:rPr sz="1000" i="1" dirty="0">
+                <a:solidFill>
+                  <a:srgbClr val="555555"/>
+                </a:solidFill>
+              </a:rPr>
+              <a:t> = SSLC girls-boys gap.</a:t>
             </a:r>
           </a:p>
         </p:txBody>
@@ -8041,7 +7923,7 @@
         <p:spPr>
           <a:xfrm>
             <a:off x="731520" y="1097280"/>
-            <a:ext cx="5486040" cy="4571640"/>
+            <a:ext cx="5091211" cy="5121487"/>
           </a:xfrm>
           <a:prstGeom prst="rect">
             <a:avLst/>
@@ -8064,113 +7946,60 @@
           <a:fontRef idx="minor"/>
         </p:style>
         <p:txBody>
-          <a:bodyPr wrap="none" lIns="90000" tIns="45000" rIns="90000" bIns="45000" anchor="t">
+          <a:bodyPr wrap="square" lIns="90000" tIns="45000" rIns="90000" bIns="45000" anchor="t">
             <a:spAutoFit/>
           </a:bodyPr>
           <a:lstStyle/>
           <a:p>
-            <a:pPr defTabSz="457200">
-              <a:lnSpc>
-                <a:spcPct val="100000"/>
-              </a:lnSpc>
-            </a:pPr>
-            <a:r>
-              <a:rPr lang="en-US" sz="2000" b="0" u="none" strike="noStrike">
-                <a:solidFill>
-                  <a:schemeClr val="dk1"/>
-                </a:solidFill>
-                <a:effectLst/>
-                <a:uFillTx/>
-                <a:latin typeface="Calibri"/>
-              </a:rPr>
+            <a:pPr algn="just" defTabSz="457200">
+              <a:lnSpc>
+                <a:spcPct val="150000"/>
+              </a:lnSpc>
+            </a:pPr>
+            <a:r>
+              <a:rPr sz="2000" dirty="0"/>
               <a:t>• Model: OLS of district accuracy on a standardized development index (n = 31 districts)</a:t>
             </a:r>
-            <a:endParaRPr lang="en-IN" sz="2000" b="0" u="none" strike="noStrike">
+            <a:endParaRPr lang="en-IN" sz="2000" b="0" u="none" strike="noStrike" dirty="0">
               <a:solidFill>
                 <a:srgbClr val="000000"/>
               </a:solidFill>
               <a:effectLst/>
               <a:uFillTx/>
-              <a:latin typeface="Arial"/>
             </a:endParaRPr>
           </a:p>
           <a:p>
-            <a:pPr defTabSz="457200">
-              <a:lnSpc>
-                <a:spcPct val="100000"/>
-              </a:lnSpc>
-            </a:pPr>
-            <a:r>
-              <a:rPr lang="en-US" sz="2000" b="0" u="none" strike="noStrike">
-                <a:solidFill>
-                  <a:schemeClr val="dk1"/>
-                </a:solidFill>
-                <a:effectLst/>
-                <a:uFillTx/>
-                <a:latin typeface="Calibri"/>
-              </a:rPr>
+            <a:pPr algn="just">
+              <a:lnSpc>
+                <a:spcPct val="150000"/>
+              </a:lnSpc>
+            </a:pPr>
+            <a:r>
+              <a:rPr sz="2000" dirty="0"/>
               <a:t>• Metrics: R² = 0.43; +1 SD of the development index ≈ +5.9 pp accuracy</a:t>
             </a:r>
-            <a:endParaRPr lang="en-IN" sz="2000" b="0" u="none" strike="noStrike">
-              <a:solidFill>
-                <a:srgbClr val="000000"/>
-              </a:solidFill>
-              <a:effectLst/>
-              <a:uFillTx/>
-              <a:latin typeface="Arial"/>
-            </a:endParaRPr>
-          </a:p>
-          <a:p>
-            <a:pPr defTabSz="457200">
-              <a:lnSpc>
-                <a:spcPct val="100000"/>
-              </a:lnSpc>
-            </a:pPr>
-            <a:r>
-              <a:rPr lang="en-US" sz="2000" b="0" u="none" strike="noStrike">
-                <a:solidFill>
-                  <a:schemeClr val="dk1"/>
-                </a:solidFill>
-                <a:effectLst/>
-                <a:uFillTx/>
-                <a:latin typeface="Calibri"/>
-              </a:rPr>
-              <a:t>• Important predictors: female_ever_school, improved_sanitation, women_10yr_schooling</a:t>
-            </a:r>
-            <a:endParaRPr lang="en-IN" sz="2000" b="0" u="none" strike="noStrike">
-              <a:solidFill>
-                <a:srgbClr val="000000"/>
-              </a:solidFill>
-              <a:effectLst/>
-              <a:uFillTx/>
-              <a:latin typeface="Arial"/>
-            </a:endParaRPr>
-          </a:p>
-          <a:p>
-            <a:pPr defTabSz="457200">
-              <a:lnSpc>
-                <a:spcPct val="100000"/>
-              </a:lnSpc>
-            </a:pPr>
-            <a:r>
-              <a:rPr lang="en-US" sz="2000" b="0" u="none" strike="noStrike">
-                <a:solidFill>
-                  <a:schemeClr val="dk1"/>
-                </a:solidFill>
-                <a:effectLst/>
-                <a:uFillTx/>
-                <a:latin typeface="Calibri"/>
-              </a:rPr>
-              <a:t>• Early warning: Residual gap flags under-performers — chitradurga −12.8 pp, davanagere, ballari</a:t>
-            </a:r>
-            <a:endParaRPr lang="en-IN" sz="2000" b="0" u="none" strike="noStrike">
-              <a:solidFill>
-                <a:srgbClr val="000000"/>
-              </a:solidFill>
-              <a:effectLst/>
-              <a:uFillTx/>
-              <a:latin typeface="Arial"/>
-            </a:endParaRPr>
+          </a:p>
+          <a:p>
+            <a:pPr algn="just">
+              <a:lnSpc>
+                <a:spcPct val="150000"/>
+              </a:lnSpc>
+            </a:pPr>
+            <a:r>
+              <a:rPr sz="2000" dirty="0"/>
+              <a:t>• Inputs: female schooling (6+), household sanitation, women's 10-yr schooling -&gt; one development index</a:t>
+            </a:r>
+          </a:p>
+          <a:p>
+            <a:pPr algn="just">
+              <a:lnSpc>
+                <a:spcPct val="150000"/>
+              </a:lnSpc>
+            </a:pPr>
+            <a:r>
+              <a:rPr sz="2000" dirty="0"/>
+              <a:t>• Under-performers (actual &lt; predicted): chitradurga -12.8 pp, kodagu -10.1, davanagere -8.6</a:t>
+            </a:r>
           </a:p>
         </p:txBody>
       </p:sp>
@@ -8202,6 +8031,64 @@
             <a:r>
               <a:rPr lang="en-US" sz="1000" dirty="0"/>
               <a:t>Evaluation: Depth of analysis | Policy relevance | Cross-dataset analysis | Innovation | Clarity of insights | Visualisation &amp; presentation</a:t>
+            </a:r>
+          </a:p>
+        </p:txBody>
+      </p:sp>
+      <p:pic>
+        <p:nvPicPr>
+          <p:cNvPr id="75" name="Picture 74" descr="b3_district_gap.png"/>
+          <p:cNvPicPr>
+            <a:picLocks noChangeAspect="1"/>
+          </p:cNvPicPr>
+          <p:nvPr/>
+        </p:nvPicPr>
+        <p:blipFill>
+          <a:blip r:embed="rId2"/>
+          <a:stretch>
+            <a:fillRect/>
+          </a:stretch>
+        </p:blipFill>
+        <p:spPr>
+          <a:xfrm>
+            <a:off x="6263640" y="1280160"/>
+            <a:ext cx="5394960" cy="4315968"/>
+          </a:xfrm>
+          <a:prstGeom prst="rect">
+            <a:avLst/>
+          </a:prstGeom>
+        </p:spPr>
+      </p:pic>
+      <p:sp>
+        <p:nvSpPr>
+          <p:cNvPr id="76" name="TextBox 75"/>
+          <p:cNvSpPr txBox="1"/>
+          <p:nvPr/>
+        </p:nvSpPr>
+        <p:spPr>
+          <a:xfrm>
+            <a:off x="6263640" y="5632704"/>
+            <a:ext cx="5394960" cy="640080"/>
+          </a:xfrm>
+          <a:prstGeom prst="rect">
+            <a:avLst/>
+          </a:prstGeom>
+          <a:noFill/>
+        </p:spPr>
+        <p:txBody>
+          <a:bodyPr wrap="square">
+            <a:spAutoFit/>
+          </a:bodyPr>
+          <a:lstStyle/>
+          <a:p>
+            <a:pPr algn="l"/>
+            <a:r>
+              <a:rPr sz="1000" i="1">
+                <a:solidFill>
+                  <a:srgbClr val="555555"/>
+                </a:solidFill>
+              </a:rPr>
+              <a:t>Gap = actual - development-predicted accuracy. Green districts beat their context; red fall short (a fair 'look here' list). * = NFHS proxy district.</a:t>
             </a:r>
           </a:p>
         </p:txBody>
@@ -8353,7 +8240,7 @@
         <p:spPr>
           <a:xfrm>
             <a:off x="731520" y="1097280"/>
-            <a:ext cx="5486040" cy="4571640"/>
+            <a:ext cx="5553666" cy="2349511"/>
           </a:xfrm>
           <a:prstGeom prst="rect">
             <a:avLst/>
@@ -8376,86 +8263,56 @@
           <a:fontRef idx="minor"/>
         </p:style>
         <p:txBody>
-          <a:bodyPr wrap="none" lIns="90000" tIns="45000" rIns="90000" bIns="45000" anchor="t">
+          <a:bodyPr wrap="square" lIns="90000" tIns="45000" rIns="90000" bIns="45000" anchor="t">
             <a:spAutoFit/>
           </a:bodyPr>
           <a:lstStyle/>
           <a:p>
-            <a:pPr defTabSz="457200">
-              <a:lnSpc>
-                <a:spcPct val="100000"/>
-              </a:lnSpc>
-            </a:pPr>
-            <a:r>
-              <a:rPr lang="en-US" sz="2000" b="0" u="none" strike="noStrike">
-                <a:solidFill>
-                  <a:schemeClr val="dk1"/>
-                </a:solidFill>
-                <a:effectLst/>
-                <a:uFillTx/>
-                <a:latin typeface="Calibri"/>
-              </a:rPr>
-              <a:t>• Dashboard: outputs/figures/dashboard.html — interactive Plotly, runs offline</a:t>
-            </a:r>
-            <a:endParaRPr lang="en-IN" sz="2000" b="0" u="none" strike="noStrike">
+            <a:pPr algn="just" defTabSz="457200">
+              <a:lnSpc>
+                <a:spcPct val="150000"/>
+              </a:lnSpc>
+            </a:pPr>
+            <a:r>
+              <a:rPr lang="en-US" sz="2000" b="0" u="none" strike="noStrike" dirty="0">
+                <a:solidFill>
+                  <a:schemeClr val="dk1"/>
+                </a:solidFill>
+                <a:effectLst/>
+                <a:uFillTx/>
+              </a:rPr>
+              <a:t>• KPIs: 53.1% overall accuracy | 31 districts | SSLC ρ +0.57 | model R² 0.43</a:t>
+            </a:r>
+            <a:endParaRPr lang="en-IN" sz="2000" b="0" u="none" strike="noStrike" dirty="0">
               <a:solidFill>
                 <a:srgbClr val="000000"/>
               </a:solidFill>
               <a:effectLst/>
               <a:uFillTx/>
-              <a:latin typeface="Arial"/>
             </a:endParaRPr>
           </a:p>
           <a:p>
-            <a:pPr defTabSz="457200">
-              <a:lnSpc>
-                <a:spcPct val="100000"/>
-              </a:lnSpc>
-            </a:pPr>
-            <a:r>
-              <a:rPr lang="en-US" sz="2000" b="0" u="none" strike="noStrike">
-                <a:solidFill>
-                  <a:schemeClr val="dk1"/>
-                </a:solidFill>
-                <a:effectLst/>
-                <a:uFillTx/>
-                <a:latin typeface="Calibri"/>
-              </a:rPr>
-              <a:t>• KPIs: 53.1% overall accuracy | 31 districts | SSLC ρ +0.57 | model R² 0.43</a:t>
-            </a:r>
-            <a:endParaRPr lang="en-IN" sz="2000" b="0" u="none" strike="noStrike">
+            <a:pPr algn="just" defTabSz="457200">
+              <a:lnSpc>
+                <a:spcPct val="150000"/>
+              </a:lnSpc>
+            </a:pPr>
+            <a:r>
+              <a:rPr lang="en-US" sz="2000" b="0" u="none" strike="noStrike" dirty="0">
+                <a:solidFill>
+                  <a:schemeClr val="dk1"/>
+                </a:solidFill>
+                <a:effectLst/>
+                <a:uFillTx/>
+              </a:rPr>
+              <a:t>• Charts: grade/year trend, gender gap, NFHS correlation bars, SSLC scatter, district residual-gap ranking</a:t>
+            </a:r>
+            <a:endParaRPr lang="en-IN" sz="2000" b="0" u="none" strike="noStrike" dirty="0">
               <a:solidFill>
                 <a:srgbClr val="000000"/>
               </a:solidFill>
               <a:effectLst/>
               <a:uFillTx/>
-              <a:latin typeface="Arial"/>
-            </a:endParaRPr>
-          </a:p>
-          <a:p>
-            <a:pPr defTabSz="457200">
-              <a:lnSpc>
-                <a:spcPct val="100000"/>
-              </a:lnSpc>
-            </a:pPr>
-            <a:r>
-              <a:rPr lang="en-US" sz="2000" b="0" u="none" strike="noStrike">
-                <a:solidFill>
-                  <a:schemeClr val="dk1"/>
-                </a:solidFill>
-                <a:effectLst/>
-                <a:uFillTx/>
-                <a:latin typeface="Calibri"/>
-              </a:rPr>
-              <a:t>• Charts: grade/year trend, gender gap, NFHS correlation bars, SSLC scatter, district residual-gap ranking</a:t>
-            </a:r>
-            <a:endParaRPr lang="en-IN" sz="2000" b="0" u="none" strike="noStrike">
-              <a:solidFill>
-                <a:srgbClr val="000000"/>
-              </a:solidFill>
-              <a:effectLst/>
-              <a:uFillTx/>
-              <a:latin typeface="Arial"/>
             </a:endParaRPr>
           </a:p>
         </p:txBody>
@@ -8488,6 +8345,64 @@
             <a:r>
               <a:rPr lang="en-US" sz="1000" dirty="0"/>
               <a:t>Evaluation: Depth of analysis | Policy relevance | Cross-dataset analysis | Innovation | Clarity of insights | Visualisation &amp; presentation</a:t>
+            </a:r>
+          </a:p>
+        </p:txBody>
+      </p:sp>
+      <p:pic>
+        <p:nvPicPr>
+          <p:cNvPr id="78" name="Picture 77" descr="b2_nfhs_corr.png"/>
+          <p:cNvPicPr>
+            <a:picLocks noChangeAspect="1"/>
+          </p:cNvPicPr>
+          <p:nvPr/>
+        </p:nvPicPr>
+        <p:blipFill>
+          <a:blip r:embed="rId2"/>
+          <a:stretch>
+            <a:fillRect/>
+          </a:stretch>
+        </p:blipFill>
+        <p:spPr>
+          <a:xfrm>
+            <a:off x="6462813" y="1230057"/>
+            <a:ext cx="5362013" cy="3499419"/>
+          </a:xfrm>
+          <a:prstGeom prst="rect">
+            <a:avLst/>
+          </a:prstGeom>
+        </p:spPr>
+      </p:pic>
+      <p:sp>
+        <p:nvSpPr>
+          <p:cNvPr id="79" name="TextBox 78"/>
+          <p:cNvSpPr txBox="1"/>
+          <p:nvPr/>
+        </p:nvSpPr>
+        <p:spPr>
+          <a:xfrm>
+            <a:off x="6462813" y="4987863"/>
+            <a:ext cx="5669280" cy="640080"/>
+          </a:xfrm>
+          <a:prstGeom prst="rect">
+            <a:avLst/>
+          </a:prstGeom>
+          <a:noFill/>
+        </p:spPr>
+        <p:txBody>
+          <a:bodyPr wrap="square">
+            <a:spAutoFit/>
+          </a:bodyPr>
+          <a:lstStyle/>
+          <a:p>
+            <a:pPr algn="l"/>
+            <a:r>
+              <a:rPr sz="1000" i="1" dirty="0">
+                <a:solidFill>
+                  <a:srgbClr val="555555"/>
+                </a:solidFill>
+              </a:rPr>
+              <a:t>Spearman correlation of district accuracy with each NFHS-5 indicator, by grade. Positive bars (schooling, sanitation) help; negative bars (child marriage, stunting) are headwinds.</a:t>
             </a:r>
           </a:p>
         </p:txBody>
@@ -8639,7 +8554,7 @@
         <p:spPr>
           <a:xfrm>
             <a:off x="731520" y="1097280"/>
-            <a:ext cx="9711344" cy="1629762"/>
+            <a:ext cx="10125666" cy="1889833"/>
           </a:xfrm>
           <a:prstGeom prst="rect">
             <a:avLst/>
@@ -8667,9 +8582,9 @@
           </a:bodyPr>
           <a:lstStyle/>
           <a:p>
-            <a:pPr defTabSz="457200">
-              <a:lnSpc>
-                <a:spcPct val="100000"/>
+            <a:pPr algn="just" defTabSz="457200">
+              <a:lnSpc>
+                <a:spcPct val="150000"/>
               </a:lnSpc>
             </a:pPr>
             <a:r>
@@ -8679,7 +8594,6 @@
                 </a:solidFill>
                 <a:effectLst/>
                 <a:uFillTx/>
-                <a:latin typeface="Calibri"/>
               </a:rPr>
               <a:t>• Priority actions: Focus school-side support on negative-residual districts (they under-perform their development context)</a:t>
             </a:r>
@@ -8689,13 +8603,12 @@
               </a:solidFill>
               <a:effectLst/>
               <a:uFillTx/>
-              <a:latin typeface="Arial"/>
             </a:endParaRPr>
           </a:p>
           <a:p>
-            <a:pPr defTabSz="457200">
-              <a:lnSpc>
-                <a:spcPct val="100000"/>
+            <a:pPr algn="just" defTabSz="457200">
+              <a:lnSpc>
+                <a:spcPct val="150000"/>
               </a:lnSpc>
             </a:pPr>
             <a:r>
@@ -8705,7 +8618,6 @@
                 </a:solidFill>
                 <a:effectLst/>
                 <a:uFillTx/>
-                <a:latin typeface="Calibri"/>
               </a:rPr>
               <a:t>• Impact: Directs limited resources where health/development does not explain the gap</a:t>
             </a:r>
@@ -8715,13 +8627,12 @@
               </a:solidFill>
               <a:effectLst/>
               <a:uFillTx/>
-              <a:latin typeface="Arial"/>
             </a:endParaRPr>
           </a:p>
           <a:p>
-            <a:pPr defTabSz="457200">
-              <a:lnSpc>
-                <a:spcPct val="100000"/>
+            <a:pPr algn="just" defTabSz="457200">
+              <a:lnSpc>
+                <a:spcPct val="150000"/>
               </a:lnSpc>
             </a:pPr>
             <a:r>
@@ -8731,7 +8642,6 @@
                 </a:solidFill>
                 <a:effectLst/>
                 <a:uFillTx/>
-                <a:latin typeface="Calibri"/>
               </a:rPr>
               <a:t>• Feasibility: Uses only public district data; one reproducible pipeline reruns each contest year</a:t>
             </a:r>
@@ -8741,7 +8651,6 @@
               </a:solidFill>
               <a:effectLst/>
               <a:uFillTx/>
-              <a:latin typeface="Arial"/>
             </a:endParaRPr>
           </a:p>
         </p:txBody>
